--- a/docs/교재/실전반/04일차/실전반_04일차.pptx
+++ b/docs/교재/실전반/04일차/실전반_04일차.pptx
@@ -1976,7 +1976,7 @@
           <a:lstStyle/>
           <a:p>
             <a:r>
-              <a:t>그렇게 적어 둔 지침을 에이전트 스킬, Agent Skill이라고 합니다. 스킬의 본체는 SKILL.md라는 파일 하나이고, 스킬 이름과 같은 폴더 안에 놓입니다. HYD에서 쿨러 과열 경보에 쓰는 스킬의 이름은 cooling-emergency-response입니다.</a:t>
+              <a:t>그렇게 적어 둔 지침을 에이전트 스킬, Agent Skill이라고 합니다. 스킬의 본체는 SKILL.md라는 파일 하나이고, 스킬 이름과 같은 폴더 안에 놓입니다. HYD에서 쿨러 성능 저하 경보에 쓰는 스킬의 이름은 cooling-emergency-response입니다.</a:t>
             </a:r>
           </a:p>
         </p:txBody>
@@ -9542,7 +9542,7 @@
       </p:sp>
       <p:pic>
         <p:nvPicPr>
-          <p:cNvPr id="6" name="삽화:세요소.svg" descr="illust_7435296956249524559_1791735250.png"/>
+          <p:cNvPr id="6" name="삽화:세요소.svg" descr="illust_9152849561309581649_1791735250.png"/>
           <p:cNvPicPr>
             <a:picLocks noChangeAspect="1"/>
           </p:cNvPicPr>
@@ -11664,7 +11664,7 @@
       </p:sp>
       <p:pic>
         <p:nvPicPr>
-          <p:cNvPr id="6" name="삽화:실행고리.svg" descr="illust_6014198067275793459_1791735250.png"/>
+          <p:cNvPr id="6" name="삽화:실행고리.svg" descr="illust_857333931083116806_1791735250.png"/>
           <p:cNvPicPr>
             <a:picLocks noChangeAspect="1"/>
           </p:cNvPicPr>
@@ -16349,7 +16349,7 @@
       </p:sp>
       <p:pic>
         <p:nvPicPr>
-          <p:cNvPr id="6" name="삽화:정보원.svg" descr="illust_4625031545110011487_1791735250.png"/>
+          <p:cNvPr id="6" name="삽화:정보원.svg" descr="illust_1613148653478596688_1791735250.png"/>
           <p:cNvPicPr>
             <a:picLocks noChangeAspect="1"/>
           </p:cNvPicPr>
@@ -20875,7 +20875,7 @@
       </p:sp>
       <p:pic>
         <p:nvPicPr>
-          <p:cNvPr id="6" name="삽화:멈춤조건.svg" descr="illust_8798636293324463071_1791735250.png"/>
+          <p:cNvPr id="6" name="삽화:멈춤조건.svg" descr="illust_6060296691415103801_1791735250.png"/>
           <p:cNvPicPr>
             <a:picLocks noChangeAspect="1"/>
           </p:cNvPicPr>
@@ -22341,7 +22341,7 @@
       </p:sp>
       <p:pic>
         <p:nvPicPr>
-          <p:cNvPr id="6" name="삽화:기록한줄.svg" descr="illust_1182785529526408849_1791735250.png"/>
+          <p:cNvPr id="6" name="삽화:기록한줄.svg" descr="illust_3268075004767251925_1791735250.png"/>
           <p:cNvPicPr>
             <a:picLocks noChangeAspect="1"/>
           </p:cNvPicPr>
@@ -28359,7 +28359,7 @@
       </p:sp>
       <p:pic>
         <p:nvPicPr>
-          <p:cNvPr id="6" name="삽화:고리_1.svg" descr="illust_1608343969554602124_1791735675.png"/>
+          <p:cNvPr id="6" name="삽화:고리_1.svg" descr="illust_8947027710510039566_1791735675.png"/>
           <p:cNvPicPr>
             <a:picLocks noChangeAspect="1"/>
           </p:cNvPicPr>
@@ -29414,7 +29414,7 @@
                 <a:ea typeface="맑은 고딕"/>
                 <a:cs typeface="맑은 고딕"/>
               </a:rPr>
-              <a:t>쿨러 과열 경보에 쓰는 스킬의 이름은 cooling-emergency-response이다.</a:t>
+              <a:t>쿨러 성능 저하 경보에 쓰는 스킬의 이름은 cooling-emergency-response이다.</a:t>
             </a:r>
           </a:p>
         </p:txBody>
@@ -34135,7 +34135,7 @@
       </p:sp>
       <p:pic>
         <p:nvPicPr>
-          <p:cNvPr id="6" name="삽화:스킬문서.svg" descr="illust_2345657924756600675_1791735675.png"/>
+          <p:cNvPr id="6" name="삽화:스킬문서.svg" descr="illust_6463543040948665884_1791735675.png"/>
           <p:cNvPicPr>
             <a:picLocks noChangeAspect="1"/>
           </p:cNvPicPr>
@@ -36794,7 +36794,7 @@
       </p:sp>
       <p:pic>
         <p:nvPicPr>
-          <p:cNvPr id="6" name="삽화:두절차.svg" descr="illust_3118851582030773927_1791735675.png"/>
+          <p:cNvPr id="6" name="삽화:두절차.svg" descr="illust_8691624293172665444_1791735675.png"/>
           <p:cNvPicPr>
             <a:picLocks noChangeAspect="1"/>
           </p:cNvPicPr>
@@ -39256,7 +39256,7 @@
       </p:sp>
       <p:pic>
         <p:nvPicPr>
-          <p:cNvPr id="6" name="삽화:재사용.svg" descr="illust_2901102004718378663_1791735675.png"/>
+          <p:cNvPr id="6" name="삽화:재사용.svg" descr="illust_1596766362955405867_1791735675.png"/>
           <p:cNvPicPr>
             <a:picLocks noChangeAspect="1"/>
           </p:cNvPicPr>
@@ -42830,7 +42830,7 @@
       </p:sp>
       <p:pic>
         <p:nvPicPr>
-          <p:cNvPr id="6" name="삽화:경보에서승인까지.svg" descr="illust_6979831260010377243_1791735250.png"/>
+          <p:cNvPr id="6" name="삽화:경보에서승인까지.svg" descr="illust_3151078926722325149_1791735250.png"/>
           <p:cNvPicPr>
             <a:picLocks noChangeAspect="1"/>
           </p:cNvPicPr>
@@ -44314,7 +44314,7 @@
       </p:sp>
       <p:pic>
         <p:nvPicPr>
-          <p:cNvPr id="6" name="삽화:연결의수.svg" descr="illust_1324640135924186181_1791735675.png"/>
+          <p:cNvPr id="6" name="삽화:연결의수.svg" descr="illust_169689352605442806_1791735675.png"/>
           <p:cNvPicPr>
             <a:picLocks noChangeAspect="1"/>
           </p:cNvPicPr>
@@ -45485,7 +45485,7 @@
       </p:sp>
       <p:pic>
         <p:nvPicPr>
-          <p:cNvPr id="6" name="삽화:MCP구성.svg" descr="illust_7050041095710836736_1791735675.png"/>
+          <p:cNvPr id="6" name="삽화:MCP구성.svg" descr="illust_897683087134859102_1791735675.png"/>
           <p:cNvPicPr>
             <a:picLocks noChangeAspect="1"/>
           </p:cNvPicPr>
@@ -47000,7 +47000,7 @@
       </p:sp>
       <p:pic>
         <p:nvPicPr>
-          <p:cNvPr id="6" name="삽화:목록호출.svg" descr="illust_4455988890384574104_1791735675.png"/>
+          <p:cNvPr id="6" name="삽화:목록호출.svg" descr="illust_6658906014581218468_1791735675.png"/>
           <p:cNvPicPr>
             <a:picLocks noChangeAspect="1"/>
           </p:cNvPicPr>
@@ -51197,7 +51197,7 @@
       </p:sp>
       <p:pic>
         <p:nvPicPr>
-          <p:cNvPr id="6" name="삽화:연결방식.svg" descr="illust_1891767016657742049_1791735675.png"/>
+          <p:cNvPr id="6" name="삽화:연결방식.svg" descr="illust_2063731034612916439_1791735675.png"/>
           <p:cNvPicPr>
             <a:picLocks noChangeAspect="1"/>
           </p:cNvPicPr>
@@ -54325,7 +54325,7 @@
       </p:sp>
       <p:pic>
         <p:nvPicPr>
-          <p:cNvPr id="6" name="삽화:세겹.svg" descr="illust_1462497405737794706_1791735675.png"/>
+          <p:cNvPr id="6" name="삽화:세겹.svg" descr="illust_7658852254921987219_1791735675.png"/>
           <p:cNvPicPr>
             <a:picLocks noChangeAspect="1"/>
           </p:cNvPicPr>

--- a/docs/교재/실전반/04일차/실전반_04일차.pptx
+++ b/docs/교재/실전반/04일차/실전반_04일차.pptx
@@ -9613,7 +9613,7 @@
       </p:sp>
       <p:pic>
         <p:nvPicPr>
-          <p:cNvPr id="6" name="삽화:세요소.svg" descr="illust_629911911836505933_1791735250.png"/>
+          <p:cNvPr id="6" name="삽화:세요소.svg" descr="illust_7737860841121890697_1791735250.png"/>
           <p:cNvPicPr>
             <a:picLocks noChangeAspect="1"/>
           </p:cNvPicPr>
@@ -11735,7 +11735,7 @@
       </p:sp>
       <p:pic>
         <p:nvPicPr>
-          <p:cNvPr id="6" name="삽화:실행고리.svg" descr="illust_7290486411174868948_1791735250.png"/>
+          <p:cNvPr id="6" name="삽화:실행고리.svg" descr="illust_7884194467108141090_1791735250.png"/>
           <p:cNvPicPr>
             <a:picLocks noChangeAspect="1"/>
           </p:cNvPicPr>
@@ -16420,7 +16420,7 @@
       </p:sp>
       <p:pic>
         <p:nvPicPr>
-          <p:cNvPr id="6" name="삽화:정보원.svg" descr="illust_2610813375207813406_1791735250.png"/>
+          <p:cNvPr id="6" name="삽화:정보원.svg" descr="illust_3009937387162041502_1791735250.png"/>
           <p:cNvPicPr>
             <a:picLocks noChangeAspect="1"/>
           </p:cNvPicPr>
@@ -20946,7 +20946,7 @@
       </p:sp>
       <p:pic>
         <p:nvPicPr>
-          <p:cNvPr id="6" name="삽화:멈춤조건.svg" descr="illust_3333849317078152115_1791735250.png"/>
+          <p:cNvPr id="6" name="삽화:멈춤조건.svg" descr="illust_4054337200068825811_1791735250.png"/>
           <p:cNvPicPr>
             <a:picLocks noChangeAspect="1"/>
           </p:cNvPicPr>
@@ -23208,7 +23208,7 @@
       </p:sp>
       <p:pic>
         <p:nvPicPr>
-          <p:cNvPr id="6" name="삽화:기록한줄.svg" descr="illust_8447216195397725278_1791735250.png"/>
+          <p:cNvPr id="6" name="삽화:기록한줄.svg" descr="illust_2105670430746232572_1791735250.png"/>
           <p:cNvPicPr>
             <a:picLocks noChangeAspect="1"/>
           </p:cNvPicPr>
@@ -29226,7 +29226,7 @@
       </p:sp>
       <p:pic>
         <p:nvPicPr>
-          <p:cNvPr id="6" name="삽화:고리_1.svg" descr="illust_2769479299941443991_1791735675.png"/>
+          <p:cNvPr id="6" name="삽화:고리_1.svg" descr="illust_2832138323920466169_1791735675.png"/>
           <p:cNvPicPr>
             <a:picLocks noChangeAspect="1"/>
           </p:cNvPicPr>
@@ -35301,7 +35301,7 @@
       </p:sp>
       <p:pic>
         <p:nvPicPr>
-          <p:cNvPr id="6" name="삽화:스킬문서.svg" descr="illust_2992920705187261731_1791735675.png"/>
+          <p:cNvPr id="6" name="삽화:스킬문서.svg" descr="illust_1782029217391554654_1791735675.png"/>
           <p:cNvPicPr>
             <a:picLocks noChangeAspect="1"/>
           </p:cNvPicPr>
@@ -37661,7 +37661,7 @@
       </p:sp>
       <p:pic>
         <p:nvPicPr>
-          <p:cNvPr id="6" name="삽화:두절차.svg" descr="illust_2612185997759662920_1791735675.png"/>
+          <p:cNvPr id="6" name="삽화:두절차.svg" descr="illust_3014631881648218132_1791735675.png"/>
           <p:cNvPicPr>
             <a:picLocks noChangeAspect="1"/>
           </p:cNvPicPr>
@@ -40123,7 +40123,7 @@
       </p:sp>
       <p:pic>
         <p:nvPicPr>
-          <p:cNvPr id="6" name="삽화:재사용.svg" descr="illust_5761016718670041051_1791735675.png"/>
+          <p:cNvPr id="6" name="삽화:재사용.svg" descr="illust_6067743814746784081_1791735675.png"/>
           <p:cNvPicPr>
             <a:picLocks noChangeAspect="1"/>
           </p:cNvPicPr>
@@ -42847,7 +42847,7 @@
       </p:sp>
       <p:pic>
         <p:nvPicPr>
-          <p:cNvPr id="6" name="삽화:경보에서승인까지.svg" descr="illust_288847865563626732_1791735250.png"/>
+          <p:cNvPr id="6" name="삽화:경보에서승인까지.svg" descr="illust_1991314023078336147_1791735250.png"/>
           <p:cNvPicPr>
             <a:picLocks noChangeAspect="1"/>
           </p:cNvPicPr>
@@ -45181,7 +45181,7 @@
       </p:sp>
       <p:pic>
         <p:nvPicPr>
-          <p:cNvPr id="6" name="삽화:연결의수.svg" descr="illust_168614420959216054_1791735675.png"/>
+          <p:cNvPr id="6" name="삽화:연결의수.svg" descr="illust_3489470320328222699_1791735675.png"/>
           <p:cNvPicPr>
             <a:picLocks noChangeAspect="1"/>
           </p:cNvPicPr>
@@ -46352,7 +46352,7 @@
       </p:sp>
       <p:pic>
         <p:nvPicPr>
-          <p:cNvPr id="6" name="삽화:MCP구성.svg" descr="illust_5006963996436828583_1791735675.png"/>
+          <p:cNvPr id="6" name="삽화:MCP구성.svg" descr="illust_9208437994967581003_1791735675.png"/>
           <p:cNvPicPr>
             <a:picLocks noChangeAspect="1"/>
           </p:cNvPicPr>
@@ -47867,7 +47867,7 @@
       </p:sp>
       <p:pic>
         <p:nvPicPr>
-          <p:cNvPr id="6" name="삽화:목록호출.svg" descr="illust_929951661008092046_1791735675.png"/>
+          <p:cNvPr id="6" name="삽화:목록호출.svg" descr="illust_3570915006056810553_1791735675.png"/>
           <p:cNvPicPr>
             <a:picLocks noChangeAspect="1"/>
           </p:cNvPicPr>
@@ -52064,7 +52064,7 @@
       </p:sp>
       <p:pic>
         <p:nvPicPr>
-          <p:cNvPr id="6" name="삽화:연결방식.svg" descr="illust_2812041488180142522_1791735675.png"/>
+          <p:cNvPr id="6" name="삽화:연결방식.svg" descr="illust_3232858478547518504_1791735675.png"/>
           <p:cNvPicPr>
             <a:picLocks noChangeAspect="1"/>
           </p:cNvPicPr>
@@ -55192,7 +55192,7 @@
       </p:sp>
       <p:pic>
         <p:nvPicPr>
-          <p:cNvPr id="6" name="삽화:세겹.svg" descr="illust_206154081130344174_1791735675.png"/>
+          <p:cNvPr id="6" name="삽화:세겹.svg" descr="illust_8052279441430447801_1791735675.png"/>
           <p:cNvPicPr>
             <a:picLocks noChangeAspect="1"/>
           </p:cNvPicPr>
@@ -62112,7 +62112,7 @@
                 <a:ea typeface="맑은 고딕"/>
                 <a:cs typeface="맑은 고딕"/>
               </a:rPr>
-              <a:t>배운 내용을 바탕으로 정답을 맞춰보세요.</a:t>
+              <a:t>배운 내용을 바탕으로 정답을 맞혀 보세요.</a:t>
             </a:r>
           </a:p>
         </p:txBody>

--- a/docs/교재/실전반/04일차/실전반_04일차.pptx
+++ b/docs/교재/실전반/04일차/실전반_04일차.pptx
@@ -80,7 +80,6 @@
     <p:sldId id="328" r:id="rId80"/>
     <p:sldId id="329" r:id="rId81"/>
     <p:sldId id="330" r:id="rId82"/>
-    <p:sldId id="331" r:id="rId83"/>
   </p:sldIdLst>
   <p:sldSz cx="12191695" cy="6858000" type="screen4x3"/>
   <p:notesSz cx="6858000" cy="9144000"/>
@@ -4497,7 +4496,7 @@
           <a:lstStyle/>
           <a:p>
             <a:r>
-              <a:t>포털에서 쓰는 MCP와 내 PC의 Claude Code에서 쓰는 MCP는 규약이 같고 운영 방식이 다릅니다. 포털은 여러 사람이 함께 쓰므로 등록과 연결 검사를 거치고 읽기 도구만 허용합니다. 로컬에서는 설정 파일에 서버를 적고, 도구를 쓸 때 사용자가 직접 허용합니다. 로컬에서는 안전 기준을 지키는 일이 사용자 자신의 몫이 됩니다.</a:t>
+              <a:t>넷째 실습은 두 곳에서 진행합니다. 먼저 HYD 포털에서 업무 DB 서버의 연결 상태를 확인하고 읽기 도구를 불러 봅니다. 다음으로 VS Code의 Claude Code에 파일시스템, Git, 시간 서버를 연결하고 접근 권한을 서버별로 정합니다. 파일 내용과 변경 이력과 시간을 한 요청에서 이어 불러 작업 요약을 만든 뒤, 서버마다 허용된 일과 호출이 실패했을 때의 모습을 견줍니다. 포털과 로컬의 연결 방식이 어떻게 다른지도 이 실습에서 확인합니다.</a:t>
             </a:r>
           </a:p>
         </p:txBody>
@@ -4567,7 +4566,7 @@
           <a:lstStyle/>
           <a:p>
             <a:r>
-              <a:t>넷째 실습은 두 곳에서 진행합니다. 먼저 HYD 포털에서 업무 DB 서버의 연결 상태를 확인하고 읽기 도구를 불러 봅니다. 다음으로 VS Code의 Claude Code에 파일시스템, Git, 시간 서버를 연결하고 접근 권한을 서버별로 정합니다. 파일 내용과 변경 이력과 시간을 한 요청에서 이어 불러 작업 요약을 만든 뒤, 서버마다 허용된 일과 호출이 실패했을 때의 모습을 견줍니다. 포털과 로컬의 연결 방식이 어떻게 다른지도 이 실습에서 확인합니다.</a:t>
+              <a:t>뜻은 앞에서 풀었으므로 여기서는 이름과 자리만 확인합니다. 이 여덟 개와 함께 실행 고리, 정보원, 멈춤 조건, 실행 기록, 호스트, 클라이언트, 서버, 도구, 입력 스키마, 허용 목록이 오늘의 용어입니다. 하나를 골라 자료를 덮고 자신의 문장으로 써 보시기 바랍니다.</a:t>
             </a:r>
           </a:p>
         </p:txBody>
@@ -4637,7 +4636,7 @@
           <a:lstStyle/>
           <a:p>
             <a:r>
-              <a:t>뜻은 앞에서 풀었으므로 여기서는 이름과 자리만 확인합니다. 이 여덟 개와 함께 실행 고리, 정보원, 멈춤 조건, 실행 기록, 호스트, 클라이언트, 서버, 도구, 입력 스키마, 허용 목록이 오늘의 용어입니다. 하나를 골라 자료를 덮고 자신의 문장으로 써 보시기 바랍니다.</a:t>
+              <a:t>처리 기록의 한 장면을 실행 고리의 단계에 대어 보는 문항입니다. 두 호출의 도구가 같은지 다른지, 뒤 호출의 입력이 어디에서 왔는지를 따져 보시기 바랍니다.</a:t>
             </a:r>
           </a:p>
         </p:txBody>
@@ -4707,7 +4706,7 @@
           <a:lstStyle/>
           <a:p>
             <a:r>
-              <a:t>처리 기록의 한 장면을 실행 고리의 단계에 대어 보는 문항입니다. 두 호출의 도구가 같은지 다른지, 뒤 호출의 입력이 어디에서 왔는지를 따져 보시기 바랍니다.</a:t>
+              <a:t>스킬과 도구의 역할을 구분하는 문항입니다. 스킬에 방법이 적혀 있는데도 실행되지 않았다면 무엇이 빠졌는지를 따져 보시기 바랍니다.</a:t>
             </a:r>
           </a:p>
         </p:txBody>
@@ -4777,7 +4776,7 @@
           <a:lstStyle/>
           <a:p>
             <a:r>
-              <a:t>스킬과 도구의 역할을 구분하는 문항입니다. 스킬에 방법이 적혀 있는데도 실행되지 않았다면 무엇이 빠졌는지를 따져 보시기 바랍니다.</a:t>
+              <a:t>읽기와 쓰기의 경계를 누가 정하는지를 묻는 문항입니다. 세 도구가 연결 검사에서 각각 어떻게 판정되는지를 따져 보시기 바랍니다.</a:t>
             </a:r>
           </a:p>
         </p:txBody>
@@ -4803,76 +4802,6 @@
 </file>
 
 <file path=ppt/notesSlides/notesSlide65.xml><?xml version="1.0" encoding="utf-8"?>
-<p:notes xmlns:a="http://schemas.openxmlformats.org/drawingml/2006/main" xmlns:p="http://schemas.openxmlformats.org/presentationml/2006/main" xmlns:r="http://schemas.openxmlformats.org/officeDocument/2006/relationships">
-  <p:cSld>
-    <p:spTree>
-      <p:nvGrpSpPr>
-        <p:cNvPr id="1" name=""/>
-        <p:cNvGrpSpPr/>
-        <p:nvPr/>
-      </p:nvGrpSpPr>
-      <p:grpSpPr>
-        <a:xfrm>
-          <a:off x="0" y="0"/>
-          <a:ext cx="0" cy="0"/>
-          <a:chOff x="0" y="0"/>
-          <a:chExt cx="0" cy="0"/>
-        </a:xfrm>
-      </p:grpSpPr>
-      <p:sp>
-        <p:nvSpPr>
-          <p:cNvPr id="2" name="Slide Image Placeholder 1"/>
-          <p:cNvSpPr>
-            <a:spLocks noGrp="1"/>
-          </p:cNvSpPr>
-          <p:nvPr>
-            <p:ph type="sldImg" idx="2"/>
-          </p:nvPr>
-        </p:nvSpPr>
-        <p:spPr/>
-      </p:sp>
-      <p:sp>
-        <p:nvSpPr>
-          <p:cNvPr id="3" name="Notes Placeholder 2"/>
-          <p:cNvSpPr>
-            <a:spLocks noGrp="1"/>
-          </p:cNvSpPr>
-          <p:nvPr>
-            <p:ph type="body" idx="3" sz="quarter"/>
-          </p:nvPr>
-        </p:nvSpPr>
-        <p:spPr/>
-        <p:txBody>
-          <a:bodyPr/>
-          <a:lstStyle/>
-          <a:p>
-            <a:r>
-              <a:t>읽기와 쓰기의 경계를 누가 정하는지를 묻는 문항입니다. 세 도구가 연결 검사에서 각각 어떻게 판정되는지를 따져 보시기 바랍니다.</a:t>
-            </a:r>
-          </a:p>
-        </p:txBody>
-      </p:sp>
-      <p:sp>
-        <p:nvSpPr>
-          <p:cNvPr id="4" name="Slide Number Placeholder 3"/>
-          <p:cNvSpPr>
-            <a:spLocks noGrp="1"/>
-          </p:cNvSpPr>
-          <p:nvPr>
-            <p:ph type="sldNum" idx="5" sz="quarter"/>
-          </p:nvPr>
-        </p:nvSpPr>
-        <p:spPr/>
-      </p:sp>
-    </p:spTree>
-  </p:cSld>
-  <p:clrMapOvr>
-    <a:masterClrMapping/>
-  </p:clrMapOvr>
-</p:notes>
-</file>
-
-<file path=ppt/notesSlides/notesSlide66.xml><?xml version="1.0" encoding="utf-8"?>
 <p:notes xmlns:a="http://schemas.openxmlformats.org/drawingml/2006/main" xmlns:p="http://schemas.openxmlformats.org/presentationml/2006/main" xmlns:r="http://schemas.openxmlformats.org/officeDocument/2006/relationships">
   <p:cSld>
     <p:spTree>
@@ -9613,7 +9542,7 @@
       </p:sp>
       <p:pic>
         <p:nvPicPr>
-          <p:cNvPr id="6" name="삽화:세요소.svg" descr="illust_7737860841121890697_1791735250.png"/>
+          <p:cNvPr id="6" name="삽화:세요소.svg" descr="illust_6670120925673199773_1791735250.png"/>
           <p:cNvPicPr>
             <a:picLocks noChangeAspect="1"/>
           </p:cNvPicPr>
@@ -11735,7 +11664,7 @@
       </p:sp>
       <p:pic>
         <p:nvPicPr>
-          <p:cNvPr id="6" name="삽화:실행고리.svg" descr="illust_7884194467108141090_1791735250.png"/>
+          <p:cNvPr id="6" name="삽화:실행고리.svg" descr="illust_4693071040427843878_1791735250.png"/>
           <p:cNvPicPr>
             <a:picLocks noChangeAspect="1"/>
           </p:cNvPicPr>
@@ -16420,7 +16349,7 @@
       </p:sp>
       <p:pic>
         <p:nvPicPr>
-          <p:cNvPr id="6" name="삽화:정보원.svg" descr="illust_3009937387162041502_1791735250.png"/>
+          <p:cNvPr id="6" name="삽화:정보원.svg" descr="illust_775941256131757674_1791735250.png"/>
           <p:cNvPicPr>
             <a:picLocks noChangeAspect="1"/>
           </p:cNvPicPr>
@@ -20946,7 +20875,7 @@
       </p:sp>
       <p:pic>
         <p:nvPicPr>
-          <p:cNvPr id="6" name="삽화:멈춤조건.svg" descr="illust_4054337200068825811_1791735250.png"/>
+          <p:cNvPr id="6" name="삽화:멈춤조건.svg" descr="illust_8474791342643968985_1791735250.png"/>
           <p:cNvPicPr>
             <a:picLocks noChangeAspect="1"/>
           </p:cNvPicPr>
@@ -23208,7 +23137,7 @@
       </p:sp>
       <p:pic>
         <p:nvPicPr>
-          <p:cNvPr id="6" name="삽화:기록한줄.svg" descr="illust_2105670430746232572_1791735250.png"/>
+          <p:cNvPr id="6" name="삽화:기록한줄.svg" descr="illust_5188464059972121371_1791735250.png"/>
           <p:cNvPicPr>
             <a:picLocks noChangeAspect="1"/>
           </p:cNvPicPr>
@@ -29226,7 +29155,7 @@
       </p:sp>
       <p:pic>
         <p:nvPicPr>
-          <p:cNvPr id="6" name="삽화:고리_1.svg" descr="illust_2832138323920466169_1791735675.png"/>
+          <p:cNvPr id="6" name="삽화:고리_1.svg" descr="illust_5007806839519906772_1791735675.png"/>
           <p:cNvPicPr>
             <a:picLocks noChangeAspect="1"/>
           </p:cNvPicPr>
@@ -35301,7 +35230,7 @@
       </p:sp>
       <p:pic>
         <p:nvPicPr>
-          <p:cNvPr id="6" name="삽화:스킬문서.svg" descr="illust_1782029217391554654_1791735675.png"/>
+          <p:cNvPr id="6" name="삽화:스킬문서.svg" descr="illust_4630668348003285818_1791735675.png"/>
           <p:cNvPicPr>
             <a:picLocks noChangeAspect="1"/>
           </p:cNvPicPr>
@@ -37661,7 +37590,7 @@
       </p:sp>
       <p:pic>
         <p:nvPicPr>
-          <p:cNvPr id="6" name="삽화:두절차.svg" descr="illust_3014631881648218132_1791735675.png"/>
+          <p:cNvPr id="6" name="삽화:두절차.svg" descr="illust_3518305939232830028_1791735675.png"/>
           <p:cNvPicPr>
             <a:picLocks noChangeAspect="1"/>
           </p:cNvPicPr>
@@ -40123,7 +40052,7 @@
       </p:sp>
       <p:pic>
         <p:nvPicPr>
-          <p:cNvPr id="6" name="삽화:재사용.svg" descr="illust_6067743814746784081_1791735675.png"/>
+          <p:cNvPr id="6" name="삽화:재사용.svg" descr="illust_6985987034256217349_1791735675.png"/>
           <p:cNvPicPr>
             <a:picLocks noChangeAspect="1"/>
           </p:cNvPicPr>
@@ -42847,7 +42776,7 @@
       </p:sp>
       <p:pic>
         <p:nvPicPr>
-          <p:cNvPr id="6" name="삽화:경보에서승인까지.svg" descr="illust_1991314023078336147_1791735250.png"/>
+          <p:cNvPr id="6" name="삽화:경보에서승인까지.svg" descr="illust_5336304385122508287_1791735250.png"/>
           <p:cNvPicPr>
             <a:picLocks noChangeAspect="1"/>
           </p:cNvPicPr>
@@ -45181,7 +45110,7 @@
       </p:sp>
       <p:pic>
         <p:nvPicPr>
-          <p:cNvPr id="6" name="삽화:연결의수.svg" descr="illust_3489470320328222699_1791735675.png"/>
+          <p:cNvPr id="6" name="삽화:연결의수.svg" descr="illust_1486224702544256063_1791735675.png"/>
           <p:cNvPicPr>
             <a:picLocks noChangeAspect="1"/>
           </p:cNvPicPr>
@@ -46352,7 +46281,7 @@
       </p:sp>
       <p:pic>
         <p:nvPicPr>
-          <p:cNvPr id="6" name="삽화:MCP구성.svg" descr="illust_9208437994967581003_1791735675.png"/>
+          <p:cNvPr id="6" name="삽화:MCP구성.svg" descr="illust_3892529053356455772_1791735675.png"/>
           <p:cNvPicPr>
             <a:picLocks noChangeAspect="1"/>
           </p:cNvPicPr>
@@ -47867,7 +47796,7 @@
       </p:sp>
       <p:pic>
         <p:nvPicPr>
-          <p:cNvPr id="6" name="삽화:목록호출.svg" descr="illust_3570915006056810553_1791735675.png"/>
+          <p:cNvPr id="6" name="삽화:목록호출.svg" descr="illust_392534856505014236_1791735675.png"/>
           <p:cNvPicPr>
             <a:picLocks noChangeAspect="1"/>
           </p:cNvPicPr>
@@ -52064,7 +51993,7 @@
       </p:sp>
       <p:pic>
         <p:nvPicPr>
-          <p:cNvPr id="6" name="삽화:연결방식.svg" descr="illust_3232858478547518504_1791735675.png"/>
+          <p:cNvPr id="6" name="삽화:연결방식.svg" descr="illust_9026940787731190732_1791735675.png"/>
           <p:cNvPicPr>
             <a:picLocks noChangeAspect="1"/>
           </p:cNvPicPr>
@@ -55192,7 +55121,7 @@
       </p:sp>
       <p:pic>
         <p:nvPicPr>
-          <p:cNvPr id="6" name="삽화:세겹.svg" descr="illust_8052279441430447801_1791735675.png"/>
+          <p:cNvPr id="6" name="삽화:세겹.svg" descr="illust_6614440016078075325_1791735675.png"/>
           <p:cNvPicPr>
             <a:picLocks noChangeAspect="1"/>
           </p:cNvPicPr>
@@ -57332,7 +57261,7 @@
     <p:bg>
       <p:bgPr>
         <a:solidFill>
-          <a:srgbClr val="FFFFFF"/>
+          <a:srgbClr val="E7F3FD"/>
         </a:solidFill>
         <a:effectLst/>
       </p:bgPr>
@@ -57352,92 +57281,53 @@
         </p:nvSpPr>
         <p:spPr>
           <a:xfrm>
-            <a:off x="457200" y="329184"/>
-            <a:ext cx="11277295" cy="603504"/>
-          </a:xfrm>
-          <a:prstGeom prst="rect">
-            <a:avLst/>
-          </a:prstGeom>
-          <a:noFill/>
-        </p:spPr>
-        <p:txBody>
-          <a:bodyPr wrap="square" anchor="ctr"/>
-          <a:lstStyle/>
-          <a:p>
-            <a:pPr algn="l">
-              <a:lnSpc>
-                <a:spcPct val="110000"/>
-              </a:lnSpc>
-            </a:pPr>
-            <a:r>
-              <a:rPr sz="2800" b="1">
-                <a:solidFill>
-                  <a:srgbClr val="13294B"/>
-                </a:solidFill>
-                <a:latin typeface="맑은 고딕"/>
-                <a:ea typeface="맑은 고딕"/>
-                <a:cs typeface="맑은 고딕"/>
-              </a:rPr>
-              <a:t>HYD 포털과 로컬 개발 도구의 연결 방식</a:t>
-            </a:r>
-          </a:p>
-        </p:txBody>
-      </p:sp>
-      <p:sp>
-        <p:nvSpPr>
-          <p:cNvPr id="3" name="TextBox 2"/>
-          <p:cNvSpPr txBox="1"/>
-          <p:nvPr/>
-        </p:nvSpPr>
-        <p:spPr>
-          <a:xfrm>
-            <a:off x="457200" y="932688"/>
-            <a:ext cx="11277295" cy="420624"/>
-          </a:xfrm>
-          <a:prstGeom prst="rect">
-            <a:avLst/>
-          </a:prstGeom>
-          <a:noFill/>
-        </p:spPr>
-        <p:txBody>
-          <a:bodyPr wrap="square" anchor="ctr"/>
-          <a:lstStyle/>
-          <a:p>
-            <a:pPr algn="l">
-              <a:lnSpc>
-                <a:spcPct val="110000"/>
-              </a:lnSpc>
-            </a:pPr>
-            <a:r>
-              <a:rPr sz="1600" b="0">
-                <a:solidFill>
-                  <a:srgbClr val="556175"/>
-                </a:solidFill>
-                <a:latin typeface="맑은 고딕"/>
-                <a:ea typeface="맑은 고딕"/>
-                <a:cs typeface="맑은 고딕"/>
-              </a:rPr>
-              <a:t>포털은 등록과 연결 검사를 거쳐 서버를 붙이고, 로컬의 Claude Code는 설정 파일의 서버를 사용자가 허용해 쓴다.</a:t>
-            </a:r>
-          </a:p>
-        </p:txBody>
-      </p:sp>
-      <p:sp>
-        <p:nvSpPr>
-          <p:cNvPr id="4" name="Rectangle 3"/>
+            <a:off x="457200" y="384048"/>
+            <a:ext cx="8229600" cy="457200"/>
+          </a:xfrm>
+          <a:prstGeom prst="rect">
+            <a:avLst/>
+          </a:prstGeom>
+          <a:noFill/>
+        </p:spPr>
+        <p:txBody>
+          <a:bodyPr wrap="square" anchor="t"/>
+          <a:lstStyle/>
+          <a:p>
+            <a:pPr algn="l">
+              <a:lnSpc>
+                <a:spcPct val="110000"/>
+              </a:lnSpc>
+            </a:pPr>
+            <a:r>
+              <a:rPr sz="2000" b="1">
+                <a:solidFill>
+                  <a:srgbClr val="5CB8F2"/>
+                </a:solidFill>
+                <a:latin typeface="맑은 고딕"/>
+                <a:ea typeface="맑은 고딕"/>
+                <a:cs typeface="맑은 고딕"/>
+              </a:rPr>
+              <a:t>경남대학교 피지컬AI 사관학교</a:t>
+            </a:r>
+          </a:p>
+        </p:txBody>
+      </p:sp>
+      <p:sp>
+        <p:nvSpPr>
+          <p:cNvPr id="3" name="Rectangle 2"/>
           <p:cNvSpPr/>
           <p:nvPr/>
         </p:nvSpPr>
         <p:spPr>
           <a:xfrm>
-            <a:off x="548640" y="1408176"/>
-            <a:ext cx="11094415" cy="18288"/>
+            <a:off x="548640" y="859536"/>
+            <a:ext cx="3606800" cy="41148"/>
           </a:xfrm>
           <a:prstGeom prst="rect">
             <a:avLst/>
           </a:prstGeom>
           <a:solidFill>
-            <a:srgbClr val="D3D9E1"/>
+            <a:srgbClr val="5CB8F2"/>
           </a:solidFill>
           <a:ln>
             <a:noFill/>
@@ -57453,61 +57343,61 @@
       </p:sp>
       <p:sp>
         <p:nvSpPr>
-          <p:cNvPr id="5" name="TextBox 4"/>
-          <p:cNvSpPr txBox="1"/>
-          <p:nvPr/>
-        </p:nvSpPr>
-        <p:spPr>
-          <a:xfrm>
-            <a:off x="10911535" y="6473952"/>
-            <a:ext cx="822960" cy="274320"/>
-          </a:xfrm>
-          <a:prstGeom prst="rect">
-            <a:avLst/>
-          </a:prstGeom>
-          <a:noFill/>
-        </p:spPr>
-        <p:txBody>
-          <a:bodyPr wrap="square" anchor="t"/>
-          <a:lstStyle/>
-          <a:p>
-            <a:pPr algn="r">
-              <a:lnSpc>
-                <a:spcPct val="110000"/>
-              </a:lnSpc>
-            </a:pPr>
-            <a:r>
-              <a:rPr sz="1000" b="0">
-                <a:solidFill>
-                  <a:srgbClr val="556175"/>
-                </a:solidFill>
-                <a:latin typeface="맑은 고딕"/>
-                <a:ea typeface="맑은 고딕"/>
-                <a:cs typeface="맑은 고딕"/>
-              </a:rPr>
-              <a:t>68</a:t>
-            </a:r>
-          </a:p>
-        </p:txBody>
-      </p:sp>
-      <p:sp>
-        <p:nvSpPr>
-          <p:cNvPr id="6" name="Rounded Rectangle 5"/>
+          <p:cNvPr id="4" name="TextBox 3"/>
+          <p:cNvSpPr txBox="1"/>
+          <p:nvPr/>
+        </p:nvSpPr>
+        <p:spPr>
+          <a:xfrm>
+            <a:off x="731520" y="2011680"/>
+            <a:ext cx="10911535" cy="2011680"/>
+          </a:xfrm>
+          <a:prstGeom prst="rect">
+            <a:avLst/>
+          </a:prstGeom>
+          <a:noFill/>
+        </p:spPr>
+        <p:txBody>
+          <a:bodyPr wrap="square" anchor="ctr"/>
+          <a:lstStyle/>
+          <a:p>
+            <a:pPr algn="l">
+              <a:lnSpc>
+                <a:spcPct val="110000"/>
+              </a:lnSpc>
+            </a:pPr>
+            <a:r>
+              <a:rPr sz="3400" b="1">
+                <a:solidFill>
+                  <a:srgbClr val="13294B"/>
+                </a:solidFill>
+                <a:latin typeface="맑은 고딕"/>
+                <a:ea typeface="맑은 고딕"/>
+                <a:cs typeface="맑은 고딕"/>
+              </a:rPr>
+              <a:t>실습: HYD 내부 도구와 로컬 MCP 서버의 연결과 조합</a:t>
+            </a:r>
+          </a:p>
+        </p:txBody>
+      </p:sp>
+      <p:sp>
+        <p:nvSpPr>
+          <p:cNvPr id="5" name="Rounded Rectangle 4"/>
           <p:cNvSpPr/>
           <p:nvPr/>
         </p:nvSpPr>
         <p:spPr>
           <a:xfrm>
-            <a:off x="548640" y="1961387"/>
-            <a:ext cx="11094415" cy="347472"/>
+            <a:off x="822960" y="4160520"/>
+            <a:ext cx="822960" cy="347472"/>
           </a:xfrm>
           <a:prstGeom prst="roundRect">
             <a:avLst>
-              <a:gd name="adj" fmla="val 12000"/>
+              <a:gd name="adj" fmla="val 50000"/>
             </a:avLst>
           </a:prstGeom>
           <a:solidFill>
-            <a:srgbClr val="13294B"/>
+            <a:srgbClr val="5CB8F2"/>
           </a:solidFill>
           <a:ln>
             <a:noFill/>
@@ -57523,257 +57413,70 @@
       </p:sp>
       <p:sp>
         <p:nvSpPr>
+          <p:cNvPr id="6" name="TextBox 5"/>
+          <p:cNvSpPr txBox="1"/>
+          <p:nvPr/>
+        </p:nvSpPr>
+        <p:spPr>
+          <a:xfrm>
+            <a:off x="822960" y="4160520"/>
+            <a:ext cx="822960" cy="347472"/>
+          </a:xfrm>
+          <a:prstGeom prst="rect">
+            <a:avLst/>
+          </a:prstGeom>
+          <a:noFill/>
+        </p:spPr>
+        <p:txBody>
+          <a:bodyPr wrap="square" anchor="ctr"/>
+          <a:lstStyle/>
+          <a:p>
+            <a:pPr algn="ctr">
+              <a:lnSpc>
+                <a:spcPct val="110000"/>
+              </a:lnSpc>
+            </a:pPr>
+            <a:r>
+              <a:rPr sz="1300" b="1">
+                <a:solidFill>
+                  <a:srgbClr val="13294B"/>
+                </a:solidFill>
+                <a:latin typeface="맑은 고딕"/>
+                <a:ea typeface="맑은 고딕"/>
+                <a:cs typeface="맑은 고딕"/>
+              </a:rPr>
+              <a:t>실습</a:t>
+            </a:r>
+          </a:p>
+        </p:txBody>
+      </p:sp>
+      <p:sp>
+        <p:nvSpPr>
           <p:cNvPr id="7" name="TextBox 6"/>
           <p:cNvSpPr txBox="1"/>
           <p:nvPr/>
         </p:nvSpPr>
         <p:spPr>
           <a:xfrm>
-            <a:off x="685800" y="1961387"/>
-            <a:ext cx="2514600" cy="347472"/>
-          </a:xfrm>
-          <a:prstGeom prst="rect">
-            <a:avLst/>
-          </a:prstGeom>
-          <a:noFill/>
-        </p:spPr>
-        <p:txBody>
-          <a:bodyPr wrap="square" anchor="ctr"/>
-          <a:lstStyle/>
-          <a:p>
-            <a:pPr algn="l">
-              <a:lnSpc>
-                <a:spcPct val="110000"/>
-              </a:lnSpc>
-            </a:pPr>
-            <a:r>
-              <a:rPr sz="1300" b="1">
-                <a:solidFill>
-                  <a:srgbClr val="FFFFFF"/>
-                </a:solidFill>
-                <a:latin typeface="맑은 고딕"/>
-                <a:ea typeface="맑은 고딕"/>
-                <a:cs typeface="맑은 고딕"/>
-              </a:rPr>
-              <a:t>구분</a:t>
-            </a:r>
-          </a:p>
-        </p:txBody>
-      </p:sp>
-      <p:sp>
-        <p:nvSpPr>
-          <p:cNvPr id="8" name="TextBox 7"/>
-          <p:cNvSpPr txBox="1"/>
-          <p:nvPr/>
-        </p:nvSpPr>
-        <p:spPr>
-          <a:xfrm>
-            <a:off x="3200400" y="1961387"/>
-            <a:ext cx="6248095" cy="347472"/>
-          </a:xfrm>
-          <a:prstGeom prst="rect">
-            <a:avLst/>
-          </a:prstGeom>
-          <a:noFill/>
-        </p:spPr>
-        <p:txBody>
-          <a:bodyPr wrap="square" anchor="ctr"/>
-          <a:lstStyle/>
-          <a:p>
-            <a:pPr algn="l">
-              <a:lnSpc>
-                <a:spcPct val="110000"/>
-              </a:lnSpc>
-            </a:pPr>
-            <a:r>
-              <a:rPr sz="1300" b="1">
-                <a:solidFill>
-                  <a:srgbClr val="FFFFFF"/>
-                </a:solidFill>
-                <a:latin typeface="맑은 고딕"/>
-                <a:ea typeface="맑은 고딕"/>
-                <a:cs typeface="맑은 고딕"/>
-              </a:rPr>
-              <a:t>HYD 포털</a:t>
-            </a:r>
-          </a:p>
-        </p:txBody>
-      </p:sp>
-      <p:sp>
-        <p:nvSpPr>
-          <p:cNvPr id="9" name="TextBox 8"/>
-          <p:cNvSpPr txBox="1"/>
-          <p:nvPr/>
-        </p:nvSpPr>
-        <p:spPr>
-          <a:xfrm>
-            <a:off x="9448495" y="1961387"/>
-            <a:ext cx="2194560" cy="347472"/>
-          </a:xfrm>
-          <a:prstGeom prst="rect">
-            <a:avLst/>
-          </a:prstGeom>
-          <a:noFill/>
-        </p:spPr>
-        <p:txBody>
-          <a:bodyPr wrap="square" anchor="ctr"/>
-          <a:lstStyle/>
-          <a:p>
-            <a:pPr algn="l">
-              <a:lnSpc>
-                <a:spcPct val="110000"/>
-              </a:lnSpc>
-            </a:pPr>
-            <a:r>
-              <a:rPr sz="1300" b="1">
-                <a:solidFill>
-                  <a:srgbClr val="FFFFFF"/>
-                </a:solidFill>
-                <a:latin typeface="맑은 고딕"/>
-                <a:ea typeface="맑은 고딕"/>
-                <a:cs typeface="맑은 고딕"/>
-              </a:rPr>
-              <a:t>로컬의 Claude Code</a:t>
-            </a:r>
-          </a:p>
-        </p:txBody>
-      </p:sp>
-      <p:sp>
-        <p:nvSpPr>
-          <p:cNvPr id="10" name="Rounded Rectangle 9"/>
-          <p:cNvSpPr/>
-          <p:nvPr/>
-        </p:nvSpPr>
-        <p:spPr>
-          <a:xfrm>
-            <a:off x="548640" y="2395727"/>
-            <a:ext cx="11094415" cy="850392"/>
-          </a:xfrm>
-          <a:prstGeom prst="roundRect">
-            <a:avLst>
-              <a:gd name="adj" fmla="val 8000"/>
-            </a:avLst>
-          </a:prstGeom>
-          <a:solidFill>
-            <a:srgbClr val="F3F6F9"/>
-          </a:solidFill>
-          <a:ln>
-            <a:noFill/>
-          </a:ln>
-        </p:spPr>
-        <p:txBody>
-          <a:bodyPr rtlCol="0" anchor="ctr"/>
-          <a:lstStyle/>
-          <a:p>
-            <a:pPr algn="ctr"/>
-          </a:p>
-        </p:txBody>
-      </p:sp>
-      <p:sp>
-        <p:nvSpPr>
-          <p:cNvPr id="11" name="TextBox 10"/>
-          <p:cNvSpPr txBox="1"/>
-          <p:nvPr/>
-        </p:nvSpPr>
-        <p:spPr>
-          <a:xfrm>
-            <a:off x="685800" y="2363723"/>
-            <a:ext cx="2514600" cy="914400"/>
-          </a:xfrm>
-          <a:prstGeom prst="rect">
-            <a:avLst/>
-          </a:prstGeom>
-          <a:noFill/>
-        </p:spPr>
-        <p:txBody>
-          <a:bodyPr wrap="square" anchor="ctr"/>
-          <a:lstStyle/>
-          <a:p>
-            <a:pPr algn="l">
-              <a:lnSpc>
-                <a:spcPct val="110000"/>
-              </a:lnSpc>
-            </a:pPr>
-            <a:r>
-              <a:rPr sz="1600" b="1">
-                <a:solidFill>
-                  <a:srgbClr val="13294B"/>
-                </a:solidFill>
-                <a:latin typeface="맑은 고딕"/>
-                <a:ea typeface="맑은 고딕"/>
-                <a:cs typeface="맑은 고딕"/>
-              </a:rPr>
-              <a:t>서버를 적는 곳</a:t>
-            </a:r>
-          </a:p>
-        </p:txBody>
-      </p:sp>
-      <p:sp>
-        <p:nvSpPr>
-          <p:cNvPr id="12" name="TextBox 11"/>
-          <p:cNvSpPr txBox="1"/>
-          <p:nvPr/>
-        </p:nvSpPr>
-        <p:spPr>
-          <a:xfrm>
-            <a:off x="3200400" y="2363723"/>
-            <a:ext cx="6156655" cy="914400"/>
-          </a:xfrm>
-          <a:prstGeom prst="rect">
-            <a:avLst/>
-          </a:prstGeom>
-          <a:noFill/>
-        </p:spPr>
-        <p:txBody>
-          <a:bodyPr wrap="square" anchor="ctr"/>
-          <a:lstStyle/>
-          <a:p>
-            <a:pPr algn="l">
-              <a:lnSpc>
-                <a:spcPct val="110000"/>
-              </a:lnSpc>
-            </a:pPr>
-            <a:r>
-              <a:rPr sz="1400" b="0">
-                <a:solidFill>
-                  <a:srgbClr val="1F2A3A"/>
-                </a:solidFill>
-                <a:latin typeface="맑은 고딕"/>
-                <a:ea typeface="맑은 고딕"/>
-                <a:cs typeface="맑은 고딕"/>
-              </a:rPr>
-              <a:t>포털의 도구 등록 화면</a:t>
-            </a:r>
-          </a:p>
-        </p:txBody>
-      </p:sp>
-      <p:sp>
-        <p:nvSpPr>
-          <p:cNvPr id="13" name="TextBox 12"/>
-          <p:cNvSpPr txBox="1"/>
-          <p:nvPr/>
-        </p:nvSpPr>
-        <p:spPr>
-          <a:xfrm>
-            <a:off x="9448495" y="2363723"/>
-            <a:ext cx="2103120" cy="914400"/>
-          </a:xfrm>
-          <a:prstGeom prst="rect">
-            <a:avLst/>
-          </a:prstGeom>
-          <a:noFill/>
-        </p:spPr>
-        <p:txBody>
-          <a:bodyPr wrap="square" anchor="ctr"/>
-          <a:lstStyle/>
-          <a:p>
-            <a:pPr algn="l">
-              <a:lnSpc>
-                <a:spcPct val="110000"/>
-              </a:lnSpc>
-            </a:pPr>
-            <a:r>
-              <a:rPr sz="1250" b="1">
+            <a:off x="731520" y="4617720"/>
+            <a:ext cx="10911535" cy="457200"/>
+          </a:xfrm>
+          <a:prstGeom prst="rect">
+            <a:avLst/>
+          </a:prstGeom>
+          <a:noFill/>
+        </p:spPr>
+        <p:txBody>
+          <a:bodyPr wrap="square" anchor="t"/>
+          <a:lstStyle/>
+          <a:p>
+            <a:pPr algn="l">
+              <a:lnSpc>
+                <a:spcPct val="110000"/>
+              </a:lnSpc>
+            </a:pPr>
+            <a:r>
+              <a:rPr sz="1700" b="0">
                 <a:solidFill>
                   <a:srgbClr val="556175"/>
                 </a:solidFill>
@@ -57781,469 +57484,7 @@
                 <a:ea typeface="맑은 고딕"/>
                 <a:cs typeface="맑은 고딕"/>
               </a:rPr>
-              <a:t>작업 폴더의 설정 파일 .mcp.json</a:t>
-            </a:r>
-          </a:p>
-        </p:txBody>
-      </p:sp>
-      <p:sp>
-        <p:nvSpPr>
-          <p:cNvPr id="14" name="Rounded Rectangle 13"/>
-          <p:cNvSpPr/>
-          <p:nvPr/>
-        </p:nvSpPr>
-        <p:spPr>
-          <a:xfrm>
-            <a:off x="548640" y="3310127"/>
-            <a:ext cx="11094415" cy="850392"/>
-          </a:xfrm>
-          <a:prstGeom prst="roundRect">
-            <a:avLst>
-              <a:gd name="adj" fmla="val 8000"/>
-            </a:avLst>
-          </a:prstGeom>
-          <a:solidFill>
-            <a:srgbClr val="F3F6F9"/>
-          </a:solidFill>
-          <a:ln>
-            <a:noFill/>
-          </a:ln>
-        </p:spPr>
-        <p:txBody>
-          <a:bodyPr rtlCol="0" anchor="ctr"/>
-          <a:lstStyle/>
-          <a:p>
-            <a:pPr algn="ctr"/>
-          </a:p>
-        </p:txBody>
-      </p:sp>
-      <p:sp>
-        <p:nvSpPr>
-          <p:cNvPr id="15" name="TextBox 14"/>
-          <p:cNvSpPr txBox="1"/>
-          <p:nvPr/>
-        </p:nvSpPr>
-        <p:spPr>
-          <a:xfrm>
-            <a:off x="685800" y="3278123"/>
-            <a:ext cx="2514600" cy="914400"/>
-          </a:xfrm>
-          <a:prstGeom prst="rect">
-            <a:avLst/>
-          </a:prstGeom>
-          <a:noFill/>
-        </p:spPr>
-        <p:txBody>
-          <a:bodyPr wrap="square" anchor="ctr"/>
-          <a:lstStyle/>
-          <a:p>
-            <a:pPr algn="l">
-              <a:lnSpc>
-                <a:spcPct val="110000"/>
-              </a:lnSpc>
-            </a:pPr>
-            <a:r>
-              <a:rPr sz="1600" b="1">
-                <a:solidFill>
-                  <a:srgbClr val="13294B"/>
-                </a:solidFill>
-                <a:latin typeface="맑은 고딕"/>
-                <a:ea typeface="맑은 고딕"/>
-                <a:cs typeface="맑은 고딕"/>
-              </a:rPr>
-              <a:t>도구의 허용</a:t>
-            </a:r>
-          </a:p>
-        </p:txBody>
-      </p:sp>
-      <p:sp>
-        <p:nvSpPr>
-          <p:cNvPr id="16" name="TextBox 15"/>
-          <p:cNvSpPr txBox="1"/>
-          <p:nvPr/>
-        </p:nvSpPr>
-        <p:spPr>
-          <a:xfrm>
-            <a:off x="3200400" y="3278123"/>
-            <a:ext cx="6156655" cy="914400"/>
-          </a:xfrm>
-          <a:prstGeom prst="rect">
-            <a:avLst/>
-          </a:prstGeom>
-          <a:noFill/>
-        </p:spPr>
-        <p:txBody>
-          <a:bodyPr wrap="square" anchor="ctr"/>
-          <a:lstStyle/>
-          <a:p>
-            <a:pPr algn="l">
-              <a:lnSpc>
-                <a:spcPct val="110000"/>
-              </a:lnSpc>
-            </a:pPr>
-            <a:r>
-              <a:rPr sz="1400" b="0">
-                <a:solidFill>
-                  <a:srgbClr val="1F2A3A"/>
-                </a:solidFill>
-                <a:latin typeface="맑은 고딕"/>
-                <a:ea typeface="맑은 고딕"/>
-                <a:cs typeface="맑은 고딕"/>
-              </a:rPr>
-              <a:t>연결 검사에서 읽기로 인정된 도구만</a:t>
-            </a:r>
-          </a:p>
-        </p:txBody>
-      </p:sp>
-      <p:sp>
-        <p:nvSpPr>
-          <p:cNvPr id="17" name="TextBox 16"/>
-          <p:cNvSpPr txBox="1"/>
-          <p:nvPr/>
-        </p:nvSpPr>
-        <p:spPr>
-          <a:xfrm>
-            <a:off x="9448495" y="3278123"/>
-            <a:ext cx="2103120" cy="914400"/>
-          </a:xfrm>
-          <a:prstGeom prst="rect">
-            <a:avLst/>
-          </a:prstGeom>
-          <a:noFill/>
-        </p:spPr>
-        <p:txBody>
-          <a:bodyPr wrap="square" anchor="ctr"/>
-          <a:lstStyle/>
-          <a:p>
-            <a:pPr algn="l">
-              <a:lnSpc>
-                <a:spcPct val="110000"/>
-              </a:lnSpc>
-            </a:pPr>
-            <a:r>
-              <a:rPr sz="1250" b="1">
-                <a:solidFill>
-                  <a:srgbClr val="556175"/>
-                </a:solidFill>
-                <a:latin typeface="맑은 고딕"/>
-                <a:ea typeface="맑은 고딕"/>
-                <a:cs typeface="맑은 고딕"/>
-              </a:rPr>
-              <a:t>사용자가 대화 중에 허용한다</a:t>
-            </a:r>
-          </a:p>
-        </p:txBody>
-      </p:sp>
-      <p:sp>
-        <p:nvSpPr>
-          <p:cNvPr id="18" name="Rounded Rectangle 17"/>
-          <p:cNvSpPr/>
-          <p:nvPr/>
-        </p:nvSpPr>
-        <p:spPr>
-          <a:xfrm>
-            <a:off x="548640" y="4224527"/>
-            <a:ext cx="11094415" cy="850392"/>
-          </a:xfrm>
-          <a:prstGeom prst="roundRect">
-            <a:avLst>
-              <a:gd name="adj" fmla="val 8000"/>
-            </a:avLst>
-          </a:prstGeom>
-          <a:solidFill>
-            <a:srgbClr val="F3F6F9"/>
-          </a:solidFill>
-          <a:ln>
-            <a:noFill/>
-          </a:ln>
-        </p:spPr>
-        <p:txBody>
-          <a:bodyPr rtlCol="0" anchor="ctr"/>
-          <a:lstStyle/>
-          <a:p>
-            <a:pPr algn="ctr"/>
-          </a:p>
-        </p:txBody>
-      </p:sp>
-      <p:sp>
-        <p:nvSpPr>
-          <p:cNvPr id="19" name="TextBox 18"/>
-          <p:cNvSpPr txBox="1"/>
-          <p:nvPr/>
-        </p:nvSpPr>
-        <p:spPr>
-          <a:xfrm>
-            <a:off x="685800" y="4192523"/>
-            <a:ext cx="2514600" cy="914400"/>
-          </a:xfrm>
-          <a:prstGeom prst="rect">
-            <a:avLst/>
-          </a:prstGeom>
-          <a:noFill/>
-        </p:spPr>
-        <p:txBody>
-          <a:bodyPr wrap="square" anchor="ctr"/>
-          <a:lstStyle/>
-          <a:p>
-            <a:pPr algn="l">
-              <a:lnSpc>
-                <a:spcPct val="110000"/>
-              </a:lnSpc>
-            </a:pPr>
-            <a:r>
-              <a:rPr sz="1600" b="1">
-                <a:solidFill>
-                  <a:srgbClr val="13294B"/>
-                </a:solidFill>
-                <a:latin typeface="맑은 고딕"/>
-                <a:ea typeface="맑은 고딕"/>
-                <a:cs typeface="맑은 고딕"/>
-              </a:rPr>
-              <a:t>비밀값</a:t>
-            </a:r>
-          </a:p>
-        </p:txBody>
-      </p:sp>
-      <p:sp>
-        <p:nvSpPr>
-          <p:cNvPr id="20" name="TextBox 19"/>
-          <p:cNvSpPr txBox="1"/>
-          <p:nvPr/>
-        </p:nvSpPr>
-        <p:spPr>
-          <a:xfrm>
-            <a:off x="3200400" y="4192523"/>
-            <a:ext cx="6156655" cy="914400"/>
-          </a:xfrm>
-          <a:prstGeom prst="rect">
-            <a:avLst/>
-          </a:prstGeom>
-          <a:noFill/>
-        </p:spPr>
-        <p:txBody>
-          <a:bodyPr wrap="square" anchor="ctr"/>
-          <a:lstStyle/>
-          <a:p>
-            <a:pPr algn="l">
-              <a:lnSpc>
-                <a:spcPct val="110000"/>
-              </a:lnSpc>
-            </a:pPr>
-            <a:r>
-              <a:rPr sz="1400" b="0">
-                <a:solidFill>
-                  <a:srgbClr val="1F2A3A"/>
-                </a:solidFill>
-                <a:latin typeface="맑은 고딕"/>
-                <a:ea typeface="맑은 고딕"/>
-                <a:cs typeface="맑은 고딕"/>
-              </a:rPr>
-              <a:t>설정에는 값 대신 이름만 적고 값은 따로 보관한다</a:t>
-            </a:r>
-          </a:p>
-        </p:txBody>
-      </p:sp>
-      <p:sp>
-        <p:nvSpPr>
-          <p:cNvPr id="21" name="TextBox 20"/>
-          <p:cNvSpPr txBox="1"/>
-          <p:nvPr/>
-        </p:nvSpPr>
-        <p:spPr>
-          <a:xfrm>
-            <a:off x="9448495" y="4192523"/>
-            <a:ext cx="2103120" cy="914400"/>
-          </a:xfrm>
-          <a:prstGeom prst="rect">
-            <a:avLst/>
-          </a:prstGeom>
-          <a:noFill/>
-        </p:spPr>
-        <p:txBody>
-          <a:bodyPr wrap="square" anchor="ctr"/>
-          <a:lstStyle/>
-          <a:p>
-            <a:pPr algn="l">
-              <a:lnSpc>
-                <a:spcPct val="110000"/>
-              </a:lnSpc>
-            </a:pPr>
-            <a:r>
-              <a:rPr sz="1250" b="1">
-                <a:solidFill>
-                  <a:srgbClr val="556175"/>
-                </a:solidFill>
-                <a:latin typeface="맑은 고딕"/>
-                <a:ea typeface="맑은 고딕"/>
-                <a:cs typeface="맑은 고딕"/>
-              </a:rPr>
-              <a:t>내 PC의 환경변수와 설정 파일</a:t>
-            </a:r>
-          </a:p>
-        </p:txBody>
-      </p:sp>
-      <p:sp>
-        <p:nvSpPr>
-          <p:cNvPr id="22" name="Rounded Rectangle 21"/>
-          <p:cNvSpPr/>
-          <p:nvPr/>
-        </p:nvSpPr>
-        <p:spPr>
-          <a:xfrm>
-            <a:off x="548640" y="5138927"/>
-            <a:ext cx="11094415" cy="850392"/>
-          </a:xfrm>
-          <a:prstGeom prst="roundRect">
-            <a:avLst>
-              <a:gd name="adj" fmla="val 8000"/>
-            </a:avLst>
-          </a:prstGeom>
-          <a:solidFill>
-            <a:srgbClr val="F3F6F9"/>
-          </a:solidFill>
-          <a:ln>
-            <a:noFill/>
-          </a:ln>
-        </p:spPr>
-        <p:txBody>
-          <a:bodyPr rtlCol="0" anchor="ctr"/>
-          <a:lstStyle/>
-          <a:p>
-            <a:pPr algn="ctr"/>
-          </a:p>
-        </p:txBody>
-      </p:sp>
-      <p:sp>
-        <p:nvSpPr>
-          <p:cNvPr id="23" name="TextBox 22"/>
-          <p:cNvSpPr txBox="1"/>
-          <p:nvPr/>
-        </p:nvSpPr>
-        <p:spPr>
-          <a:xfrm>
-            <a:off x="685800" y="5106923"/>
-            <a:ext cx="2514600" cy="914400"/>
-          </a:xfrm>
-          <a:prstGeom prst="rect">
-            <a:avLst/>
-          </a:prstGeom>
-          <a:noFill/>
-        </p:spPr>
-        <p:txBody>
-          <a:bodyPr wrap="square" anchor="ctr"/>
-          <a:lstStyle/>
-          <a:p>
-            <a:pPr algn="l">
-              <a:lnSpc>
-                <a:spcPct val="110000"/>
-              </a:lnSpc>
-            </a:pPr>
-            <a:r>
-              <a:rPr sz="1600" b="1">
-                <a:solidFill>
-                  <a:srgbClr val="13294B"/>
-                </a:solidFill>
-                <a:latin typeface="맑은 고딕"/>
-                <a:ea typeface="맑은 고딕"/>
-                <a:cs typeface="맑은 고딕"/>
-              </a:rPr>
-              <a:t>서버가 도는 곳</a:t>
-            </a:r>
-          </a:p>
-        </p:txBody>
-      </p:sp>
-      <p:sp>
-        <p:nvSpPr>
-          <p:cNvPr id="24" name="TextBox 23"/>
-          <p:cNvSpPr txBox="1"/>
-          <p:nvPr/>
-        </p:nvSpPr>
-        <p:spPr>
-          <a:xfrm>
-            <a:off x="3200400" y="5106923"/>
-            <a:ext cx="6156655" cy="914400"/>
-          </a:xfrm>
-          <a:prstGeom prst="rect">
-            <a:avLst/>
-          </a:prstGeom>
-          <a:noFill/>
-        </p:spPr>
-        <p:txBody>
-          <a:bodyPr wrap="square" anchor="ctr"/>
-          <a:lstStyle/>
-          <a:p>
-            <a:pPr algn="l">
-              <a:lnSpc>
-                <a:spcPct val="110000"/>
-              </a:lnSpc>
-            </a:pPr>
-            <a:r>
-              <a:rPr sz="1400" b="0">
-                <a:solidFill>
-                  <a:srgbClr val="1F2A3A"/>
-                </a:solidFill>
-                <a:latin typeface="맑은 고딕"/>
-                <a:ea typeface="맑은 고딕"/>
-                <a:cs typeface="맑은 고딕"/>
-              </a:rPr>
-              <a:t>stdio는 에이전트를 실행하는 PC</a:t>
-            </a:r>
-          </a:p>
-          <a:p>
-            <a:pPr algn="l">
-              <a:lnSpc>
-                <a:spcPct val="110000"/>
-              </a:lnSpc>
-            </a:pPr>
-            <a:r>
-              <a:rPr sz="1400" b="0">
-                <a:solidFill>
-                  <a:srgbClr val="1F2A3A"/>
-                </a:solidFill>
-                <a:latin typeface="맑은 고딕"/>
-                <a:ea typeface="맑은 고딕"/>
-                <a:cs typeface="맑은 고딕"/>
-              </a:rPr>
-              <a:t>HTTP는 서버 쪽</a:t>
-            </a:r>
-          </a:p>
-        </p:txBody>
-      </p:sp>
-      <p:sp>
-        <p:nvSpPr>
-          <p:cNvPr id="25" name="TextBox 24"/>
-          <p:cNvSpPr txBox="1"/>
-          <p:nvPr/>
-        </p:nvSpPr>
-        <p:spPr>
-          <a:xfrm>
-            <a:off x="9448495" y="5106923"/>
-            <a:ext cx="2103120" cy="914400"/>
-          </a:xfrm>
-          <a:prstGeom prst="rect">
-            <a:avLst/>
-          </a:prstGeom>
-          <a:noFill/>
-        </p:spPr>
-        <p:txBody>
-          <a:bodyPr wrap="square" anchor="ctr"/>
-          <a:lstStyle/>
-          <a:p>
-            <a:pPr algn="l">
-              <a:lnSpc>
-                <a:spcPct val="110000"/>
-              </a:lnSpc>
-            </a:pPr>
-            <a:r>
-              <a:rPr sz="1250" b="1">
-                <a:solidFill>
-                  <a:srgbClr val="556175"/>
-                </a:solidFill>
-                <a:latin typeface="맑은 고딕"/>
-                <a:ea typeface="맑은 고딕"/>
-                <a:cs typeface="맑은 고딕"/>
-              </a:rPr>
-              <a:t>내 PC</a:t>
+              <a:t>HYD의 읽기 도구를 확인하고 Claude Code에 파일시스템, Git, 시간 서버를 연결해 조합한다</a:t>
             </a:r>
           </a:p>
         </p:txBody>
@@ -58262,7 +57503,7 @@
     <p:bg>
       <p:bgPr>
         <a:solidFill>
-          <a:srgbClr val="E7F3FD"/>
+          <a:srgbClr val="FFFFFF"/>
         </a:solidFill>
         <a:effectLst/>
       </p:bgPr>
@@ -58282,8 +57523,115 @@
         </p:nvSpPr>
         <p:spPr>
           <a:xfrm>
-            <a:off x="457200" y="384048"/>
-            <a:ext cx="8229600" cy="457200"/>
+            <a:off x="457200" y="329184"/>
+            <a:ext cx="11277295" cy="603504"/>
+          </a:xfrm>
+          <a:prstGeom prst="rect">
+            <a:avLst/>
+          </a:prstGeom>
+          <a:noFill/>
+        </p:spPr>
+        <p:txBody>
+          <a:bodyPr wrap="square" anchor="ctr"/>
+          <a:lstStyle/>
+          <a:p>
+            <a:pPr algn="l">
+              <a:lnSpc>
+                <a:spcPct val="110000"/>
+              </a:lnSpc>
+            </a:pPr>
+            <a:r>
+              <a:rPr sz="2800" b="1">
+                <a:solidFill>
+                  <a:srgbClr val="13294B"/>
+                </a:solidFill>
+                <a:latin typeface="맑은 고딕"/>
+                <a:ea typeface="맑은 고딕"/>
+                <a:cs typeface="맑은 고딕"/>
+              </a:rPr>
+              <a:t>실습에서 연결하는 것과 조합해 만드는 것</a:t>
+            </a:r>
+          </a:p>
+        </p:txBody>
+      </p:sp>
+      <p:sp>
+        <p:nvSpPr>
+          <p:cNvPr id="3" name="TextBox 2"/>
+          <p:cNvSpPr txBox="1"/>
+          <p:nvPr/>
+        </p:nvSpPr>
+        <p:spPr>
+          <a:xfrm>
+            <a:off x="457200" y="932688"/>
+            <a:ext cx="11277295" cy="420624"/>
+          </a:xfrm>
+          <a:prstGeom prst="rect">
+            <a:avLst/>
+          </a:prstGeom>
+          <a:noFill/>
+        </p:spPr>
+        <p:txBody>
+          <a:bodyPr wrap="square" anchor="ctr"/>
+          <a:lstStyle/>
+          <a:p>
+            <a:pPr algn="l">
+              <a:lnSpc>
+                <a:spcPct val="110000"/>
+              </a:lnSpc>
+            </a:pPr>
+            <a:r>
+              <a:rPr sz="1600" b="0">
+                <a:solidFill>
+                  <a:srgbClr val="556175"/>
+                </a:solidFill>
+                <a:latin typeface="맑은 고딕"/>
+                <a:ea typeface="맑은 고딕"/>
+                <a:cs typeface="맑은 고딕"/>
+              </a:rPr>
+              <a:t>여러 서버의 도구를 이어 불러 만든 작업 요약 한 건과, 서버별 권한 · 실패를 견준 기록이 남는다.</a:t>
+            </a:r>
+          </a:p>
+        </p:txBody>
+      </p:sp>
+      <p:sp>
+        <p:nvSpPr>
+          <p:cNvPr id="4" name="Rectangle 3"/>
+          <p:cNvSpPr/>
+          <p:nvPr/>
+        </p:nvSpPr>
+        <p:spPr>
+          <a:xfrm>
+            <a:off x="548640" y="1408176"/>
+            <a:ext cx="11094415" cy="18288"/>
+          </a:xfrm>
+          <a:prstGeom prst="rect">
+            <a:avLst/>
+          </a:prstGeom>
+          <a:solidFill>
+            <a:srgbClr val="D3D9E1"/>
+          </a:solidFill>
+          <a:ln>
+            <a:noFill/>
+          </a:ln>
+        </p:spPr>
+        <p:txBody>
+          <a:bodyPr rtlCol="0" anchor="ctr"/>
+          <a:lstStyle/>
+          <a:p>
+            <a:pPr algn="ctr"/>
+          </a:p>
+        </p:txBody>
+      </p:sp>
+      <p:sp>
+        <p:nvSpPr>
+          <p:cNvPr id="5" name="TextBox 4"/>
+          <p:cNvSpPr txBox="1"/>
+          <p:nvPr/>
+        </p:nvSpPr>
+        <p:spPr>
+          <a:xfrm>
+            <a:off x="10911535" y="6473952"/>
+            <a:ext cx="822960" cy="274320"/>
           </a:xfrm>
           <a:prstGeom prst="rect">
             <a:avLst/>
@@ -58294,37 +57642,548 @@
           <a:bodyPr wrap="square" anchor="t"/>
           <a:lstStyle/>
           <a:p>
-            <a:pPr algn="l">
-              <a:lnSpc>
-                <a:spcPct val="110000"/>
-              </a:lnSpc>
-            </a:pPr>
-            <a:r>
-              <a:rPr sz="2000" b="1">
-                <a:solidFill>
-                  <a:srgbClr val="5CB8F2"/>
-                </a:solidFill>
-                <a:latin typeface="맑은 고딕"/>
-                <a:ea typeface="맑은 고딕"/>
-                <a:cs typeface="맑은 고딕"/>
-              </a:rPr>
-              <a:t>경남대학교 피지컬AI 사관학교</a:t>
-            </a:r>
-          </a:p>
-        </p:txBody>
-      </p:sp>
-      <p:sp>
-        <p:nvSpPr>
-          <p:cNvPr id="3" name="Rectangle 2"/>
+            <a:pPr algn="r">
+              <a:lnSpc>
+                <a:spcPct val="110000"/>
+              </a:lnSpc>
+            </a:pPr>
+            <a:r>
+              <a:rPr sz="1000" b="0">
+                <a:solidFill>
+                  <a:srgbClr val="556175"/>
+                </a:solidFill>
+                <a:latin typeface="맑은 고딕"/>
+                <a:ea typeface="맑은 고딕"/>
+                <a:cs typeface="맑은 고딕"/>
+              </a:rPr>
+              <a:t>69</a:t>
+            </a:r>
+          </a:p>
+        </p:txBody>
+      </p:sp>
+      <p:sp>
+        <p:nvSpPr>
+          <p:cNvPr id="6" name="Rounded Rectangle 5"/>
           <p:cNvSpPr/>
           <p:nvPr/>
         </p:nvSpPr>
         <p:spPr>
           <a:xfrm>
-            <a:off x="548640" y="859536"/>
-            <a:ext cx="3606800" cy="41148"/>
-          </a:xfrm>
-          <a:prstGeom prst="rect">
+            <a:off x="548640" y="2498598"/>
+            <a:ext cx="2485567" cy="2985515"/>
+          </a:xfrm>
+          <a:prstGeom prst="roundRect">
+            <a:avLst>
+              <a:gd name="adj" fmla="val 5000"/>
+            </a:avLst>
+          </a:prstGeom>
+          <a:solidFill>
+            <a:srgbClr val="F3F6F9"/>
+          </a:solidFill>
+          <a:ln>
+            <a:noFill/>
+          </a:ln>
+        </p:spPr>
+        <p:txBody>
+          <a:bodyPr rtlCol="0" anchor="ctr"/>
+          <a:lstStyle/>
+          <a:p>
+            <a:pPr algn="ctr"/>
+          </a:p>
+        </p:txBody>
+      </p:sp>
+      <p:sp>
+        <p:nvSpPr>
+          <p:cNvPr id="7" name="Oval 6"/>
+          <p:cNvSpPr/>
+          <p:nvPr/>
+        </p:nvSpPr>
+        <p:spPr>
+          <a:xfrm>
+            <a:off x="1425663" y="2681478"/>
+            <a:ext cx="731520" cy="731520"/>
+          </a:xfrm>
+          <a:prstGeom prst="ellipse">
+            <a:avLst/>
+          </a:prstGeom>
+          <a:solidFill>
+            <a:srgbClr val="FFFFFF"/>
+          </a:solidFill>
+          <a:ln>
+            <a:noFill/>
+          </a:ln>
+        </p:spPr>
+        <p:txBody>
+          <a:bodyPr rtlCol="0" anchor="ctr"/>
+          <a:lstStyle/>
+          <a:p>
+            <a:pPr algn="ctr"/>
+          </a:p>
+        </p:txBody>
+      </p:sp>
+      <p:pic>
+        <p:nvPicPr>
+          <p:cNvPr id="8" name="아이콘:server" descr="server_13294B_1.6.png"/>
+          <p:cNvPicPr>
+            <a:picLocks noChangeAspect="1"/>
+          </p:cNvPicPr>
+          <p:nvPr/>
+        </p:nvPicPr>
+        <p:blipFill>
+          <a:blip r:embed="rId3"/>
+          <a:stretch>
+            <a:fillRect/>
+          </a:stretch>
+        </p:blipFill>
+        <p:spPr>
+          <a:xfrm>
+            <a:off x="1579283" y="2835097"/>
+            <a:ext cx="424281" cy="424281"/>
+          </a:xfrm>
+          <a:prstGeom prst="rect">
+            <a:avLst/>
+          </a:prstGeom>
+        </p:spPr>
+      </p:pic>
+      <p:sp>
+        <p:nvSpPr>
+          <p:cNvPr id="9" name="TextBox 8"/>
+          <p:cNvSpPr txBox="1"/>
+          <p:nvPr/>
+        </p:nvSpPr>
+        <p:spPr>
+          <a:xfrm>
+            <a:off x="621792" y="3486150"/>
+            <a:ext cx="2339263" cy="1924811"/>
+          </a:xfrm>
+          <a:prstGeom prst="rect">
+            <a:avLst/>
+          </a:prstGeom>
+          <a:noFill/>
+        </p:spPr>
+        <p:txBody>
+          <a:bodyPr wrap="square" anchor="t"/>
+          <a:lstStyle/>
+          <a:p>
+            <a:pPr algn="ctr">
+              <a:lnSpc>
+                <a:spcPct val="110000"/>
+              </a:lnSpc>
+              <a:spcAft>
+                <a:spcPts val="400"/>
+              </a:spcAft>
+            </a:pPr>
+            <a:r>
+              <a:rPr sz="1700" b="1">
+                <a:solidFill>
+                  <a:srgbClr val="13294B"/>
+                </a:solidFill>
+                <a:latin typeface="맑은 고딕"/>
+                <a:ea typeface="맑은 고딕"/>
+                <a:cs typeface="맑은 고딕"/>
+              </a:rPr>
+              <a:t>읽기 도구 확인</a:t>
+            </a:r>
+          </a:p>
+          <a:p>
+            <a:pPr algn="ctr">
+              <a:lnSpc>
+                <a:spcPct val="110000"/>
+              </a:lnSpc>
+              <a:spcAft>
+                <a:spcPts val="400"/>
+              </a:spcAft>
+            </a:pPr>
+            <a:r>
+              <a:rPr sz="1350" b="0">
+                <a:solidFill>
+                  <a:srgbClr val="1F2A3A"/>
+                </a:solidFill>
+                <a:latin typeface="맑은 고딕"/>
+                <a:ea typeface="맑은 고딕"/>
+                <a:cs typeface="맑은 고딕"/>
+              </a:rPr>
+              <a:t>HYD에 등록된</a:t>
+            </a:r>
+          </a:p>
+          <a:p>
+            <a:pPr algn="ctr">
+              <a:lnSpc>
+                <a:spcPct val="110000"/>
+              </a:lnSpc>
+              <a:spcAft>
+                <a:spcPts val="400"/>
+              </a:spcAft>
+            </a:pPr>
+            <a:r>
+              <a:rPr sz="1350" b="0">
+                <a:solidFill>
+                  <a:srgbClr val="1F2A3A"/>
+                </a:solidFill>
+                <a:latin typeface="맑은 고딕"/>
+                <a:ea typeface="맑은 고딕"/>
+                <a:cs typeface="맑은 고딕"/>
+              </a:rPr>
+              <a:t>업무 DB 서버의</a:t>
+            </a:r>
+          </a:p>
+          <a:p>
+            <a:pPr algn="ctr">
+              <a:lnSpc>
+                <a:spcPct val="110000"/>
+              </a:lnSpc>
+              <a:spcAft>
+                <a:spcPts val="400"/>
+              </a:spcAft>
+            </a:pPr>
+            <a:r>
+              <a:rPr sz="1350" b="0">
+                <a:solidFill>
+                  <a:srgbClr val="1F2A3A"/>
+                </a:solidFill>
+                <a:latin typeface="맑은 고딕"/>
+                <a:ea typeface="맑은 고딕"/>
+                <a:cs typeface="맑은 고딕"/>
+              </a:rPr>
+              <a:t>연결 상태를 보고</a:t>
+            </a:r>
+          </a:p>
+          <a:p>
+            <a:pPr algn="ctr">
+              <a:lnSpc>
+                <a:spcPct val="110000"/>
+              </a:lnSpc>
+              <a:spcAft>
+                <a:spcPts val="400"/>
+              </a:spcAft>
+            </a:pPr>
+            <a:r>
+              <a:rPr sz="1350" b="0">
+                <a:solidFill>
+                  <a:srgbClr val="1F2A3A"/>
+                </a:solidFill>
+                <a:latin typeface="맑은 고딕"/>
+                <a:ea typeface="맑은 고딕"/>
+                <a:cs typeface="맑은 고딕"/>
+              </a:rPr>
+              <a:t>읽기 도구를 부른다</a:t>
+            </a:r>
+          </a:p>
+        </p:txBody>
+      </p:sp>
+      <p:sp>
+        <p:nvSpPr>
+          <p:cNvPr id="10" name="Right Arrow 9"/>
+          <p:cNvSpPr/>
+          <p:nvPr/>
+        </p:nvSpPr>
+        <p:spPr>
+          <a:xfrm>
+            <a:off x="3098215" y="3854196"/>
+            <a:ext cx="256031" cy="274320"/>
+          </a:xfrm>
+          <a:prstGeom prst="rightArrow">
+            <a:avLst/>
+          </a:prstGeom>
+          <a:solidFill>
+            <a:srgbClr val="13294B"/>
+          </a:solidFill>
+          <a:ln>
+            <a:noFill/>
+          </a:ln>
+        </p:spPr>
+        <p:txBody>
+          <a:bodyPr rtlCol="0" anchor="ctr"/>
+          <a:lstStyle/>
+          <a:p>
+            <a:pPr algn="ctr"/>
+          </a:p>
+        </p:txBody>
+      </p:sp>
+      <p:sp>
+        <p:nvSpPr>
+          <p:cNvPr id="11" name="Rounded Rectangle 10"/>
+          <p:cNvSpPr/>
+          <p:nvPr/>
+        </p:nvSpPr>
+        <p:spPr>
+          <a:xfrm>
+            <a:off x="3418255" y="2498598"/>
+            <a:ext cx="2485567" cy="2985515"/>
+          </a:xfrm>
+          <a:prstGeom prst="roundRect">
+            <a:avLst>
+              <a:gd name="adj" fmla="val 5000"/>
+            </a:avLst>
+          </a:prstGeom>
+          <a:solidFill>
+            <a:srgbClr val="F3F6F9"/>
+          </a:solidFill>
+          <a:ln>
+            <a:noFill/>
+          </a:ln>
+        </p:spPr>
+        <p:txBody>
+          <a:bodyPr rtlCol="0" anchor="ctr"/>
+          <a:lstStyle/>
+          <a:p>
+            <a:pPr algn="ctr"/>
+          </a:p>
+        </p:txBody>
+      </p:sp>
+      <p:sp>
+        <p:nvSpPr>
+          <p:cNvPr id="12" name="Oval 11"/>
+          <p:cNvSpPr/>
+          <p:nvPr/>
+        </p:nvSpPr>
+        <p:spPr>
+          <a:xfrm>
+            <a:off x="4295279" y="2681478"/>
+            <a:ext cx="731520" cy="731520"/>
+          </a:xfrm>
+          <a:prstGeom prst="ellipse">
+            <a:avLst/>
+          </a:prstGeom>
+          <a:solidFill>
+            <a:srgbClr val="FFFFFF"/>
+          </a:solidFill>
+          <a:ln>
+            <a:noFill/>
+          </a:ln>
+        </p:spPr>
+        <p:txBody>
+          <a:bodyPr rtlCol="0" anchor="ctr"/>
+          <a:lstStyle/>
+          <a:p>
+            <a:pPr algn="ctr"/>
+          </a:p>
+        </p:txBody>
+      </p:sp>
+      <p:pic>
+        <p:nvPicPr>
+          <p:cNvPr id="13" name="아이콘:plug-connected" descr="plug-connected_13294B_1.6.png"/>
+          <p:cNvPicPr>
+            <a:picLocks noChangeAspect="1"/>
+          </p:cNvPicPr>
+          <p:nvPr/>
+        </p:nvPicPr>
+        <p:blipFill>
+          <a:blip r:embed="rId4"/>
+          <a:stretch>
+            <a:fillRect/>
+          </a:stretch>
+        </p:blipFill>
+        <p:spPr>
+          <a:xfrm>
+            <a:off x="4448898" y="2835097"/>
+            <a:ext cx="424281" cy="424281"/>
+          </a:xfrm>
+          <a:prstGeom prst="rect">
+            <a:avLst/>
+          </a:prstGeom>
+        </p:spPr>
+      </p:pic>
+      <p:sp>
+        <p:nvSpPr>
+          <p:cNvPr id="14" name="TextBox 13"/>
+          <p:cNvSpPr txBox="1"/>
+          <p:nvPr/>
+        </p:nvSpPr>
+        <p:spPr>
+          <a:xfrm>
+            <a:off x="3491407" y="3486150"/>
+            <a:ext cx="2339263" cy="1924811"/>
+          </a:xfrm>
+          <a:prstGeom prst="rect">
+            <a:avLst/>
+          </a:prstGeom>
+          <a:noFill/>
+        </p:spPr>
+        <p:txBody>
+          <a:bodyPr wrap="square" anchor="t"/>
+          <a:lstStyle/>
+          <a:p>
+            <a:pPr algn="ctr">
+              <a:lnSpc>
+                <a:spcPct val="110000"/>
+              </a:lnSpc>
+              <a:spcAft>
+                <a:spcPts val="400"/>
+              </a:spcAft>
+            </a:pPr>
+            <a:r>
+              <a:rPr sz="1700" b="1">
+                <a:solidFill>
+                  <a:srgbClr val="13294B"/>
+                </a:solidFill>
+                <a:latin typeface="맑은 고딕"/>
+                <a:ea typeface="맑은 고딕"/>
+                <a:cs typeface="맑은 고딕"/>
+              </a:rPr>
+              <a:t>서버마다 연결</a:t>
+            </a:r>
+          </a:p>
+          <a:p>
+            <a:pPr algn="ctr">
+              <a:lnSpc>
+                <a:spcPct val="110000"/>
+              </a:lnSpc>
+              <a:spcAft>
+                <a:spcPts val="400"/>
+              </a:spcAft>
+            </a:pPr>
+            <a:r>
+              <a:rPr sz="1350" b="0">
+                <a:solidFill>
+                  <a:srgbClr val="1F2A3A"/>
+                </a:solidFill>
+                <a:latin typeface="맑은 고딕"/>
+                <a:ea typeface="맑은 고딕"/>
+                <a:cs typeface="맑은 고딕"/>
+              </a:rPr>
+              <a:t>Claude Code에</a:t>
+            </a:r>
+          </a:p>
+          <a:p>
+            <a:pPr algn="ctr">
+              <a:lnSpc>
+                <a:spcPct val="110000"/>
+              </a:lnSpc>
+              <a:spcAft>
+                <a:spcPts val="400"/>
+              </a:spcAft>
+            </a:pPr>
+            <a:r>
+              <a:rPr sz="1350" b="0">
+                <a:solidFill>
+                  <a:srgbClr val="1F2A3A"/>
+                </a:solidFill>
+                <a:latin typeface="맑은 고딕"/>
+                <a:ea typeface="맑은 고딕"/>
+                <a:cs typeface="맑은 고딕"/>
+              </a:rPr>
+              <a:t>파일시스템, Git,</a:t>
+            </a:r>
+          </a:p>
+          <a:p>
+            <a:pPr algn="ctr">
+              <a:lnSpc>
+                <a:spcPct val="110000"/>
+              </a:lnSpc>
+              <a:spcAft>
+                <a:spcPts val="400"/>
+              </a:spcAft>
+            </a:pPr>
+            <a:r>
+              <a:rPr sz="1350" b="0">
+                <a:solidFill>
+                  <a:srgbClr val="1F2A3A"/>
+                </a:solidFill>
+                <a:latin typeface="맑은 고딕"/>
+                <a:ea typeface="맑은 고딕"/>
+                <a:cs typeface="맑은 고딕"/>
+              </a:rPr>
+              <a:t>시간 서버를 연결하고</a:t>
+            </a:r>
+          </a:p>
+          <a:p>
+            <a:pPr algn="ctr">
+              <a:lnSpc>
+                <a:spcPct val="110000"/>
+              </a:lnSpc>
+              <a:spcAft>
+                <a:spcPts val="400"/>
+              </a:spcAft>
+            </a:pPr>
+            <a:r>
+              <a:rPr sz="1350" b="0">
+                <a:solidFill>
+                  <a:srgbClr val="1F2A3A"/>
+                </a:solidFill>
+                <a:latin typeface="맑은 고딕"/>
+                <a:ea typeface="맑은 고딕"/>
+                <a:cs typeface="맑은 고딕"/>
+              </a:rPr>
+              <a:t>접근 권한을 정한다</a:t>
+            </a:r>
+          </a:p>
+        </p:txBody>
+      </p:sp>
+      <p:sp>
+        <p:nvSpPr>
+          <p:cNvPr id="15" name="Right Arrow 14"/>
+          <p:cNvSpPr/>
+          <p:nvPr/>
+        </p:nvSpPr>
+        <p:spPr>
+          <a:xfrm>
+            <a:off x="5967831" y="3854196"/>
+            <a:ext cx="256031" cy="274320"/>
+          </a:xfrm>
+          <a:prstGeom prst="rightArrow">
+            <a:avLst/>
+          </a:prstGeom>
+          <a:solidFill>
+            <a:srgbClr val="13294B"/>
+          </a:solidFill>
+          <a:ln>
+            <a:noFill/>
+          </a:ln>
+        </p:spPr>
+        <p:txBody>
+          <a:bodyPr rtlCol="0" anchor="ctr"/>
+          <a:lstStyle/>
+          <a:p>
+            <a:pPr algn="ctr"/>
+          </a:p>
+        </p:txBody>
+      </p:sp>
+      <p:sp>
+        <p:nvSpPr>
+          <p:cNvPr id="16" name="Rounded Rectangle 15"/>
+          <p:cNvSpPr/>
+          <p:nvPr/>
+        </p:nvSpPr>
+        <p:spPr>
+          <a:xfrm>
+            <a:off x="6287871" y="2498598"/>
+            <a:ext cx="2485567" cy="2985515"/>
+          </a:xfrm>
+          <a:prstGeom prst="roundRect">
+            <a:avLst>
+              <a:gd name="adj" fmla="val 5000"/>
+            </a:avLst>
+          </a:prstGeom>
+          <a:solidFill>
+            <a:srgbClr val="E7F3FD"/>
+          </a:solidFill>
+          <a:ln w="25400">
+            <a:solidFill>
+              <a:srgbClr val="5CB8F2"/>
+            </a:solidFill>
+          </a:ln>
+        </p:spPr>
+        <p:txBody>
+          <a:bodyPr rtlCol="0" anchor="ctr"/>
+          <a:lstStyle/>
+          <a:p>
+            <a:pPr algn="ctr"/>
+          </a:p>
+        </p:txBody>
+      </p:sp>
+      <p:sp>
+        <p:nvSpPr>
+          <p:cNvPr id="17" name="Oval 16"/>
+          <p:cNvSpPr/>
+          <p:nvPr/>
+        </p:nvSpPr>
+        <p:spPr>
+          <a:xfrm>
+            <a:off x="7164895" y="2681478"/>
+            <a:ext cx="731520" cy="731520"/>
+          </a:xfrm>
+          <a:prstGeom prst="ellipse">
             <a:avLst/>
           </a:prstGeom>
           <a:solidFill>
@@ -58342,33 +58201,60 @@
           </a:p>
         </p:txBody>
       </p:sp>
-      <p:sp>
-        <p:nvSpPr>
-          <p:cNvPr id="4" name="TextBox 3"/>
-          <p:cNvSpPr txBox="1"/>
-          <p:nvPr/>
-        </p:nvSpPr>
-        <p:spPr>
-          <a:xfrm>
-            <a:off x="731520" y="2011680"/>
-            <a:ext cx="10911535" cy="2011680"/>
-          </a:xfrm>
-          <a:prstGeom prst="rect">
-            <a:avLst/>
-          </a:prstGeom>
-          <a:noFill/>
-        </p:spPr>
-        <p:txBody>
-          <a:bodyPr wrap="square" anchor="ctr"/>
-          <a:lstStyle/>
-          <a:p>
-            <a:pPr algn="l">
-              <a:lnSpc>
-                <a:spcPct val="110000"/>
-              </a:lnSpc>
-            </a:pPr>
-            <a:r>
-              <a:rPr sz="3400" b="1">
+      <p:pic>
+        <p:nvPicPr>
+          <p:cNvPr id="18" name="아이콘:route" descr="route_13294B_1.6.png"/>
+          <p:cNvPicPr>
+            <a:picLocks noChangeAspect="1"/>
+          </p:cNvPicPr>
+          <p:nvPr/>
+        </p:nvPicPr>
+        <p:blipFill>
+          <a:blip r:embed="rId5"/>
+          <a:stretch>
+            <a:fillRect/>
+          </a:stretch>
+        </p:blipFill>
+        <p:spPr>
+          <a:xfrm>
+            <a:off x="7318514" y="2835097"/>
+            <a:ext cx="424281" cy="424281"/>
+          </a:xfrm>
+          <a:prstGeom prst="rect">
+            <a:avLst/>
+          </a:prstGeom>
+        </p:spPr>
+      </p:pic>
+      <p:sp>
+        <p:nvSpPr>
+          <p:cNvPr id="19" name="TextBox 18"/>
+          <p:cNvSpPr txBox="1"/>
+          <p:nvPr/>
+        </p:nvSpPr>
+        <p:spPr>
+          <a:xfrm>
+            <a:off x="6361023" y="3486150"/>
+            <a:ext cx="2339263" cy="1924811"/>
+          </a:xfrm>
+          <a:prstGeom prst="rect">
+            <a:avLst/>
+          </a:prstGeom>
+          <a:noFill/>
+        </p:spPr>
+        <p:txBody>
+          <a:bodyPr wrap="square" anchor="t"/>
+          <a:lstStyle/>
+          <a:p>
+            <a:pPr algn="ctr">
+              <a:lnSpc>
+                <a:spcPct val="110000"/>
+              </a:lnSpc>
+              <a:spcAft>
+                <a:spcPts val="400"/>
+              </a:spcAft>
+            </a:pPr>
+            <a:r>
+              <a:rPr sz="1700" b="1">
                 <a:solidFill>
                   <a:srgbClr val="13294B"/>
                 </a:solidFill>
@@ -58376,29 +58262,90 @@
                 <a:ea typeface="맑은 고딕"/>
                 <a:cs typeface="맑은 고딕"/>
               </a:rPr>
-              <a:t>실습: HYD 내부 도구와 로컬 MCP 서버의 연결과 조합</a:t>
-            </a:r>
-          </a:p>
-        </p:txBody>
-      </p:sp>
-      <p:sp>
-        <p:nvSpPr>
-          <p:cNvPr id="5" name="Rounded Rectangle 4"/>
+              <a:t>한 요청에서 조합</a:t>
+            </a:r>
+          </a:p>
+          <a:p>
+            <a:pPr algn="ctr">
+              <a:lnSpc>
+                <a:spcPct val="110000"/>
+              </a:lnSpc>
+              <a:spcAft>
+                <a:spcPts val="400"/>
+              </a:spcAft>
+            </a:pPr>
+            <a:r>
+              <a:rPr sz="1350" b="0">
+                <a:solidFill>
+                  <a:srgbClr val="1F2A3A"/>
+                </a:solidFill>
+                <a:latin typeface="맑은 고딕"/>
+                <a:ea typeface="맑은 고딕"/>
+                <a:cs typeface="맑은 고딕"/>
+              </a:rPr>
+              <a:t>파일 내용, 변경 이력,</a:t>
+            </a:r>
+          </a:p>
+          <a:p>
+            <a:pPr algn="ctr">
+              <a:lnSpc>
+                <a:spcPct val="110000"/>
+              </a:lnSpc>
+              <a:spcAft>
+                <a:spcPts val="400"/>
+              </a:spcAft>
+            </a:pPr>
+            <a:r>
+              <a:rPr sz="1350" b="0">
+                <a:solidFill>
+                  <a:srgbClr val="1F2A3A"/>
+                </a:solidFill>
+                <a:latin typeface="맑은 고딕"/>
+                <a:ea typeface="맑은 고딕"/>
+                <a:cs typeface="맑은 고딕"/>
+              </a:rPr>
+              <a:t>시간을 이어 불러</a:t>
+            </a:r>
+          </a:p>
+          <a:p>
+            <a:pPr algn="ctr">
+              <a:lnSpc>
+                <a:spcPct val="110000"/>
+              </a:lnSpc>
+              <a:spcAft>
+                <a:spcPts val="400"/>
+              </a:spcAft>
+            </a:pPr>
+            <a:r>
+              <a:rPr sz="1350" b="0">
+                <a:solidFill>
+                  <a:srgbClr val="1F2A3A"/>
+                </a:solidFill>
+                <a:latin typeface="맑은 고딕"/>
+                <a:ea typeface="맑은 고딕"/>
+                <a:cs typeface="맑은 고딕"/>
+              </a:rPr>
+              <a:t>작업 요약을 만든다</a:t>
+            </a:r>
+          </a:p>
+        </p:txBody>
+      </p:sp>
+      <p:sp>
+        <p:nvSpPr>
+          <p:cNvPr id="20" name="Right Arrow 19"/>
           <p:cNvSpPr/>
           <p:nvPr/>
         </p:nvSpPr>
         <p:spPr>
           <a:xfrm>
-            <a:off x="822960" y="4160520"/>
-            <a:ext cx="822960" cy="347472"/>
-          </a:xfrm>
-          <a:prstGeom prst="roundRect">
-            <a:avLst>
-              <a:gd name="adj" fmla="val 50000"/>
-            </a:avLst>
+            <a:off x="8837447" y="3854196"/>
+            <a:ext cx="256031" cy="274320"/>
+          </a:xfrm>
+          <a:prstGeom prst="rightArrow">
+            <a:avLst/>
           </a:prstGeom>
           <a:solidFill>
-            <a:srgbClr val="5CB8F2"/>
+            <a:srgbClr val="13294B"/>
           </a:solidFill>
           <a:ln>
             <a:noFill/>
@@ -58414,31 +58361,118 @@
       </p:sp>
       <p:sp>
         <p:nvSpPr>
-          <p:cNvPr id="6" name="TextBox 5"/>
-          <p:cNvSpPr txBox="1"/>
-          <p:nvPr/>
-        </p:nvSpPr>
-        <p:spPr>
-          <a:xfrm>
-            <a:off x="822960" y="4160520"/>
-            <a:ext cx="822960" cy="347472"/>
-          </a:xfrm>
-          <a:prstGeom prst="rect">
-            <a:avLst/>
-          </a:prstGeom>
-          <a:noFill/>
-        </p:spPr>
-        <p:txBody>
-          <a:bodyPr wrap="square" anchor="ctr"/>
+          <p:cNvPr id="21" name="Rounded Rectangle 20"/>
+          <p:cNvSpPr/>
+          <p:nvPr/>
+        </p:nvSpPr>
+        <p:spPr>
+          <a:xfrm>
+            <a:off x="9157487" y="2498598"/>
+            <a:ext cx="2485567" cy="2985515"/>
+          </a:xfrm>
+          <a:prstGeom prst="roundRect">
+            <a:avLst>
+              <a:gd name="adj" fmla="val 5000"/>
+            </a:avLst>
+          </a:prstGeom>
+          <a:solidFill>
+            <a:srgbClr val="F3F6F9"/>
+          </a:solidFill>
+          <a:ln>
+            <a:noFill/>
+          </a:ln>
+        </p:spPr>
+        <p:txBody>
+          <a:bodyPr rtlCol="0" anchor="ctr"/>
+          <a:lstStyle/>
+          <a:p>
+            <a:pPr algn="ctr"/>
+          </a:p>
+        </p:txBody>
+      </p:sp>
+      <p:sp>
+        <p:nvSpPr>
+          <p:cNvPr id="22" name="Oval 21"/>
+          <p:cNvSpPr/>
+          <p:nvPr/>
+        </p:nvSpPr>
+        <p:spPr>
+          <a:xfrm>
+            <a:off x="10034511" y="2681478"/>
+            <a:ext cx="731520" cy="731520"/>
+          </a:xfrm>
+          <a:prstGeom prst="ellipse">
+            <a:avLst/>
+          </a:prstGeom>
+          <a:solidFill>
+            <a:srgbClr val="FFFFFF"/>
+          </a:solidFill>
+          <a:ln>
+            <a:noFill/>
+          </a:ln>
+        </p:spPr>
+        <p:txBody>
+          <a:bodyPr rtlCol="0" anchor="ctr"/>
+          <a:lstStyle/>
+          <a:p>
+            <a:pPr algn="ctr"/>
+          </a:p>
+        </p:txBody>
+      </p:sp>
+      <p:pic>
+        <p:nvPicPr>
+          <p:cNvPr id="23" name="아이콘:git-compare" descr="git-compare_13294B_1.6.png"/>
+          <p:cNvPicPr>
+            <a:picLocks noChangeAspect="1"/>
+          </p:cNvPicPr>
+          <p:nvPr/>
+        </p:nvPicPr>
+        <p:blipFill>
+          <a:blip r:embed="rId6"/>
+          <a:stretch>
+            <a:fillRect/>
+          </a:stretch>
+        </p:blipFill>
+        <p:spPr>
+          <a:xfrm>
+            <a:off x="10188130" y="2835097"/>
+            <a:ext cx="424281" cy="424281"/>
+          </a:xfrm>
+          <a:prstGeom prst="rect">
+            <a:avLst/>
+          </a:prstGeom>
+        </p:spPr>
+      </p:pic>
+      <p:sp>
+        <p:nvSpPr>
+          <p:cNvPr id="24" name="TextBox 23"/>
+          <p:cNvSpPr txBox="1"/>
+          <p:nvPr/>
+        </p:nvSpPr>
+        <p:spPr>
+          <a:xfrm>
+            <a:off x="9230639" y="3486150"/>
+            <a:ext cx="2339263" cy="1924811"/>
+          </a:xfrm>
+          <a:prstGeom prst="rect">
+            <a:avLst/>
+          </a:prstGeom>
+          <a:noFill/>
+        </p:spPr>
+        <p:txBody>
+          <a:bodyPr wrap="square" anchor="t"/>
           <a:lstStyle/>
           <a:p>
             <a:pPr algn="ctr">
               <a:lnSpc>
                 <a:spcPct val="110000"/>
               </a:lnSpc>
-            </a:pPr>
-            <a:r>
-              <a:rPr sz="1300" b="1">
+              <a:spcAft>
+                <a:spcPts val="400"/>
+              </a:spcAft>
+            </a:pPr>
+            <a:r>
+              <a:rPr sz="1700" b="1">
                 <a:solidFill>
                   <a:srgbClr val="13294B"/>
                 </a:solidFill>
@@ -58446,46 +58480,70 @@
                 <a:ea typeface="맑은 고딕"/>
                 <a:cs typeface="맑은 고딕"/>
               </a:rPr>
-              <a:t>실습</a:t>
-            </a:r>
-          </a:p>
-        </p:txBody>
-      </p:sp>
-      <p:sp>
-        <p:nvSpPr>
-          <p:cNvPr id="7" name="TextBox 6"/>
-          <p:cNvSpPr txBox="1"/>
-          <p:nvPr/>
-        </p:nvSpPr>
-        <p:spPr>
-          <a:xfrm>
-            <a:off x="731520" y="4617720"/>
-            <a:ext cx="10911535" cy="457200"/>
-          </a:xfrm>
-          <a:prstGeom prst="rect">
-            <a:avLst/>
-          </a:prstGeom>
-          <a:noFill/>
-        </p:spPr>
-        <p:txBody>
-          <a:bodyPr wrap="square" anchor="t"/>
-          <a:lstStyle/>
-          <a:p>
-            <a:pPr algn="l">
-              <a:lnSpc>
-                <a:spcPct val="110000"/>
-              </a:lnSpc>
-            </a:pPr>
-            <a:r>
-              <a:rPr sz="1700" b="0">
-                <a:solidFill>
-                  <a:srgbClr val="556175"/>
-                </a:solidFill>
-                <a:latin typeface="맑은 고딕"/>
-                <a:ea typeface="맑은 고딕"/>
-                <a:cs typeface="맑은 고딕"/>
-              </a:rPr>
-              <a:t>HYD의 읽기 도구를 확인하고 Claude Code에 파일시스템, Git, 시간 서버를 연결해 조합한다</a:t>
+              <a:t>권한과 실패의 비교</a:t>
+            </a:r>
+          </a:p>
+          <a:p>
+            <a:pPr algn="ctr">
+              <a:lnSpc>
+                <a:spcPct val="110000"/>
+              </a:lnSpc>
+              <a:spcAft>
+                <a:spcPts val="400"/>
+              </a:spcAft>
+            </a:pPr>
+            <a:r>
+              <a:rPr sz="1350" b="0">
+                <a:solidFill>
+                  <a:srgbClr val="1F2A3A"/>
+                </a:solidFill>
+                <a:latin typeface="맑은 고딕"/>
+                <a:ea typeface="맑은 고딕"/>
+                <a:cs typeface="맑은 고딕"/>
+              </a:rPr>
+              <a:t>서버마다 허용된 일과</a:t>
+            </a:r>
+          </a:p>
+          <a:p>
+            <a:pPr algn="ctr">
+              <a:lnSpc>
+                <a:spcPct val="110000"/>
+              </a:lnSpc>
+              <a:spcAft>
+                <a:spcPts val="400"/>
+              </a:spcAft>
+            </a:pPr>
+            <a:r>
+              <a:rPr sz="1350" b="0">
+                <a:solidFill>
+                  <a:srgbClr val="1F2A3A"/>
+                </a:solidFill>
+                <a:latin typeface="맑은 고딕"/>
+                <a:ea typeface="맑은 고딕"/>
+                <a:cs typeface="맑은 고딕"/>
+              </a:rPr>
+              <a:t>호출이 실패했을 때의</a:t>
+            </a:r>
+          </a:p>
+          <a:p>
+            <a:pPr algn="ctr">
+              <a:lnSpc>
+                <a:spcPct val="110000"/>
+              </a:lnSpc>
+              <a:spcAft>
+                <a:spcPts val="400"/>
+              </a:spcAft>
+            </a:pPr>
+            <a:r>
+              <a:rPr sz="1350" b="0">
+                <a:solidFill>
+                  <a:srgbClr val="1F2A3A"/>
+                </a:solidFill>
+                <a:latin typeface="맑은 고딕"/>
+                <a:ea typeface="맑은 고딕"/>
+                <a:cs typeface="맑은 고딕"/>
+              </a:rPr>
+              <a:t>모습을 견준다</a:t>
             </a:r>
           </a:p>
         </p:txBody>
@@ -59442,7 +59500,7 @@
                 <a:ea typeface="맑은 고딕"/>
                 <a:cs typeface="맑은 고딕"/>
               </a:rPr>
-              <a:t>실습에서 연결하는 것과 조합해 만드는 것</a:t>
+              <a:t>오늘 다룬 핵심 개념과 주요 용어 정리</a:t>
             </a:r>
           </a:p>
         </p:txBody>
@@ -59481,7 +59539,7 @@
                 <a:ea typeface="맑은 고딕"/>
                 <a:cs typeface="맑은 고딕"/>
               </a:rPr>
-              <a:t>여러 서버의 도구를 이어 불러 만든 작업 요약 한 건과, 서버별 권한 · 실패를 견준 기록이 남는다.</a:t>
+              <a:t>이 일차에서 정식 명칭을 붙인 용어와, 그 용어가 에이전트와 도구 연결에서 놓이는 자리를 모은다.</a:t>
             </a:r>
           </a:p>
         </p:txBody>
@@ -59562,12 +59620,160 @@
         </p:nvSpPr>
         <p:spPr>
           <a:xfrm>
-            <a:off x="548640" y="2498598"/>
-            <a:ext cx="2485567" cy="2985515"/>
+            <a:off x="548640" y="1627632"/>
+            <a:ext cx="11094415" cy="347472"/>
           </a:xfrm>
           <a:prstGeom prst="roundRect">
             <a:avLst>
-              <a:gd name="adj" fmla="val 5000"/>
+              <a:gd name="adj" fmla="val 12000"/>
+            </a:avLst>
+          </a:prstGeom>
+          <a:solidFill>
+            <a:srgbClr val="13294B"/>
+          </a:solidFill>
+          <a:ln>
+            <a:noFill/>
+          </a:ln>
+        </p:spPr>
+        <p:txBody>
+          <a:bodyPr rtlCol="0" anchor="ctr"/>
+          <a:lstStyle/>
+          <a:p>
+            <a:pPr algn="ctr"/>
+          </a:p>
+        </p:txBody>
+      </p:sp>
+      <p:sp>
+        <p:nvSpPr>
+          <p:cNvPr id="7" name="TextBox 6"/>
+          <p:cNvSpPr txBox="1"/>
+          <p:nvPr/>
+        </p:nvSpPr>
+        <p:spPr>
+          <a:xfrm>
+            <a:off x="685800" y="1627632"/>
+            <a:ext cx="2514600" cy="347472"/>
+          </a:xfrm>
+          <a:prstGeom prst="rect">
+            <a:avLst/>
+          </a:prstGeom>
+          <a:noFill/>
+        </p:spPr>
+        <p:txBody>
+          <a:bodyPr wrap="square" anchor="ctr"/>
+          <a:lstStyle/>
+          <a:p>
+            <a:pPr algn="l">
+              <a:lnSpc>
+                <a:spcPct val="110000"/>
+              </a:lnSpc>
+            </a:pPr>
+            <a:r>
+              <a:rPr sz="1300" b="1">
+                <a:solidFill>
+                  <a:srgbClr val="FFFFFF"/>
+                </a:solidFill>
+                <a:latin typeface="맑은 고딕"/>
+                <a:ea typeface="맑은 고딕"/>
+                <a:cs typeface="맑은 고딕"/>
+              </a:rPr>
+              <a:t>용어</a:t>
+            </a:r>
+          </a:p>
+        </p:txBody>
+      </p:sp>
+      <p:sp>
+        <p:nvSpPr>
+          <p:cNvPr id="8" name="TextBox 7"/>
+          <p:cNvSpPr txBox="1"/>
+          <p:nvPr/>
+        </p:nvSpPr>
+        <p:spPr>
+          <a:xfrm>
+            <a:off x="3200400" y="1627632"/>
+            <a:ext cx="6248095" cy="347472"/>
+          </a:xfrm>
+          <a:prstGeom prst="rect">
+            <a:avLst/>
+          </a:prstGeom>
+          <a:noFill/>
+        </p:spPr>
+        <p:txBody>
+          <a:bodyPr wrap="square" anchor="ctr"/>
+          <a:lstStyle/>
+          <a:p>
+            <a:pPr algn="l">
+              <a:lnSpc>
+                <a:spcPct val="110000"/>
+              </a:lnSpc>
+            </a:pPr>
+            <a:r>
+              <a:rPr sz="1300" b="1">
+                <a:solidFill>
+                  <a:srgbClr val="FFFFFF"/>
+                </a:solidFill>
+                <a:latin typeface="맑은 고딕"/>
+                <a:ea typeface="맑은 고딕"/>
+                <a:cs typeface="맑은 고딕"/>
+              </a:rPr>
+              <a:t>정식 명칭</a:t>
+            </a:r>
+          </a:p>
+        </p:txBody>
+      </p:sp>
+      <p:sp>
+        <p:nvSpPr>
+          <p:cNvPr id="9" name="TextBox 8"/>
+          <p:cNvSpPr txBox="1"/>
+          <p:nvPr/>
+        </p:nvSpPr>
+        <p:spPr>
+          <a:xfrm>
+            <a:off x="9448495" y="1627632"/>
+            <a:ext cx="2194560" cy="347472"/>
+          </a:xfrm>
+          <a:prstGeom prst="rect">
+            <a:avLst/>
+          </a:prstGeom>
+          <a:noFill/>
+        </p:spPr>
+        <p:txBody>
+          <a:bodyPr wrap="square" anchor="ctr"/>
+          <a:lstStyle/>
+          <a:p>
+            <a:pPr algn="l">
+              <a:lnSpc>
+                <a:spcPct val="110000"/>
+              </a:lnSpc>
+            </a:pPr>
+            <a:r>
+              <a:rPr sz="1300" b="1">
+                <a:solidFill>
+                  <a:srgbClr val="FFFFFF"/>
+                </a:solidFill>
+                <a:latin typeface="맑은 고딕"/>
+                <a:ea typeface="맑은 고딕"/>
+                <a:cs typeface="맑은 고딕"/>
+              </a:rPr>
+              <a:t>에이전트와 도구 연결에서</a:t>
+            </a:r>
+          </a:p>
+        </p:txBody>
+      </p:sp>
+      <p:sp>
+        <p:nvSpPr>
+          <p:cNvPr id="10" name="Rounded Rectangle 9"/>
+          <p:cNvSpPr/>
+          <p:nvPr/>
+        </p:nvSpPr>
+        <p:spPr>
+          <a:xfrm>
+            <a:off x="548640" y="2061972"/>
+            <a:ext cx="11094415" cy="476631"/>
+          </a:xfrm>
+          <a:prstGeom prst="roundRect">
+            <a:avLst>
+              <a:gd name="adj" fmla="val 8000"/>
             </a:avLst>
           </a:prstGeom>
           <a:solidFill>
@@ -59587,226 +59793,135 @@
       </p:sp>
       <p:sp>
         <p:nvSpPr>
-          <p:cNvPr id="7" name="Oval 6"/>
+          <p:cNvPr id="11" name="TextBox 10"/>
+          <p:cNvSpPr txBox="1"/>
+          <p:nvPr/>
+        </p:nvSpPr>
+        <p:spPr>
+          <a:xfrm>
+            <a:off x="685800" y="2029968"/>
+            <a:ext cx="2514600" cy="540639"/>
+          </a:xfrm>
+          <a:prstGeom prst="rect">
+            <a:avLst/>
+          </a:prstGeom>
+          <a:noFill/>
+        </p:spPr>
+        <p:txBody>
+          <a:bodyPr wrap="square" anchor="ctr"/>
+          <a:lstStyle/>
+          <a:p>
+            <a:pPr algn="l">
+              <a:lnSpc>
+                <a:spcPct val="110000"/>
+              </a:lnSpc>
+            </a:pPr>
+            <a:r>
+              <a:rPr sz="1450" b="1">
+                <a:solidFill>
+                  <a:srgbClr val="13294B"/>
+                </a:solidFill>
+                <a:latin typeface="맑은 고딕"/>
+                <a:ea typeface="맑은 고딕"/>
+                <a:cs typeface="맑은 고딕"/>
+              </a:rPr>
+              <a:t>RAG</a:t>
+            </a:r>
+          </a:p>
+        </p:txBody>
+      </p:sp>
+      <p:sp>
+        <p:nvSpPr>
+          <p:cNvPr id="12" name="TextBox 11"/>
+          <p:cNvSpPr txBox="1"/>
+          <p:nvPr/>
+        </p:nvSpPr>
+        <p:spPr>
+          <a:xfrm>
+            <a:off x="3200400" y="2029968"/>
+            <a:ext cx="6156655" cy="540639"/>
+          </a:xfrm>
+          <a:prstGeom prst="rect">
+            <a:avLst/>
+          </a:prstGeom>
+          <a:noFill/>
+        </p:spPr>
+        <p:txBody>
+          <a:bodyPr wrap="square" anchor="ctr"/>
+          <a:lstStyle/>
+          <a:p>
+            <a:pPr algn="l">
+              <a:lnSpc>
+                <a:spcPct val="110000"/>
+              </a:lnSpc>
+            </a:pPr>
+            <a:r>
+              <a:rPr sz="1400" b="0">
+                <a:solidFill>
+                  <a:srgbClr val="1F2A3A"/>
+                </a:solidFill>
+                <a:latin typeface="맑은 고딕"/>
+                <a:ea typeface="맑은 고딕"/>
+                <a:cs typeface="맑은 고딕"/>
+              </a:rPr>
+              <a:t>Retrieval-Augmented Generation</a:t>
+            </a:r>
+          </a:p>
+        </p:txBody>
+      </p:sp>
+      <p:sp>
+        <p:nvSpPr>
+          <p:cNvPr id="13" name="TextBox 12"/>
+          <p:cNvSpPr txBox="1"/>
+          <p:nvPr/>
+        </p:nvSpPr>
+        <p:spPr>
+          <a:xfrm>
+            <a:off x="9448495" y="2029968"/>
+            <a:ext cx="2103120" cy="540639"/>
+          </a:xfrm>
+          <a:prstGeom prst="rect">
+            <a:avLst/>
+          </a:prstGeom>
+          <a:noFill/>
+        </p:spPr>
+        <p:txBody>
+          <a:bodyPr wrap="square" anchor="ctr"/>
+          <a:lstStyle/>
+          <a:p>
+            <a:pPr algn="l">
+              <a:lnSpc>
+                <a:spcPct val="110000"/>
+              </a:lnSpc>
+            </a:pPr>
+            <a:r>
+              <a:rPr sz="1250" b="1">
+                <a:solidFill>
+                  <a:srgbClr val="556175"/>
+                </a:solidFill>
+                <a:latin typeface="맑은 고딕"/>
+                <a:ea typeface="맑은 고딕"/>
+                <a:cs typeface="맑은 고딕"/>
+              </a:rPr>
+              <a:t>에이전트와 견준 답변 방식</a:t>
+            </a:r>
+          </a:p>
+        </p:txBody>
+      </p:sp>
+      <p:sp>
+        <p:nvSpPr>
+          <p:cNvPr id="14" name="Rounded Rectangle 13"/>
           <p:cNvSpPr/>
           <p:nvPr/>
         </p:nvSpPr>
         <p:spPr>
           <a:xfrm>
-            <a:off x="1425663" y="2681478"/>
-            <a:ext cx="731520" cy="731520"/>
-          </a:xfrm>
-          <a:prstGeom prst="ellipse">
-            <a:avLst/>
-          </a:prstGeom>
-          <a:solidFill>
-            <a:srgbClr val="FFFFFF"/>
-          </a:solidFill>
-          <a:ln>
-            <a:noFill/>
-          </a:ln>
-        </p:spPr>
-        <p:txBody>
-          <a:bodyPr rtlCol="0" anchor="ctr"/>
-          <a:lstStyle/>
-          <a:p>
-            <a:pPr algn="ctr"/>
-          </a:p>
-        </p:txBody>
-      </p:sp>
-      <p:pic>
-        <p:nvPicPr>
-          <p:cNvPr id="8" name="아이콘:server" descr="server_13294B_1.6.png"/>
-          <p:cNvPicPr>
-            <a:picLocks noChangeAspect="1"/>
-          </p:cNvPicPr>
-          <p:nvPr/>
-        </p:nvPicPr>
-        <p:blipFill>
-          <a:blip r:embed="rId3"/>
-          <a:stretch>
-            <a:fillRect/>
-          </a:stretch>
-        </p:blipFill>
-        <p:spPr>
-          <a:xfrm>
-            <a:off x="1579283" y="2835097"/>
-            <a:ext cx="424281" cy="424281"/>
-          </a:xfrm>
-          <a:prstGeom prst="rect">
-            <a:avLst/>
-          </a:prstGeom>
-        </p:spPr>
-      </p:pic>
-      <p:sp>
-        <p:nvSpPr>
-          <p:cNvPr id="9" name="TextBox 8"/>
-          <p:cNvSpPr txBox="1"/>
-          <p:nvPr/>
-        </p:nvSpPr>
-        <p:spPr>
-          <a:xfrm>
-            <a:off x="621792" y="3486150"/>
-            <a:ext cx="2339263" cy="1924811"/>
-          </a:xfrm>
-          <a:prstGeom prst="rect">
-            <a:avLst/>
-          </a:prstGeom>
-          <a:noFill/>
-        </p:spPr>
-        <p:txBody>
-          <a:bodyPr wrap="square" anchor="t"/>
-          <a:lstStyle/>
-          <a:p>
-            <a:pPr algn="ctr">
-              <a:lnSpc>
-                <a:spcPct val="110000"/>
-              </a:lnSpc>
-              <a:spcAft>
-                <a:spcPts val="400"/>
-              </a:spcAft>
-            </a:pPr>
-            <a:r>
-              <a:rPr sz="1700" b="1">
-                <a:solidFill>
-                  <a:srgbClr val="13294B"/>
-                </a:solidFill>
-                <a:latin typeface="맑은 고딕"/>
-                <a:ea typeface="맑은 고딕"/>
-                <a:cs typeface="맑은 고딕"/>
-              </a:rPr>
-              <a:t>읽기 도구 확인</a:t>
-            </a:r>
-          </a:p>
-          <a:p>
-            <a:pPr algn="ctr">
-              <a:lnSpc>
-                <a:spcPct val="110000"/>
-              </a:lnSpc>
-              <a:spcAft>
-                <a:spcPts val="400"/>
-              </a:spcAft>
-            </a:pPr>
-            <a:r>
-              <a:rPr sz="1350" b="0">
-                <a:solidFill>
-                  <a:srgbClr val="1F2A3A"/>
-                </a:solidFill>
-                <a:latin typeface="맑은 고딕"/>
-                <a:ea typeface="맑은 고딕"/>
-                <a:cs typeface="맑은 고딕"/>
-              </a:rPr>
-              <a:t>HYD에 등록된</a:t>
-            </a:r>
-          </a:p>
-          <a:p>
-            <a:pPr algn="ctr">
-              <a:lnSpc>
-                <a:spcPct val="110000"/>
-              </a:lnSpc>
-              <a:spcAft>
-                <a:spcPts val="400"/>
-              </a:spcAft>
-            </a:pPr>
-            <a:r>
-              <a:rPr sz="1350" b="0">
-                <a:solidFill>
-                  <a:srgbClr val="1F2A3A"/>
-                </a:solidFill>
-                <a:latin typeface="맑은 고딕"/>
-                <a:ea typeface="맑은 고딕"/>
-                <a:cs typeface="맑은 고딕"/>
-              </a:rPr>
-              <a:t>업무 DB 서버의</a:t>
-            </a:r>
-          </a:p>
-          <a:p>
-            <a:pPr algn="ctr">
-              <a:lnSpc>
-                <a:spcPct val="110000"/>
-              </a:lnSpc>
-              <a:spcAft>
-                <a:spcPts val="400"/>
-              </a:spcAft>
-            </a:pPr>
-            <a:r>
-              <a:rPr sz="1350" b="0">
-                <a:solidFill>
-                  <a:srgbClr val="1F2A3A"/>
-                </a:solidFill>
-                <a:latin typeface="맑은 고딕"/>
-                <a:ea typeface="맑은 고딕"/>
-                <a:cs typeface="맑은 고딕"/>
-              </a:rPr>
-              <a:t>연결 상태를 보고</a:t>
-            </a:r>
-          </a:p>
-          <a:p>
-            <a:pPr algn="ctr">
-              <a:lnSpc>
-                <a:spcPct val="110000"/>
-              </a:lnSpc>
-              <a:spcAft>
-                <a:spcPts val="400"/>
-              </a:spcAft>
-            </a:pPr>
-            <a:r>
-              <a:rPr sz="1350" b="0">
-                <a:solidFill>
-                  <a:srgbClr val="1F2A3A"/>
-                </a:solidFill>
-                <a:latin typeface="맑은 고딕"/>
-                <a:ea typeface="맑은 고딕"/>
-                <a:cs typeface="맑은 고딕"/>
-              </a:rPr>
-              <a:t>읽기 도구를 부른다</a:t>
-            </a:r>
-          </a:p>
-        </p:txBody>
-      </p:sp>
-      <p:sp>
-        <p:nvSpPr>
-          <p:cNvPr id="10" name="Right Arrow 9"/>
-          <p:cNvSpPr/>
-          <p:nvPr/>
-        </p:nvSpPr>
-        <p:spPr>
-          <a:xfrm>
-            <a:off x="3098215" y="3854196"/>
-            <a:ext cx="256031" cy="274320"/>
-          </a:xfrm>
-          <a:prstGeom prst="rightArrow">
-            <a:avLst/>
-          </a:prstGeom>
-          <a:solidFill>
-            <a:srgbClr val="13294B"/>
-          </a:solidFill>
-          <a:ln>
-            <a:noFill/>
-          </a:ln>
-        </p:spPr>
-        <p:txBody>
-          <a:bodyPr rtlCol="0" anchor="ctr"/>
-          <a:lstStyle/>
-          <a:p>
-            <a:pPr algn="ctr"/>
-          </a:p>
-        </p:txBody>
-      </p:sp>
-      <p:sp>
-        <p:nvSpPr>
-          <p:cNvPr id="11" name="Rounded Rectangle 10"/>
-          <p:cNvSpPr/>
-          <p:nvPr/>
-        </p:nvSpPr>
-        <p:spPr>
-          <a:xfrm>
-            <a:off x="3418255" y="2498598"/>
-            <a:ext cx="2485567" cy="2985515"/>
+            <a:off x="548640" y="2602611"/>
+            <a:ext cx="11094415" cy="476631"/>
           </a:xfrm>
           <a:prstGeom prst="roundRect">
             <a:avLst>
-              <a:gd name="adj" fmla="val 5000"/>
+              <a:gd name="adj" fmla="val 8000"/>
             </a:avLst>
           </a:prstGeom>
           <a:solidFill>
@@ -59826,446 +59941,135 @@
       </p:sp>
       <p:sp>
         <p:nvSpPr>
-          <p:cNvPr id="12" name="Oval 11"/>
+          <p:cNvPr id="15" name="TextBox 14"/>
+          <p:cNvSpPr txBox="1"/>
+          <p:nvPr/>
+        </p:nvSpPr>
+        <p:spPr>
+          <a:xfrm>
+            <a:off x="685800" y="2570607"/>
+            <a:ext cx="2514600" cy="540639"/>
+          </a:xfrm>
+          <a:prstGeom prst="rect">
+            <a:avLst/>
+          </a:prstGeom>
+          <a:noFill/>
+        </p:spPr>
+        <p:txBody>
+          <a:bodyPr wrap="square" anchor="ctr"/>
+          <a:lstStyle/>
+          <a:p>
+            <a:pPr algn="l">
+              <a:lnSpc>
+                <a:spcPct val="110000"/>
+              </a:lnSpc>
+            </a:pPr>
+            <a:r>
+              <a:rPr sz="1450" b="1">
+                <a:solidFill>
+                  <a:srgbClr val="13294B"/>
+                </a:solidFill>
+                <a:latin typeface="맑은 고딕"/>
+                <a:ea typeface="맑은 고딕"/>
+                <a:cs typeface="맑은 고딕"/>
+              </a:rPr>
+              <a:t>에이전트</a:t>
+            </a:r>
+          </a:p>
+        </p:txBody>
+      </p:sp>
+      <p:sp>
+        <p:nvSpPr>
+          <p:cNvPr id="16" name="TextBox 15"/>
+          <p:cNvSpPr txBox="1"/>
+          <p:nvPr/>
+        </p:nvSpPr>
+        <p:spPr>
+          <a:xfrm>
+            <a:off x="3200400" y="2570607"/>
+            <a:ext cx="6156655" cy="540639"/>
+          </a:xfrm>
+          <a:prstGeom prst="rect">
+            <a:avLst/>
+          </a:prstGeom>
+          <a:noFill/>
+        </p:spPr>
+        <p:txBody>
+          <a:bodyPr wrap="square" anchor="ctr"/>
+          <a:lstStyle/>
+          <a:p>
+            <a:pPr algn="l">
+              <a:lnSpc>
+                <a:spcPct val="110000"/>
+              </a:lnSpc>
+            </a:pPr>
+            <a:r>
+              <a:rPr sz="1400" b="0">
+                <a:solidFill>
+                  <a:srgbClr val="1F2A3A"/>
+                </a:solidFill>
+                <a:latin typeface="맑은 고딕"/>
+                <a:ea typeface="맑은 고딕"/>
+                <a:cs typeface="맑은 고딕"/>
+              </a:rPr>
+              <a:t>AI Agent</a:t>
+            </a:r>
+          </a:p>
+        </p:txBody>
+      </p:sp>
+      <p:sp>
+        <p:nvSpPr>
+          <p:cNvPr id="17" name="TextBox 16"/>
+          <p:cNvSpPr txBox="1"/>
+          <p:nvPr/>
+        </p:nvSpPr>
+        <p:spPr>
+          <a:xfrm>
+            <a:off x="9448495" y="2570607"/>
+            <a:ext cx="2103120" cy="540639"/>
+          </a:xfrm>
+          <a:prstGeom prst="rect">
+            <a:avLst/>
+          </a:prstGeom>
+          <a:noFill/>
+        </p:spPr>
+        <p:txBody>
+          <a:bodyPr wrap="square" anchor="ctr"/>
+          <a:lstStyle/>
+          <a:p>
+            <a:pPr algn="l">
+              <a:lnSpc>
+                <a:spcPct val="110000"/>
+              </a:lnSpc>
+            </a:pPr>
+            <a:r>
+              <a:rPr sz="1250" b="1">
+                <a:solidFill>
+                  <a:srgbClr val="556175"/>
+                </a:solidFill>
+                <a:latin typeface="맑은 고딕"/>
+                <a:ea typeface="맑은 고딕"/>
+                <a:cs typeface="맑은 고딕"/>
+              </a:rPr>
+              <a:t>냉각 긴급 대응 에이전트</a:t>
+            </a:r>
+          </a:p>
+        </p:txBody>
+      </p:sp>
+      <p:sp>
+        <p:nvSpPr>
+          <p:cNvPr id="18" name="Rounded Rectangle 17"/>
           <p:cNvSpPr/>
           <p:nvPr/>
         </p:nvSpPr>
         <p:spPr>
           <a:xfrm>
-            <a:off x="4295279" y="2681478"/>
-            <a:ext cx="731520" cy="731520"/>
-          </a:xfrm>
-          <a:prstGeom prst="ellipse">
-            <a:avLst/>
-          </a:prstGeom>
-          <a:solidFill>
-            <a:srgbClr val="FFFFFF"/>
-          </a:solidFill>
-          <a:ln>
-            <a:noFill/>
-          </a:ln>
-        </p:spPr>
-        <p:txBody>
-          <a:bodyPr rtlCol="0" anchor="ctr"/>
-          <a:lstStyle/>
-          <a:p>
-            <a:pPr algn="ctr"/>
-          </a:p>
-        </p:txBody>
-      </p:sp>
-      <p:pic>
-        <p:nvPicPr>
-          <p:cNvPr id="13" name="아이콘:plug-connected" descr="plug-connected_13294B_1.6.png"/>
-          <p:cNvPicPr>
-            <a:picLocks noChangeAspect="1"/>
-          </p:cNvPicPr>
-          <p:nvPr/>
-        </p:nvPicPr>
-        <p:blipFill>
-          <a:blip r:embed="rId4"/>
-          <a:stretch>
-            <a:fillRect/>
-          </a:stretch>
-        </p:blipFill>
-        <p:spPr>
-          <a:xfrm>
-            <a:off x="4448898" y="2835097"/>
-            <a:ext cx="424281" cy="424281"/>
-          </a:xfrm>
-          <a:prstGeom prst="rect">
-            <a:avLst/>
-          </a:prstGeom>
-        </p:spPr>
-      </p:pic>
-      <p:sp>
-        <p:nvSpPr>
-          <p:cNvPr id="14" name="TextBox 13"/>
-          <p:cNvSpPr txBox="1"/>
-          <p:nvPr/>
-        </p:nvSpPr>
-        <p:spPr>
-          <a:xfrm>
-            <a:off x="3491407" y="3486150"/>
-            <a:ext cx="2339263" cy="1924811"/>
-          </a:xfrm>
-          <a:prstGeom prst="rect">
-            <a:avLst/>
-          </a:prstGeom>
-          <a:noFill/>
-        </p:spPr>
-        <p:txBody>
-          <a:bodyPr wrap="square" anchor="t"/>
-          <a:lstStyle/>
-          <a:p>
-            <a:pPr algn="ctr">
-              <a:lnSpc>
-                <a:spcPct val="110000"/>
-              </a:lnSpc>
-              <a:spcAft>
-                <a:spcPts val="400"/>
-              </a:spcAft>
-            </a:pPr>
-            <a:r>
-              <a:rPr sz="1700" b="1">
-                <a:solidFill>
-                  <a:srgbClr val="13294B"/>
-                </a:solidFill>
-                <a:latin typeface="맑은 고딕"/>
-                <a:ea typeface="맑은 고딕"/>
-                <a:cs typeface="맑은 고딕"/>
-              </a:rPr>
-              <a:t>서버마다 연결</a:t>
-            </a:r>
-          </a:p>
-          <a:p>
-            <a:pPr algn="ctr">
-              <a:lnSpc>
-                <a:spcPct val="110000"/>
-              </a:lnSpc>
-              <a:spcAft>
-                <a:spcPts val="400"/>
-              </a:spcAft>
-            </a:pPr>
-            <a:r>
-              <a:rPr sz="1350" b="0">
-                <a:solidFill>
-                  <a:srgbClr val="1F2A3A"/>
-                </a:solidFill>
-                <a:latin typeface="맑은 고딕"/>
-                <a:ea typeface="맑은 고딕"/>
-                <a:cs typeface="맑은 고딕"/>
-              </a:rPr>
-              <a:t>Claude Code에</a:t>
-            </a:r>
-          </a:p>
-          <a:p>
-            <a:pPr algn="ctr">
-              <a:lnSpc>
-                <a:spcPct val="110000"/>
-              </a:lnSpc>
-              <a:spcAft>
-                <a:spcPts val="400"/>
-              </a:spcAft>
-            </a:pPr>
-            <a:r>
-              <a:rPr sz="1350" b="0">
-                <a:solidFill>
-                  <a:srgbClr val="1F2A3A"/>
-                </a:solidFill>
-                <a:latin typeface="맑은 고딕"/>
-                <a:ea typeface="맑은 고딕"/>
-                <a:cs typeface="맑은 고딕"/>
-              </a:rPr>
-              <a:t>파일시스템, Git,</a:t>
-            </a:r>
-          </a:p>
-          <a:p>
-            <a:pPr algn="ctr">
-              <a:lnSpc>
-                <a:spcPct val="110000"/>
-              </a:lnSpc>
-              <a:spcAft>
-                <a:spcPts val="400"/>
-              </a:spcAft>
-            </a:pPr>
-            <a:r>
-              <a:rPr sz="1350" b="0">
-                <a:solidFill>
-                  <a:srgbClr val="1F2A3A"/>
-                </a:solidFill>
-                <a:latin typeface="맑은 고딕"/>
-                <a:ea typeface="맑은 고딕"/>
-                <a:cs typeface="맑은 고딕"/>
-              </a:rPr>
-              <a:t>시간 서버를 연결하고</a:t>
-            </a:r>
-          </a:p>
-          <a:p>
-            <a:pPr algn="ctr">
-              <a:lnSpc>
-                <a:spcPct val="110000"/>
-              </a:lnSpc>
-              <a:spcAft>
-                <a:spcPts val="400"/>
-              </a:spcAft>
-            </a:pPr>
-            <a:r>
-              <a:rPr sz="1350" b="0">
-                <a:solidFill>
-                  <a:srgbClr val="1F2A3A"/>
-                </a:solidFill>
-                <a:latin typeface="맑은 고딕"/>
-                <a:ea typeface="맑은 고딕"/>
-                <a:cs typeface="맑은 고딕"/>
-              </a:rPr>
-              <a:t>접근 권한을 정한다</a:t>
-            </a:r>
-          </a:p>
-        </p:txBody>
-      </p:sp>
-      <p:sp>
-        <p:nvSpPr>
-          <p:cNvPr id="15" name="Right Arrow 14"/>
-          <p:cNvSpPr/>
-          <p:nvPr/>
-        </p:nvSpPr>
-        <p:spPr>
-          <a:xfrm>
-            <a:off x="5967831" y="3854196"/>
-            <a:ext cx="256031" cy="274320"/>
-          </a:xfrm>
-          <a:prstGeom prst="rightArrow">
-            <a:avLst/>
-          </a:prstGeom>
-          <a:solidFill>
-            <a:srgbClr val="13294B"/>
-          </a:solidFill>
-          <a:ln>
-            <a:noFill/>
-          </a:ln>
-        </p:spPr>
-        <p:txBody>
-          <a:bodyPr rtlCol="0" anchor="ctr"/>
-          <a:lstStyle/>
-          <a:p>
-            <a:pPr algn="ctr"/>
-          </a:p>
-        </p:txBody>
-      </p:sp>
-      <p:sp>
-        <p:nvSpPr>
-          <p:cNvPr id="16" name="Rounded Rectangle 15"/>
-          <p:cNvSpPr/>
-          <p:nvPr/>
-        </p:nvSpPr>
-        <p:spPr>
-          <a:xfrm>
-            <a:off x="6287871" y="2498598"/>
-            <a:ext cx="2485567" cy="2985515"/>
+            <a:off x="548640" y="3143250"/>
+            <a:ext cx="11094415" cy="476631"/>
           </a:xfrm>
           <a:prstGeom prst="roundRect">
             <a:avLst>
-              <a:gd name="adj" fmla="val 5000"/>
-            </a:avLst>
-          </a:prstGeom>
-          <a:solidFill>
-            <a:srgbClr val="E7F3FD"/>
-          </a:solidFill>
-          <a:ln w="25400">
-            <a:solidFill>
-              <a:srgbClr val="5CB8F2"/>
-            </a:solidFill>
-          </a:ln>
-        </p:spPr>
-        <p:txBody>
-          <a:bodyPr rtlCol="0" anchor="ctr"/>
-          <a:lstStyle/>
-          <a:p>
-            <a:pPr algn="ctr"/>
-          </a:p>
-        </p:txBody>
-      </p:sp>
-      <p:sp>
-        <p:nvSpPr>
-          <p:cNvPr id="17" name="Oval 16"/>
-          <p:cNvSpPr/>
-          <p:nvPr/>
-        </p:nvSpPr>
-        <p:spPr>
-          <a:xfrm>
-            <a:off x="7164895" y="2681478"/>
-            <a:ext cx="731520" cy="731520"/>
-          </a:xfrm>
-          <a:prstGeom prst="ellipse">
-            <a:avLst/>
-          </a:prstGeom>
-          <a:solidFill>
-            <a:srgbClr val="5CB8F2"/>
-          </a:solidFill>
-          <a:ln>
-            <a:noFill/>
-          </a:ln>
-        </p:spPr>
-        <p:txBody>
-          <a:bodyPr rtlCol="0" anchor="ctr"/>
-          <a:lstStyle/>
-          <a:p>
-            <a:pPr algn="ctr"/>
-          </a:p>
-        </p:txBody>
-      </p:sp>
-      <p:pic>
-        <p:nvPicPr>
-          <p:cNvPr id="18" name="아이콘:route" descr="route_13294B_1.6.png"/>
-          <p:cNvPicPr>
-            <a:picLocks noChangeAspect="1"/>
-          </p:cNvPicPr>
-          <p:nvPr/>
-        </p:nvPicPr>
-        <p:blipFill>
-          <a:blip r:embed="rId5"/>
-          <a:stretch>
-            <a:fillRect/>
-          </a:stretch>
-        </p:blipFill>
-        <p:spPr>
-          <a:xfrm>
-            <a:off x="7318514" y="2835097"/>
-            <a:ext cx="424281" cy="424281"/>
-          </a:xfrm>
-          <a:prstGeom prst="rect">
-            <a:avLst/>
-          </a:prstGeom>
-        </p:spPr>
-      </p:pic>
-      <p:sp>
-        <p:nvSpPr>
-          <p:cNvPr id="19" name="TextBox 18"/>
-          <p:cNvSpPr txBox="1"/>
-          <p:nvPr/>
-        </p:nvSpPr>
-        <p:spPr>
-          <a:xfrm>
-            <a:off x="6361023" y="3486150"/>
-            <a:ext cx="2339263" cy="1924811"/>
-          </a:xfrm>
-          <a:prstGeom prst="rect">
-            <a:avLst/>
-          </a:prstGeom>
-          <a:noFill/>
-        </p:spPr>
-        <p:txBody>
-          <a:bodyPr wrap="square" anchor="t"/>
-          <a:lstStyle/>
-          <a:p>
-            <a:pPr algn="ctr">
-              <a:lnSpc>
-                <a:spcPct val="110000"/>
-              </a:lnSpc>
-              <a:spcAft>
-                <a:spcPts val="400"/>
-              </a:spcAft>
-            </a:pPr>
-            <a:r>
-              <a:rPr sz="1700" b="1">
-                <a:solidFill>
-                  <a:srgbClr val="13294B"/>
-                </a:solidFill>
-                <a:latin typeface="맑은 고딕"/>
-                <a:ea typeface="맑은 고딕"/>
-                <a:cs typeface="맑은 고딕"/>
-              </a:rPr>
-              <a:t>한 요청에서 조합</a:t>
-            </a:r>
-          </a:p>
-          <a:p>
-            <a:pPr algn="ctr">
-              <a:lnSpc>
-                <a:spcPct val="110000"/>
-              </a:lnSpc>
-              <a:spcAft>
-                <a:spcPts val="400"/>
-              </a:spcAft>
-            </a:pPr>
-            <a:r>
-              <a:rPr sz="1350" b="0">
-                <a:solidFill>
-                  <a:srgbClr val="1F2A3A"/>
-                </a:solidFill>
-                <a:latin typeface="맑은 고딕"/>
-                <a:ea typeface="맑은 고딕"/>
-                <a:cs typeface="맑은 고딕"/>
-              </a:rPr>
-              <a:t>파일 내용, 변경 이력,</a:t>
-            </a:r>
-          </a:p>
-          <a:p>
-            <a:pPr algn="ctr">
-              <a:lnSpc>
-                <a:spcPct val="110000"/>
-              </a:lnSpc>
-              <a:spcAft>
-                <a:spcPts val="400"/>
-              </a:spcAft>
-            </a:pPr>
-            <a:r>
-              <a:rPr sz="1350" b="0">
-                <a:solidFill>
-                  <a:srgbClr val="1F2A3A"/>
-                </a:solidFill>
-                <a:latin typeface="맑은 고딕"/>
-                <a:ea typeface="맑은 고딕"/>
-                <a:cs typeface="맑은 고딕"/>
-              </a:rPr>
-              <a:t>시간을 이어 불러</a:t>
-            </a:r>
-          </a:p>
-          <a:p>
-            <a:pPr algn="ctr">
-              <a:lnSpc>
-                <a:spcPct val="110000"/>
-              </a:lnSpc>
-              <a:spcAft>
-                <a:spcPts val="400"/>
-              </a:spcAft>
-            </a:pPr>
-            <a:r>
-              <a:rPr sz="1350" b="0">
-                <a:solidFill>
-                  <a:srgbClr val="1F2A3A"/>
-                </a:solidFill>
-                <a:latin typeface="맑은 고딕"/>
-                <a:ea typeface="맑은 고딕"/>
-                <a:cs typeface="맑은 고딕"/>
-              </a:rPr>
-              <a:t>작업 요약을 만든다</a:t>
-            </a:r>
-          </a:p>
-        </p:txBody>
-      </p:sp>
-      <p:sp>
-        <p:nvSpPr>
-          <p:cNvPr id="20" name="Right Arrow 19"/>
-          <p:cNvSpPr/>
-          <p:nvPr/>
-        </p:nvSpPr>
-        <p:spPr>
-          <a:xfrm>
-            <a:off x="8837447" y="3854196"/>
-            <a:ext cx="256031" cy="274320"/>
-          </a:xfrm>
-          <a:prstGeom prst="rightArrow">
-            <a:avLst/>
-          </a:prstGeom>
-          <a:solidFill>
-            <a:srgbClr val="13294B"/>
-          </a:solidFill>
-          <a:ln>
-            <a:noFill/>
-          </a:ln>
-        </p:spPr>
-        <p:txBody>
-          <a:bodyPr rtlCol="0" anchor="ctr"/>
-          <a:lstStyle/>
-          <a:p>
-            <a:pPr algn="ctr"/>
-          </a:p>
-        </p:txBody>
-      </p:sp>
-      <p:sp>
-        <p:nvSpPr>
-          <p:cNvPr id="21" name="Rounded Rectangle 20"/>
-          <p:cNvSpPr/>
-          <p:nvPr/>
-        </p:nvSpPr>
-        <p:spPr>
-          <a:xfrm>
-            <a:off x="9157487" y="2498598"/>
-            <a:ext cx="2485567" cy="2985515"/>
-          </a:xfrm>
-          <a:prstGeom prst="roundRect">
-            <a:avLst>
-              <a:gd name="adj" fmla="val 5000"/>
+              <a:gd name="adj" fmla="val 8000"/>
             </a:avLst>
           </a:prstGeom>
           <a:solidFill>
@@ -60285,20 +60089,139 @@
       </p:sp>
       <p:sp>
         <p:nvSpPr>
-          <p:cNvPr id="22" name="Oval 21"/>
+          <p:cNvPr id="19" name="TextBox 18"/>
+          <p:cNvSpPr txBox="1"/>
+          <p:nvPr/>
+        </p:nvSpPr>
+        <p:spPr>
+          <a:xfrm>
+            <a:off x="685800" y="3111246"/>
+            <a:ext cx="2514600" cy="540639"/>
+          </a:xfrm>
+          <a:prstGeom prst="rect">
+            <a:avLst/>
+          </a:prstGeom>
+          <a:noFill/>
+        </p:spPr>
+        <p:txBody>
+          <a:bodyPr wrap="square" anchor="ctr"/>
+          <a:lstStyle/>
+          <a:p>
+            <a:pPr algn="l">
+              <a:lnSpc>
+                <a:spcPct val="110000"/>
+              </a:lnSpc>
+            </a:pPr>
+            <a:r>
+              <a:rPr sz="1450" b="1">
+                <a:solidFill>
+                  <a:srgbClr val="13294B"/>
+                </a:solidFill>
+                <a:latin typeface="맑은 고딕"/>
+                <a:ea typeface="맑은 고딕"/>
+                <a:cs typeface="맑은 고딕"/>
+              </a:rPr>
+              <a:t>근거의 상태</a:t>
+            </a:r>
+          </a:p>
+        </p:txBody>
+      </p:sp>
+      <p:sp>
+        <p:nvSpPr>
+          <p:cNvPr id="20" name="TextBox 19"/>
+          <p:cNvSpPr txBox="1"/>
+          <p:nvPr/>
+        </p:nvSpPr>
+        <p:spPr>
+          <a:xfrm>
+            <a:off x="3200400" y="3111246"/>
+            <a:ext cx="6156655" cy="540639"/>
+          </a:xfrm>
+          <a:prstGeom prst="rect">
+            <a:avLst/>
+          </a:prstGeom>
+          <a:noFill/>
+        </p:spPr>
+        <p:txBody>
+          <a:bodyPr wrap="square" anchor="ctr"/>
+          <a:lstStyle/>
+          <a:p>
+            <a:pPr algn="l">
+              <a:lnSpc>
+                <a:spcPct val="110000"/>
+              </a:lnSpc>
+            </a:pPr>
+            <a:r>
+              <a:rPr sz="1400" b="0">
+                <a:solidFill>
+                  <a:srgbClr val="1F2A3A"/>
+                </a:solidFill>
+                <a:latin typeface="맑은 고딕"/>
+                <a:ea typeface="맑은 고딕"/>
+                <a:cs typeface="맑은 고딕"/>
+              </a:rPr>
+              <a:t>SUPPORTED · UNKNOWN · UNSUPPORTED</a:t>
+            </a:r>
+          </a:p>
+        </p:txBody>
+      </p:sp>
+      <p:sp>
+        <p:nvSpPr>
+          <p:cNvPr id="21" name="TextBox 20"/>
+          <p:cNvSpPr txBox="1"/>
+          <p:nvPr/>
+        </p:nvSpPr>
+        <p:spPr>
+          <a:xfrm>
+            <a:off x="9448495" y="3111246"/>
+            <a:ext cx="2103120" cy="540639"/>
+          </a:xfrm>
+          <a:prstGeom prst="rect">
+            <a:avLst/>
+          </a:prstGeom>
+          <a:noFill/>
+        </p:spPr>
+        <p:txBody>
+          <a:bodyPr wrap="square" anchor="ctr"/>
+          <a:lstStyle/>
+          <a:p>
+            <a:pPr algn="l">
+              <a:lnSpc>
+                <a:spcPct val="110000"/>
+              </a:lnSpc>
+            </a:pPr>
+            <a:r>
+              <a:rPr sz="1250" b="1">
+                <a:solidFill>
+                  <a:srgbClr val="556175"/>
+                </a:solidFill>
+                <a:latin typeface="맑은 고딕"/>
+                <a:ea typeface="맑은 고딕"/>
+                <a:cs typeface="맑은 고딕"/>
+              </a:rPr>
+              <a:t>확인됨, 확인하지 못함, 맞는 근거 없음</a:t>
+            </a:r>
+          </a:p>
+        </p:txBody>
+      </p:sp>
+      <p:sp>
+        <p:nvSpPr>
+          <p:cNvPr id="22" name="Rounded Rectangle 21"/>
           <p:cNvSpPr/>
           <p:nvPr/>
         </p:nvSpPr>
         <p:spPr>
           <a:xfrm>
-            <a:off x="10034511" y="2681478"/>
-            <a:ext cx="731520" cy="731520"/>
-          </a:xfrm>
-          <a:prstGeom prst="ellipse">
-            <a:avLst/>
+            <a:off x="548640" y="3683888"/>
+            <a:ext cx="11094415" cy="476631"/>
+          </a:xfrm>
+          <a:prstGeom prst="roundRect">
+            <a:avLst>
+              <a:gd name="adj" fmla="val 8000"/>
+            </a:avLst>
           </a:prstGeom>
           <a:solidFill>
-            <a:srgbClr val="FFFFFF"/>
+            <a:srgbClr val="F3F6F9"/>
           </a:solidFill>
           <a:ln>
             <a:noFill/>
@@ -60312,30 +60235,45 @@
           </a:p>
         </p:txBody>
       </p:sp>
-      <p:pic>
-        <p:nvPicPr>
-          <p:cNvPr id="23" name="아이콘:git-compare" descr="git-compare_13294B_1.6.png"/>
-          <p:cNvPicPr>
-            <a:picLocks noChangeAspect="1"/>
-          </p:cNvPicPr>
-          <p:nvPr/>
-        </p:nvPicPr>
-        <p:blipFill>
-          <a:blip r:embed="rId6"/>
-          <a:stretch>
-            <a:fillRect/>
-          </a:stretch>
-        </p:blipFill>
-        <p:spPr>
-          <a:xfrm>
-            <a:off x="10188130" y="2835097"/>
-            <a:ext cx="424281" cy="424281"/>
-          </a:xfrm>
-          <a:prstGeom prst="rect">
-            <a:avLst/>
-          </a:prstGeom>
-        </p:spPr>
-      </p:pic>
+      <p:sp>
+        <p:nvSpPr>
+          <p:cNvPr id="23" name="TextBox 22"/>
+          <p:cNvSpPr txBox="1"/>
+          <p:nvPr/>
+        </p:nvSpPr>
+        <p:spPr>
+          <a:xfrm>
+            <a:off x="685800" y="3651885"/>
+            <a:ext cx="2514600" cy="540639"/>
+          </a:xfrm>
+          <a:prstGeom prst="rect">
+            <a:avLst/>
+          </a:prstGeom>
+          <a:noFill/>
+        </p:spPr>
+        <p:txBody>
+          <a:bodyPr wrap="square" anchor="ctr"/>
+          <a:lstStyle/>
+          <a:p>
+            <a:pPr algn="l">
+              <a:lnSpc>
+                <a:spcPct val="110000"/>
+              </a:lnSpc>
+            </a:pPr>
+            <a:r>
+              <a:rPr sz="1450" b="1">
+                <a:solidFill>
+                  <a:srgbClr val="13294B"/>
+                </a:solidFill>
+                <a:latin typeface="맑은 고딕"/>
+                <a:ea typeface="맑은 고딕"/>
+                <a:cs typeface="맑은 고딕"/>
+              </a:rPr>
+              <a:t>SKILL.md</a:t>
+            </a:r>
+          </a:p>
+        </p:txBody>
+      </p:sp>
       <p:sp>
         <p:nvSpPr>
           <p:cNvPr id="24" name="TextBox 23"/>
@@ -60344,28 +60282,134 @@
         </p:nvSpPr>
         <p:spPr>
           <a:xfrm>
-            <a:off x="9230639" y="3486150"/>
-            <a:ext cx="2339263" cy="1924811"/>
-          </a:xfrm>
-          <a:prstGeom prst="rect">
-            <a:avLst/>
-          </a:prstGeom>
-          <a:noFill/>
-        </p:spPr>
-        <p:txBody>
-          <a:bodyPr wrap="square" anchor="t"/>
-          <a:lstStyle/>
-          <a:p>
-            <a:pPr algn="ctr">
-              <a:lnSpc>
-                <a:spcPct val="110000"/>
-              </a:lnSpc>
-              <a:spcAft>
-                <a:spcPts val="400"/>
-              </a:spcAft>
-            </a:pPr>
-            <a:r>
-              <a:rPr sz="1700" b="1">
+            <a:off x="3200400" y="3651885"/>
+            <a:ext cx="6156655" cy="540639"/>
+          </a:xfrm>
+          <a:prstGeom prst="rect">
+            <a:avLst/>
+          </a:prstGeom>
+          <a:noFill/>
+        </p:spPr>
+        <p:txBody>
+          <a:bodyPr wrap="square" anchor="ctr"/>
+          <a:lstStyle/>
+          <a:p>
+            <a:pPr algn="l">
+              <a:lnSpc>
+                <a:spcPct val="110000"/>
+              </a:lnSpc>
+            </a:pPr>
+            <a:r>
+              <a:rPr sz="1400" b="0">
+                <a:solidFill>
+                  <a:srgbClr val="1F2A3A"/>
+                </a:solidFill>
+                <a:latin typeface="맑은 고딕"/>
+                <a:ea typeface="맑은 고딕"/>
+                <a:cs typeface="맑은 고딕"/>
+              </a:rPr>
+              <a:t>Agent Skill의 파일</a:t>
+            </a:r>
+          </a:p>
+        </p:txBody>
+      </p:sp>
+      <p:sp>
+        <p:nvSpPr>
+          <p:cNvPr id="25" name="TextBox 24"/>
+          <p:cNvSpPr txBox="1"/>
+          <p:nvPr/>
+        </p:nvSpPr>
+        <p:spPr>
+          <a:xfrm>
+            <a:off x="9448495" y="3651885"/>
+            <a:ext cx="2103120" cy="540639"/>
+          </a:xfrm>
+          <a:prstGeom prst="rect">
+            <a:avLst/>
+          </a:prstGeom>
+          <a:noFill/>
+        </p:spPr>
+        <p:txBody>
+          <a:bodyPr wrap="square" anchor="ctr"/>
+          <a:lstStyle/>
+          <a:p>
+            <a:pPr algn="l">
+              <a:lnSpc>
+                <a:spcPct val="110000"/>
+              </a:lnSpc>
+            </a:pPr>
+            <a:r>
+              <a:rPr sz="1250" b="1">
+                <a:solidFill>
+                  <a:srgbClr val="556175"/>
+                </a:solidFill>
+                <a:latin typeface="맑은 고딕"/>
+                <a:ea typeface="맑은 고딕"/>
+                <a:cs typeface="맑은 고딕"/>
+              </a:rPr>
+              <a:t>수행 방법을 적은 지침</a:t>
+            </a:r>
+          </a:p>
+        </p:txBody>
+      </p:sp>
+      <p:sp>
+        <p:nvSpPr>
+          <p:cNvPr id="26" name="Rounded Rectangle 25"/>
+          <p:cNvSpPr/>
+          <p:nvPr/>
+        </p:nvSpPr>
+        <p:spPr>
+          <a:xfrm>
+            <a:off x="548640" y="4224528"/>
+            <a:ext cx="11094415" cy="476631"/>
+          </a:xfrm>
+          <a:prstGeom prst="roundRect">
+            <a:avLst>
+              <a:gd name="adj" fmla="val 8000"/>
+            </a:avLst>
+          </a:prstGeom>
+          <a:solidFill>
+            <a:srgbClr val="F3F6F9"/>
+          </a:solidFill>
+          <a:ln>
+            <a:noFill/>
+          </a:ln>
+        </p:spPr>
+        <p:txBody>
+          <a:bodyPr rtlCol="0" anchor="ctr"/>
+          <a:lstStyle/>
+          <a:p>
+            <a:pPr algn="ctr"/>
+          </a:p>
+        </p:txBody>
+      </p:sp>
+      <p:sp>
+        <p:nvSpPr>
+          <p:cNvPr id="27" name="TextBox 26"/>
+          <p:cNvSpPr txBox="1"/>
+          <p:nvPr/>
+        </p:nvSpPr>
+        <p:spPr>
+          <a:xfrm>
+            <a:off x="685800" y="4192524"/>
+            <a:ext cx="2514600" cy="540639"/>
+          </a:xfrm>
+          <a:prstGeom prst="rect">
+            <a:avLst/>
+          </a:prstGeom>
+          <a:noFill/>
+        </p:spPr>
+        <p:txBody>
+          <a:bodyPr wrap="square" anchor="ctr"/>
+          <a:lstStyle/>
+          <a:p>
+            <a:pPr algn="l">
+              <a:lnSpc>
+                <a:spcPct val="110000"/>
+              </a:lnSpc>
+            </a:pPr>
+            <a:r>
+              <a:rPr sz="1450" b="1">
                 <a:solidFill>
                   <a:srgbClr val="13294B"/>
                 </a:solidFill>
@@ -60373,20 +60417,38 @@
                 <a:ea typeface="맑은 고딕"/>
                 <a:cs typeface="맑은 고딕"/>
               </a:rPr>
-              <a:t>권한과 실패의 비교</a:t>
-            </a:r>
-          </a:p>
-          <a:p>
-            <a:pPr algn="ctr">
-              <a:lnSpc>
-                <a:spcPct val="110000"/>
-              </a:lnSpc>
-              <a:spcAft>
-                <a:spcPts val="400"/>
-              </a:spcAft>
-            </a:pPr>
-            <a:r>
-              <a:rPr sz="1350" b="0">
+              <a:t>MCP</a:t>
+            </a:r>
+          </a:p>
+        </p:txBody>
+      </p:sp>
+      <p:sp>
+        <p:nvSpPr>
+          <p:cNvPr id="28" name="TextBox 27"/>
+          <p:cNvSpPr txBox="1"/>
+          <p:nvPr/>
+        </p:nvSpPr>
+        <p:spPr>
+          <a:xfrm>
+            <a:off x="3200400" y="4192524"/>
+            <a:ext cx="6156655" cy="540639"/>
+          </a:xfrm>
+          <a:prstGeom prst="rect">
+            <a:avLst/>
+          </a:prstGeom>
+          <a:noFill/>
+        </p:spPr>
+        <p:txBody>
+          <a:bodyPr wrap="square" anchor="ctr"/>
+          <a:lstStyle/>
+          <a:p>
+            <a:pPr algn="l">
+              <a:lnSpc>
+                <a:spcPct val="110000"/>
+              </a:lnSpc>
+            </a:pPr>
+            <a:r>
+              <a:rPr sz="1400" b="0">
                 <a:solidFill>
                   <a:srgbClr val="1F2A3A"/>
                 </a:solidFill>
@@ -60394,20 +60456,147 @@
                 <a:ea typeface="맑은 고딕"/>
                 <a:cs typeface="맑은 고딕"/>
               </a:rPr>
-              <a:t>서버마다 허용된 일과</a:t>
-            </a:r>
-          </a:p>
-          <a:p>
-            <a:pPr algn="ctr">
-              <a:lnSpc>
-                <a:spcPct val="110000"/>
-              </a:lnSpc>
-              <a:spcAft>
-                <a:spcPts val="400"/>
-              </a:spcAft>
-            </a:pPr>
-            <a:r>
-              <a:rPr sz="1350" b="0">
+              <a:t>Model Context Protocol</a:t>
+            </a:r>
+          </a:p>
+        </p:txBody>
+      </p:sp>
+      <p:sp>
+        <p:nvSpPr>
+          <p:cNvPr id="29" name="TextBox 28"/>
+          <p:cNvSpPr txBox="1"/>
+          <p:nvPr/>
+        </p:nvSpPr>
+        <p:spPr>
+          <a:xfrm>
+            <a:off x="9448495" y="4192524"/>
+            <a:ext cx="2103120" cy="540639"/>
+          </a:xfrm>
+          <a:prstGeom prst="rect">
+            <a:avLst/>
+          </a:prstGeom>
+          <a:noFill/>
+        </p:spPr>
+        <p:txBody>
+          <a:bodyPr wrap="square" anchor="ctr"/>
+          <a:lstStyle/>
+          <a:p>
+            <a:pPr algn="l">
+              <a:lnSpc>
+                <a:spcPct val="110000"/>
+              </a:lnSpc>
+            </a:pPr>
+            <a:r>
+              <a:rPr sz="1250" b="1">
+                <a:solidFill>
+                  <a:srgbClr val="556175"/>
+                </a:solidFill>
+                <a:latin typeface="맑은 고딕"/>
+                <a:ea typeface="맑은 고딕"/>
+                <a:cs typeface="맑은 고딕"/>
+              </a:rPr>
+              <a:t>호스트와 서버를 잇는 규약</a:t>
+            </a:r>
+          </a:p>
+        </p:txBody>
+      </p:sp>
+      <p:sp>
+        <p:nvSpPr>
+          <p:cNvPr id="30" name="Rounded Rectangle 29"/>
+          <p:cNvSpPr/>
+          <p:nvPr/>
+        </p:nvSpPr>
+        <p:spPr>
+          <a:xfrm>
+            <a:off x="548640" y="4765167"/>
+            <a:ext cx="11094415" cy="476631"/>
+          </a:xfrm>
+          <a:prstGeom prst="roundRect">
+            <a:avLst>
+              <a:gd name="adj" fmla="val 8000"/>
+            </a:avLst>
+          </a:prstGeom>
+          <a:solidFill>
+            <a:srgbClr val="F3F6F9"/>
+          </a:solidFill>
+          <a:ln>
+            <a:noFill/>
+          </a:ln>
+        </p:spPr>
+        <p:txBody>
+          <a:bodyPr rtlCol="0" anchor="ctr"/>
+          <a:lstStyle/>
+          <a:p>
+            <a:pPr algn="ctr"/>
+          </a:p>
+        </p:txBody>
+      </p:sp>
+      <p:sp>
+        <p:nvSpPr>
+          <p:cNvPr id="31" name="TextBox 30"/>
+          <p:cNvSpPr txBox="1"/>
+          <p:nvPr/>
+        </p:nvSpPr>
+        <p:spPr>
+          <a:xfrm>
+            <a:off x="685800" y="4733163"/>
+            <a:ext cx="2514600" cy="540639"/>
+          </a:xfrm>
+          <a:prstGeom prst="rect">
+            <a:avLst/>
+          </a:prstGeom>
+          <a:noFill/>
+        </p:spPr>
+        <p:txBody>
+          <a:bodyPr wrap="square" anchor="ctr"/>
+          <a:lstStyle/>
+          <a:p>
+            <a:pPr algn="l">
+              <a:lnSpc>
+                <a:spcPct val="110000"/>
+              </a:lnSpc>
+            </a:pPr>
+            <a:r>
+              <a:rPr sz="1450" b="1">
+                <a:solidFill>
+                  <a:srgbClr val="13294B"/>
+                </a:solidFill>
+                <a:latin typeface="맑은 고딕"/>
+                <a:ea typeface="맑은 고딕"/>
+                <a:cs typeface="맑은 고딕"/>
+              </a:rPr>
+              <a:t>JSON-RPC</a:t>
+            </a:r>
+          </a:p>
+        </p:txBody>
+      </p:sp>
+      <p:sp>
+        <p:nvSpPr>
+          <p:cNvPr id="32" name="TextBox 31"/>
+          <p:cNvSpPr txBox="1"/>
+          <p:nvPr/>
+        </p:nvSpPr>
+        <p:spPr>
+          <a:xfrm>
+            <a:off x="3200400" y="4733163"/>
+            <a:ext cx="6156655" cy="540639"/>
+          </a:xfrm>
+          <a:prstGeom prst="rect">
+            <a:avLst/>
+          </a:prstGeom>
+          <a:noFill/>
+        </p:spPr>
+        <p:txBody>
+          <a:bodyPr wrap="square" anchor="ctr"/>
+          <a:lstStyle/>
+          <a:p>
+            <a:pPr algn="l">
+              <a:lnSpc>
+                <a:spcPct val="110000"/>
+              </a:lnSpc>
+            </a:pPr>
+            <a:r>
+              <a:rPr sz="1400" b="0">
                 <a:solidFill>
                   <a:srgbClr val="1F2A3A"/>
                 </a:solidFill>
@@ -60415,20 +60604,147 @@
                 <a:ea typeface="맑은 고딕"/>
                 <a:cs typeface="맑은 고딕"/>
               </a:rPr>
-              <a:t>호출이 실패했을 때의</a:t>
-            </a:r>
-          </a:p>
-          <a:p>
-            <a:pPr algn="ctr">
-              <a:lnSpc>
-                <a:spcPct val="110000"/>
-              </a:lnSpc>
-              <a:spcAft>
-                <a:spcPts val="400"/>
-              </a:spcAft>
-            </a:pPr>
-            <a:r>
-              <a:rPr sz="1350" b="0">
+              <a:t>JSON Remote Procedure Call</a:t>
+            </a:r>
+          </a:p>
+        </p:txBody>
+      </p:sp>
+      <p:sp>
+        <p:nvSpPr>
+          <p:cNvPr id="33" name="TextBox 32"/>
+          <p:cNvSpPr txBox="1"/>
+          <p:nvPr/>
+        </p:nvSpPr>
+        <p:spPr>
+          <a:xfrm>
+            <a:off x="9448495" y="4733163"/>
+            <a:ext cx="2103120" cy="540639"/>
+          </a:xfrm>
+          <a:prstGeom prst="rect">
+            <a:avLst/>
+          </a:prstGeom>
+          <a:noFill/>
+        </p:spPr>
+        <p:txBody>
+          <a:bodyPr wrap="square" anchor="ctr"/>
+          <a:lstStyle/>
+          <a:p>
+            <a:pPr algn="l">
+              <a:lnSpc>
+                <a:spcPct val="110000"/>
+              </a:lnSpc>
+            </a:pPr>
+            <a:r>
+              <a:rPr sz="1250" b="1">
+                <a:solidFill>
+                  <a:srgbClr val="556175"/>
+                </a:solidFill>
+                <a:latin typeface="맑은 고딕"/>
+                <a:ea typeface="맑은 고딕"/>
+                <a:cs typeface="맑은 고딕"/>
+              </a:rPr>
+              <a:t>MCP 메시지의 형식</a:t>
+            </a:r>
+          </a:p>
+        </p:txBody>
+      </p:sp>
+      <p:sp>
+        <p:nvSpPr>
+          <p:cNvPr id="34" name="Rounded Rectangle 33"/>
+          <p:cNvSpPr/>
+          <p:nvPr/>
+        </p:nvSpPr>
+        <p:spPr>
+          <a:xfrm>
+            <a:off x="548640" y="5305806"/>
+            <a:ext cx="11094415" cy="476631"/>
+          </a:xfrm>
+          <a:prstGeom prst="roundRect">
+            <a:avLst>
+              <a:gd name="adj" fmla="val 8000"/>
+            </a:avLst>
+          </a:prstGeom>
+          <a:solidFill>
+            <a:srgbClr val="F3F6F9"/>
+          </a:solidFill>
+          <a:ln>
+            <a:noFill/>
+          </a:ln>
+        </p:spPr>
+        <p:txBody>
+          <a:bodyPr rtlCol="0" anchor="ctr"/>
+          <a:lstStyle/>
+          <a:p>
+            <a:pPr algn="ctr"/>
+          </a:p>
+        </p:txBody>
+      </p:sp>
+      <p:sp>
+        <p:nvSpPr>
+          <p:cNvPr id="35" name="TextBox 34"/>
+          <p:cNvSpPr txBox="1"/>
+          <p:nvPr/>
+        </p:nvSpPr>
+        <p:spPr>
+          <a:xfrm>
+            <a:off x="685800" y="5273802"/>
+            <a:ext cx="2514600" cy="540639"/>
+          </a:xfrm>
+          <a:prstGeom prst="rect">
+            <a:avLst/>
+          </a:prstGeom>
+          <a:noFill/>
+        </p:spPr>
+        <p:txBody>
+          <a:bodyPr wrap="square" anchor="ctr"/>
+          <a:lstStyle/>
+          <a:p>
+            <a:pPr algn="l">
+              <a:lnSpc>
+                <a:spcPct val="110000"/>
+              </a:lnSpc>
+            </a:pPr>
+            <a:r>
+              <a:rPr sz="1450" b="1">
+                <a:solidFill>
+                  <a:srgbClr val="13294B"/>
+                </a:solidFill>
+                <a:latin typeface="맑은 고딕"/>
+                <a:ea typeface="맑은 고딕"/>
+                <a:cs typeface="맑은 고딕"/>
+              </a:rPr>
+              <a:t>stdio</a:t>
+            </a:r>
+          </a:p>
+        </p:txBody>
+      </p:sp>
+      <p:sp>
+        <p:nvSpPr>
+          <p:cNvPr id="36" name="TextBox 35"/>
+          <p:cNvSpPr txBox="1"/>
+          <p:nvPr/>
+        </p:nvSpPr>
+        <p:spPr>
+          <a:xfrm>
+            <a:off x="3200400" y="5273802"/>
+            <a:ext cx="6156655" cy="540639"/>
+          </a:xfrm>
+          <a:prstGeom prst="rect">
+            <a:avLst/>
+          </a:prstGeom>
+          <a:noFill/>
+        </p:spPr>
+        <p:txBody>
+          <a:bodyPr wrap="square" anchor="ctr"/>
+          <a:lstStyle/>
+          <a:p>
+            <a:pPr algn="l">
+              <a:lnSpc>
+                <a:spcPct val="110000"/>
+              </a:lnSpc>
+            </a:pPr>
+            <a:r>
+              <a:rPr sz="1400" b="0">
                 <a:solidFill>
                   <a:srgbClr val="1F2A3A"/>
                 </a:solidFill>
@@ -60436,7 +60752,194 @@
                 <a:ea typeface="맑은 고딕"/>
                 <a:cs typeface="맑은 고딕"/>
               </a:rPr>
-              <a:t>모습을 견준다</a:t>
+              <a:t>standard input/output</a:t>
+            </a:r>
+          </a:p>
+        </p:txBody>
+      </p:sp>
+      <p:sp>
+        <p:nvSpPr>
+          <p:cNvPr id="37" name="TextBox 36"/>
+          <p:cNvSpPr txBox="1"/>
+          <p:nvPr/>
+        </p:nvSpPr>
+        <p:spPr>
+          <a:xfrm>
+            <a:off x="9448495" y="5273802"/>
+            <a:ext cx="2103120" cy="540639"/>
+          </a:xfrm>
+          <a:prstGeom prst="rect">
+            <a:avLst/>
+          </a:prstGeom>
+          <a:noFill/>
+        </p:spPr>
+        <p:txBody>
+          <a:bodyPr wrap="square" anchor="ctr"/>
+          <a:lstStyle/>
+          <a:p>
+            <a:pPr algn="l">
+              <a:lnSpc>
+                <a:spcPct val="110000"/>
+              </a:lnSpc>
+            </a:pPr>
+            <a:r>
+              <a:rPr sz="1250" b="1">
+                <a:solidFill>
+                  <a:srgbClr val="556175"/>
+                </a:solidFill>
+                <a:latin typeface="맑은 고딕"/>
+                <a:ea typeface="맑은 고딕"/>
+                <a:cs typeface="맑은 고딕"/>
+              </a:rPr>
+              <a:t>호스트가 띄운 서버와의 연결 방식</a:t>
+            </a:r>
+          </a:p>
+        </p:txBody>
+      </p:sp>
+      <p:sp>
+        <p:nvSpPr>
+          <p:cNvPr id="38" name="Rounded Rectangle 37"/>
+          <p:cNvSpPr/>
+          <p:nvPr/>
+        </p:nvSpPr>
+        <p:spPr>
+          <a:xfrm>
+            <a:off x="548640" y="5846445"/>
+            <a:ext cx="11094415" cy="476631"/>
+          </a:xfrm>
+          <a:prstGeom prst="roundRect">
+            <a:avLst>
+              <a:gd name="adj" fmla="val 8000"/>
+            </a:avLst>
+          </a:prstGeom>
+          <a:solidFill>
+            <a:srgbClr val="F3F6F9"/>
+          </a:solidFill>
+          <a:ln>
+            <a:noFill/>
+          </a:ln>
+        </p:spPr>
+        <p:txBody>
+          <a:bodyPr rtlCol="0" anchor="ctr"/>
+          <a:lstStyle/>
+          <a:p>
+            <a:pPr algn="ctr"/>
+          </a:p>
+        </p:txBody>
+      </p:sp>
+      <p:sp>
+        <p:nvSpPr>
+          <p:cNvPr id="39" name="TextBox 38"/>
+          <p:cNvSpPr txBox="1"/>
+          <p:nvPr/>
+        </p:nvSpPr>
+        <p:spPr>
+          <a:xfrm>
+            <a:off x="685800" y="5814441"/>
+            <a:ext cx="2514600" cy="540639"/>
+          </a:xfrm>
+          <a:prstGeom prst="rect">
+            <a:avLst/>
+          </a:prstGeom>
+          <a:noFill/>
+        </p:spPr>
+        <p:txBody>
+          <a:bodyPr wrap="square" anchor="ctr"/>
+          <a:lstStyle/>
+          <a:p>
+            <a:pPr algn="l">
+              <a:lnSpc>
+                <a:spcPct val="110000"/>
+              </a:lnSpc>
+            </a:pPr>
+            <a:r>
+              <a:rPr sz="1450" b="1">
+                <a:solidFill>
+                  <a:srgbClr val="13294B"/>
+                </a:solidFill>
+                <a:latin typeface="맑은 고딕"/>
+                <a:ea typeface="맑은 고딕"/>
+                <a:cs typeface="맑은 고딕"/>
+              </a:rPr>
+              <a:t>readOnlyHint</a:t>
+            </a:r>
+          </a:p>
+        </p:txBody>
+      </p:sp>
+      <p:sp>
+        <p:nvSpPr>
+          <p:cNvPr id="40" name="TextBox 39"/>
+          <p:cNvSpPr txBox="1"/>
+          <p:nvPr/>
+        </p:nvSpPr>
+        <p:spPr>
+          <a:xfrm>
+            <a:off x="3200400" y="5814441"/>
+            <a:ext cx="6156655" cy="540639"/>
+          </a:xfrm>
+          <a:prstGeom prst="rect">
+            <a:avLst/>
+          </a:prstGeom>
+          <a:noFill/>
+        </p:spPr>
+        <p:txBody>
+          <a:bodyPr wrap="square" anchor="ctr"/>
+          <a:lstStyle/>
+          <a:p>
+            <a:pPr algn="l">
+              <a:lnSpc>
+                <a:spcPct val="110000"/>
+              </a:lnSpc>
+            </a:pPr>
+            <a:r>
+              <a:rPr sz="1400" b="0">
+                <a:solidFill>
+                  <a:srgbClr val="1F2A3A"/>
+                </a:solidFill>
+                <a:latin typeface="맑은 고딕"/>
+                <a:ea typeface="맑은 고딕"/>
+                <a:cs typeface="맑은 고딕"/>
+              </a:rPr>
+              <a:t>읽기 전용 표시</a:t>
+            </a:r>
+          </a:p>
+        </p:txBody>
+      </p:sp>
+      <p:sp>
+        <p:nvSpPr>
+          <p:cNvPr id="41" name="TextBox 40"/>
+          <p:cNvSpPr txBox="1"/>
+          <p:nvPr/>
+        </p:nvSpPr>
+        <p:spPr>
+          <a:xfrm>
+            <a:off x="9448495" y="5814441"/>
+            <a:ext cx="2103120" cy="540639"/>
+          </a:xfrm>
+          <a:prstGeom prst="rect">
+            <a:avLst/>
+          </a:prstGeom>
+          <a:noFill/>
+        </p:spPr>
+        <p:txBody>
+          <a:bodyPr wrap="square" anchor="ctr"/>
+          <a:lstStyle/>
+          <a:p>
+            <a:pPr algn="l">
+              <a:lnSpc>
+                <a:spcPct val="110000"/>
+              </a:lnSpc>
+            </a:pPr>
+            <a:r>
+              <a:rPr sz="1250" b="1">
+                <a:solidFill>
+                  <a:srgbClr val="556175"/>
+                </a:solidFill>
+                <a:latin typeface="맑은 고딕"/>
+                <a:ea typeface="맑은 고딕"/>
+                <a:cs typeface="맑은 고딕"/>
+              </a:rPr>
+              <a:t>연결 검사와 허용 목록의 기준</a:t>
             </a:r>
           </a:p>
         </p:txBody>
@@ -60450,6 +60953,178 @@
 </file>
 
 <file path=ppt/slides/slide71.xml><?xml version="1.0" encoding="utf-8"?>
+<p:sld xmlns:a="http://schemas.openxmlformats.org/drawingml/2006/main" xmlns:p="http://schemas.openxmlformats.org/presentationml/2006/main" xmlns:r="http://schemas.openxmlformats.org/officeDocument/2006/relationships">
+  <p:cSld>
+    <p:bg>
+      <p:bgPr>
+        <a:solidFill>
+          <a:srgbClr val="E7F3FD"/>
+        </a:solidFill>
+        <a:effectLst/>
+      </p:bgPr>
+    </p:bg>
+    <p:spTree>
+      <p:nvGrpSpPr>
+        <p:cNvPr id="1" name=""/>
+        <p:cNvGrpSpPr/>
+        <p:nvPr/>
+      </p:nvGrpSpPr>
+      <p:grpSpPr/>
+      <p:sp>
+        <p:nvSpPr>
+          <p:cNvPr id="2" name="TextBox 1"/>
+          <p:cNvSpPr txBox="1"/>
+          <p:nvPr/>
+        </p:nvSpPr>
+        <p:spPr>
+          <a:xfrm>
+            <a:off x="457200" y="384048"/>
+            <a:ext cx="8229600" cy="457200"/>
+          </a:xfrm>
+          <a:prstGeom prst="rect">
+            <a:avLst/>
+          </a:prstGeom>
+          <a:noFill/>
+        </p:spPr>
+        <p:txBody>
+          <a:bodyPr wrap="square" anchor="t"/>
+          <a:lstStyle/>
+          <a:p>
+            <a:pPr algn="l">
+              <a:lnSpc>
+                <a:spcPct val="110000"/>
+              </a:lnSpc>
+            </a:pPr>
+            <a:r>
+              <a:rPr sz="2000" b="1">
+                <a:solidFill>
+                  <a:srgbClr val="5CB8F2"/>
+                </a:solidFill>
+                <a:latin typeface="맑은 고딕"/>
+                <a:ea typeface="맑은 고딕"/>
+                <a:cs typeface="맑은 고딕"/>
+              </a:rPr>
+              <a:t>경남대학교 피지컬AI 사관학교</a:t>
+            </a:r>
+          </a:p>
+        </p:txBody>
+      </p:sp>
+      <p:sp>
+        <p:nvSpPr>
+          <p:cNvPr id="3" name="Rectangle 2"/>
+          <p:cNvSpPr/>
+          <p:nvPr/>
+        </p:nvSpPr>
+        <p:spPr>
+          <a:xfrm>
+            <a:off x="548640" y="859536"/>
+            <a:ext cx="3606800" cy="41148"/>
+          </a:xfrm>
+          <a:prstGeom prst="rect">
+            <a:avLst/>
+          </a:prstGeom>
+          <a:solidFill>
+            <a:srgbClr val="5CB8F2"/>
+          </a:solidFill>
+          <a:ln>
+            <a:noFill/>
+          </a:ln>
+        </p:spPr>
+        <p:txBody>
+          <a:bodyPr rtlCol="0" anchor="ctr"/>
+          <a:lstStyle/>
+          <a:p>
+            <a:pPr algn="ctr"/>
+          </a:p>
+        </p:txBody>
+      </p:sp>
+      <p:sp>
+        <p:nvSpPr>
+          <p:cNvPr id="4" name="TextBox 3"/>
+          <p:cNvSpPr txBox="1"/>
+          <p:nvPr/>
+        </p:nvSpPr>
+        <p:spPr>
+          <a:xfrm>
+            <a:off x="731520" y="2011680"/>
+            <a:ext cx="10911535" cy="2011680"/>
+          </a:xfrm>
+          <a:prstGeom prst="rect">
+            <a:avLst/>
+          </a:prstGeom>
+          <a:noFill/>
+        </p:spPr>
+        <p:txBody>
+          <a:bodyPr wrap="square" anchor="ctr"/>
+          <a:lstStyle/>
+          <a:p>
+            <a:pPr algn="l">
+              <a:lnSpc>
+                <a:spcPct val="110000"/>
+              </a:lnSpc>
+            </a:pPr>
+            <a:r>
+              <a:rPr sz="3400" b="1">
+                <a:solidFill>
+                  <a:srgbClr val="13294B"/>
+                </a:solidFill>
+                <a:latin typeface="맑은 고딕"/>
+                <a:ea typeface="맑은 고딕"/>
+                <a:cs typeface="맑은 고딕"/>
+              </a:rPr>
+              <a:t>Review Quiz: 핵심 흐름 되짚어보기</a:t>
+            </a:r>
+          </a:p>
+        </p:txBody>
+      </p:sp>
+      <p:sp>
+        <p:nvSpPr>
+          <p:cNvPr id="5" name="TextBox 4"/>
+          <p:cNvSpPr txBox="1"/>
+          <p:nvPr/>
+        </p:nvSpPr>
+        <p:spPr>
+          <a:xfrm>
+            <a:off x="731520" y="4160520"/>
+            <a:ext cx="10911535" cy="457200"/>
+          </a:xfrm>
+          <a:prstGeom prst="rect">
+            <a:avLst/>
+          </a:prstGeom>
+          <a:noFill/>
+        </p:spPr>
+        <p:txBody>
+          <a:bodyPr wrap="square" anchor="t"/>
+          <a:lstStyle/>
+          <a:p>
+            <a:pPr algn="l">
+              <a:lnSpc>
+                <a:spcPct val="110000"/>
+              </a:lnSpc>
+            </a:pPr>
+            <a:r>
+              <a:rPr sz="1700" b="0">
+                <a:solidFill>
+                  <a:srgbClr val="556175"/>
+                </a:solidFill>
+                <a:latin typeface="맑은 고딕"/>
+                <a:ea typeface="맑은 고딕"/>
+                <a:cs typeface="맑은 고딕"/>
+              </a:rPr>
+              <a:t>배운 내용을 바탕으로 정답을 맞혀 보세요.</a:t>
+            </a:r>
+          </a:p>
+        </p:txBody>
+      </p:sp>
+    </p:spTree>
+  </p:cSld>
+  <p:clrMapOvr>
+    <a:masterClrMapping/>
+  </p:clrMapOvr>
+</p:sld>
+</file>
+
+<file path=ppt/slides/slide72.xml><?xml version="1.0" encoding="utf-8"?>
 <p:sld xmlns:a="http://schemas.openxmlformats.org/drawingml/2006/main" xmlns:p="http://schemas.openxmlformats.org/presentationml/2006/main" xmlns:r="http://schemas.openxmlformats.org/officeDocument/2006/relationships">
   <p:cSld>
     <p:bg>
@@ -60501,7 +61176,7 @@
                 <a:ea typeface="맑은 고딕"/>
                 <a:cs typeface="맑은 고딕"/>
               </a:rPr>
-              <a:t>오늘 다룬 핵심 개념과 주요 용어 정리</a:t>
+              <a:t>Quiz 1. 처리 기록의 한 장면</a:t>
             </a:r>
           </a:p>
         </p:txBody>
@@ -60540,7 +61215,7 @@
                 <a:ea typeface="맑은 고딕"/>
                 <a:cs typeface="맑은 고딕"/>
               </a:rPr>
-              <a:t>이 일차에서 정식 명칭을 붙인 용어와, 그 용어가 에이전트와 도구 연결에서 놓이는 자리를 모은다.</a:t>
+              <a:t>에이전트가 원인 진단을 부른 뒤, 그 결과에 든 원인과 고장 유형의 식별자를 넣어 대안 평가를 불렀다.</a:t>
             </a:r>
           </a:p>
         </p:txBody>
@@ -60608,7 +61283,7 @@
                 <a:ea typeface="맑은 고딕"/>
                 <a:cs typeface="맑은 고딕"/>
               </a:rPr>
-              <a:t>71</a:t>
+              <a:t>72</a:t>
             </a:r>
           </a:p>
         </p:txBody>
@@ -60622,12 +61297,111 @@
         <p:spPr>
           <a:xfrm>
             <a:off x="548640" y="1627632"/>
-            <a:ext cx="11094415" cy="347472"/>
+            <a:ext cx="11094415" cy="704088"/>
           </a:xfrm>
           <a:prstGeom prst="roundRect">
             <a:avLst>
-              <a:gd name="adj" fmla="val 12000"/>
+              <a:gd name="adj" fmla="val 5000"/>
             </a:avLst>
+          </a:prstGeom>
+          <a:solidFill>
+            <a:srgbClr val="E7F3FD"/>
+          </a:solidFill>
+          <a:ln>
+            <a:noFill/>
+          </a:ln>
+        </p:spPr>
+        <p:txBody>
+          <a:bodyPr rtlCol="0" anchor="ctr"/>
+          <a:lstStyle/>
+          <a:p>
+            <a:pPr algn="ctr"/>
+          </a:p>
+        </p:txBody>
+      </p:sp>
+      <p:sp>
+        <p:nvSpPr>
+          <p:cNvPr id="7" name="TextBox 6"/>
+          <p:cNvSpPr txBox="1"/>
+          <p:nvPr/>
+        </p:nvSpPr>
+        <p:spPr>
+          <a:xfrm>
+            <a:off x="777240" y="1627632"/>
+            <a:ext cx="10637215" cy="704088"/>
+          </a:xfrm>
+          <a:prstGeom prst="rect">
+            <a:avLst/>
+          </a:prstGeom>
+          <a:noFill/>
+        </p:spPr>
+        <p:txBody>
+          <a:bodyPr wrap="square" anchor="ctr"/>
+          <a:lstStyle/>
+          <a:p>
+            <a:pPr algn="l">
+              <a:lnSpc>
+                <a:spcPct val="110000"/>
+              </a:lnSpc>
+            </a:pPr>
+            <a:r>
+              <a:rPr sz="1900" b="1">
+                <a:solidFill>
+                  <a:srgbClr val="13294B"/>
+                </a:solidFill>
+                <a:latin typeface="맑은 고딕"/>
+                <a:ea typeface="맑은 고딕"/>
+                <a:cs typeface="맑은 고딕"/>
+              </a:rPr>
+              <a:t>이 장면이 보여 주는 실행 고리의 단계는?</a:t>
+            </a:r>
+          </a:p>
+        </p:txBody>
+      </p:sp>
+      <p:sp>
+        <p:nvSpPr>
+          <p:cNvPr id="8" name="Rounded Rectangle 7"/>
+          <p:cNvSpPr/>
+          <p:nvPr/>
+        </p:nvSpPr>
+        <p:spPr>
+          <a:xfrm>
+            <a:off x="548640" y="2560320"/>
+            <a:ext cx="11094415" cy="822960"/>
+          </a:xfrm>
+          <a:prstGeom prst="roundRect">
+            <a:avLst>
+              <a:gd name="adj" fmla="val 8000"/>
+            </a:avLst>
+          </a:prstGeom>
+          <a:solidFill>
+            <a:srgbClr val="F3F6F9"/>
+          </a:solidFill>
+          <a:ln>
+            <a:noFill/>
+          </a:ln>
+        </p:spPr>
+        <p:txBody>
+          <a:bodyPr rtlCol="0" anchor="ctr"/>
+          <a:lstStyle/>
+          <a:p>
+            <a:pPr algn="ctr"/>
+          </a:p>
+        </p:txBody>
+      </p:sp>
+      <p:sp>
+        <p:nvSpPr>
+          <p:cNvPr id="9" name="Oval 8"/>
+          <p:cNvSpPr/>
+          <p:nvPr/>
+        </p:nvSpPr>
+        <p:spPr>
+          <a:xfrm>
+            <a:off x="731520" y="2788920"/>
+            <a:ext cx="365760" cy="365760"/>
+          </a:xfrm>
+          <a:prstGeom prst="ellipse">
+            <a:avLst/>
           </a:prstGeom>
           <a:solidFill>
             <a:srgbClr val="13294B"/>
@@ -60646,14 +61420,14 @@
       </p:sp>
       <p:sp>
         <p:nvSpPr>
-          <p:cNvPr id="7" name="TextBox 6"/>
-          <p:cNvSpPr txBox="1"/>
-          <p:nvPr/>
-        </p:nvSpPr>
-        <p:spPr>
-          <a:xfrm>
-            <a:off x="685800" y="1627632"/>
-            <a:ext cx="2514600" cy="347472"/>
+          <p:cNvPr id="10" name="TextBox 9"/>
+          <p:cNvSpPr txBox="1"/>
+          <p:nvPr/>
+        </p:nvSpPr>
+        <p:spPr>
+          <a:xfrm>
+            <a:off x="731520" y="2788920"/>
+            <a:ext cx="365760" cy="365760"/>
           </a:xfrm>
           <a:prstGeom prst="rect">
             <a:avLst/>
@@ -60664,7 +61438,7 @@
           <a:bodyPr wrap="square" anchor="ctr"/>
           <a:lstStyle/>
           <a:p>
-            <a:pPr algn="l">
+            <a:pPr algn="ctr">
               <a:lnSpc>
                 <a:spcPct val="110000"/>
               </a:lnSpc>
@@ -60678,21 +61452,21 @@
                 <a:ea typeface="맑은 고딕"/>
                 <a:cs typeface="맑은 고딕"/>
               </a:rPr>
-              <a:t>용어</a:t>
-            </a:r>
-          </a:p>
-        </p:txBody>
-      </p:sp>
-      <p:sp>
-        <p:nvSpPr>
-          <p:cNvPr id="8" name="TextBox 7"/>
-          <p:cNvSpPr txBox="1"/>
-          <p:nvPr/>
-        </p:nvSpPr>
-        <p:spPr>
-          <a:xfrm>
-            <a:off x="3200400" y="1627632"/>
-            <a:ext cx="6248095" cy="347472"/>
+              <a:t>1</a:t>
+            </a:r>
+          </a:p>
+        </p:txBody>
+      </p:sp>
+      <p:sp>
+        <p:nvSpPr>
+          <p:cNvPr id="11" name="TextBox 10"/>
+          <p:cNvSpPr txBox="1"/>
+          <p:nvPr/>
+        </p:nvSpPr>
+        <p:spPr>
+          <a:xfrm>
+            <a:off x="1234440" y="2514600"/>
+            <a:ext cx="10225735" cy="914400"/>
           </a:xfrm>
           <a:prstGeom prst="rect">
             <a:avLst/>
@@ -60709,68 +61483,29 @@
               </a:lnSpc>
             </a:pPr>
             <a:r>
-              <a:rPr sz="1300" b="1">
-                <a:solidFill>
-                  <a:srgbClr val="FFFFFF"/>
-                </a:solidFill>
-                <a:latin typeface="맑은 고딕"/>
-                <a:ea typeface="맑은 고딕"/>
-                <a:cs typeface="맑은 고딕"/>
-              </a:rPr>
-              <a:t>정식 명칭</a:t>
-            </a:r>
-          </a:p>
-        </p:txBody>
-      </p:sp>
-      <p:sp>
-        <p:nvSpPr>
-          <p:cNvPr id="9" name="TextBox 8"/>
-          <p:cNvSpPr txBox="1"/>
-          <p:nvPr/>
-        </p:nvSpPr>
-        <p:spPr>
-          <a:xfrm>
-            <a:off x="9448495" y="1627632"/>
-            <a:ext cx="2194560" cy="347472"/>
-          </a:xfrm>
-          <a:prstGeom prst="rect">
-            <a:avLst/>
-          </a:prstGeom>
-          <a:noFill/>
-        </p:spPr>
-        <p:txBody>
-          <a:bodyPr wrap="square" anchor="ctr"/>
-          <a:lstStyle/>
-          <a:p>
-            <a:pPr algn="l">
-              <a:lnSpc>
-                <a:spcPct val="110000"/>
-              </a:lnSpc>
-            </a:pPr>
-            <a:r>
-              <a:rPr sz="1300" b="1">
-                <a:solidFill>
-                  <a:srgbClr val="FFFFFF"/>
-                </a:solidFill>
-                <a:latin typeface="맑은 고딕"/>
-                <a:ea typeface="맑은 고딕"/>
-                <a:cs typeface="맑은 고딕"/>
-              </a:rPr>
-              <a:t>에이전트와 도구 연결에서</a:t>
-            </a:r>
-          </a:p>
-        </p:txBody>
-      </p:sp>
-      <p:sp>
-        <p:nvSpPr>
-          <p:cNvPr id="10" name="Rounded Rectangle 9"/>
+              <a:rPr sz="1550" b="1">
+                <a:solidFill>
+                  <a:srgbClr val="1F2A3A"/>
+                </a:solidFill>
+                <a:latin typeface="맑은 고딕"/>
+                <a:ea typeface="맑은 고딕"/>
+                <a:cs typeface="맑은 고딕"/>
+              </a:rPr>
+              <a:t>요청 해석 — 맡은 업무와 입력을 읽은 것이다</a:t>
+            </a:r>
+          </a:p>
+        </p:txBody>
+      </p:sp>
+      <p:sp>
+        <p:nvSpPr>
+          <p:cNvPr id="12" name="Rounded Rectangle 11"/>
           <p:cNvSpPr/>
           <p:nvPr/>
         </p:nvSpPr>
         <p:spPr>
           <a:xfrm>
-            <a:off x="548640" y="2061972"/>
-            <a:ext cx="11094415" cy="476631"/>
+            <a:off x="548640" y="3474720"/>
+            <a:ext cx="11094415" cy="822960"/>
           </a:xfrm>
           <a:prstGeom prst="roundRect">
             <a:avLst>
@@ -60794,14 +61529,43 @@
       </p:sp>
       <p:sp>
         <p:nvSpPr>
-          <p:cNvPr id="11" name="TextBox 10"/>
-          <p:cNvSpPr txBox="1"/>
-          <p:nvPr/>
-        </p:nvSpPr>
-        <p:spPr>
-          <a:xfrm>
-            <a:off x="685800" y="2029968"/>
-            <a:ext cx="2514600" cy="540639"/>
+          <p:cNvPr id="13" name="Oval 12"/>
+          <p:cNvSpPr/>
+          <p:nvPr/>
+        </p:nvSpPr>
+        <p:spPr>
+          <a:xfrm>
+            <a:off x="731520" y="3703320"/>
+            <a:ext cx="365760" cy="365760"/>
+          </a:xfrm>
+          <a:prstGeom prst="ellipse">
+            <a:avLst/>
+          </a:prstGeom>
+          <a:solidFill>
+            <a:srgbClr val="13294B"/>
+          </a:solidFill>
+          <a:ln>
+            <a:noFill/>
+          </a:ln>
+        </p:spPr>
+        <p:txBody>
+          <a:bodyPr rtlCol="0" anchor="ctr"/>
+          <a:lstStyle/>
+          <a:p>
+            <a:pPr algn="ctr"/>
+          </a:p>
+        </p:txBody>
+      </p:sp>
+      <p:sp>
+        <p:nvSpPr>
+          <p:cNvPr id="14" name="TextBox 13"/>
+          <p:cNvSpPr txBox="1"/>
+          <p:nvPr/>
+        </p:nvSpPr>
+        <p:spPr>
+          <a:xfrm>
+            <a:off x="731520" y="3703320"/>
+            <a:ext cx="365760" cy="365760"/>
           </a:xfrm>
           <a:prstGeom prst="rect">
             <a:avLst/>
@@ -60812,35 +61576,35 @@
           <a:bodyPr wrap="square" anchor="ctr"/>
           <a:lstStyle/>
           <a:p>
-            <a:pPr algn="l">
-              <a:lnSpc>
-                <a:spcPct val="110000"/>
-              </a:lnSpc>
-            </a:pPr>
-            <a:r>
-              <a:rPr sz="1450" b="1">
-                <a:solidFill>
-                  <a:srgbClr val="13294B"/>
-                </a:solidFill>
-                <a:latin typeface="맑은 고딕"/>
-                <a:ea typeface="맑은 고딕"/>
-                <a:cs typeface="맑은 고딕"/>
-              </a:rPr>
-              <a:t>RAG</a:t>
-            </a:r>
-          </a:p>
-        </p:txBody>
-      </p:sp>
-      <p:sp>
-        <p:nvSpPr>
-          <p:cNvPr id="12" name="TextBox 11"/>
-          <p:cNvSpPr txBox="1"/>
-          <p:nvPr/>
-        </p:nvSpPr>
-        <p:spPr>
-          <a:xfrm>
-            <a:off x="3200400" y="2029968"/>
-            <a:ext cx="6156655" cy="540639"/>
+            <a:pPr algn="ctr">
+              <a:lnSpc>
+                <a:spcPct val="110000"/>
+              </a:lnSpc>
+            </a:pPr>
+            <a:r>
+              <a:rPr sz="1300" b="1">
+                <a:solidFill>
+                  <a:srgbClr val="FFFFFF"/>
+                </a:solidFill>
+                <a:latin typeface="맑은 고딕"/>
+                <a:ea typeface="맑은 고딕"/>
+                <a:cs typeface="맑은 고딕"/>
+              </a:rPr>
+              <a:t>2</a:t>
+            </a:r>
+          </a:p>
+        </p:txBody>
+      </p:sp>
+      <p:sp>
+        <p:nvSpPr>
+          <p:cNvPr id="15" name="TextBox 14"/>
+          <p:cNvSpPr txBox="1"/>
+          <p:nvPr/>
+        </p:nvSpPr>
+        <p:spPr>
+          <a:xfrm>
+            <a:off x="1234440" y="3429000"/>
+            <a:ext cx="10225735" cy="914400"/>
           </a:xfrm>
           <a:prstGeom prst="rect">
             <a:avLst/>
@@ -60857,7 +61621,7 @@
               </a:lnSpc>
             </a:pPr>
             <a:r>
-              <a:rPr sz="1400" b="0">
+              <a:rPr sz="1550" b="1">
                 <a:solidFill>
                   <a:srgbClr val="1F2A3A"/>
                 </a:solidFill>
@@ -60865,60 +61629,21 @@
                 <a:ea typeface="맑은 고딕"/>
                 <a:cs typeface="맑은 고딕"/>
               </a:rPr>
-              <a:t>Retrieval-Augmented Generation</a:t>
-            </a:r>
-          </a:p>
-        </p:txBody>
-      </p:sp>
-      <p:sp>
-        <p:nvSpPr>
-          <p:cNvPr id="13" name="TextBox 12"/>
-          <p:cNvSpPr txBox="1"/>
-          <p:nvPr/>
-        </p:nvSpPr>
-        <p:spPr>
-          <a:xfrm>
-            <a:off x="9448495" y="2029968"/>
-            <a:ext cx="2103120" cy="540639"/>
-          </a:xfrm>
-          <a:prstGeom prst="rect">
-            <a:avLst/>
-          </a:prstGeom>
-          <a:noFill/>
-        </p:spPr>
-        <p:txBody>
-          <a:bodyPr wrap="square" anchor="ctr"/>
-          <a:lstStyle/>
-          <a:p>
-            <a:pPr algn="l">
-              <a:lnSpc>
-                <a:spcPct val="110000"/>
-              </a:lnSpc>
-            </a:pPr>
-            <a:r>
-              <a:rPr sz="1250" b="1">
-                <a:solidFill>
-                  <a:srgbClr val="556175"/>
-                </a:solidFill>
-                <a:latin typeface="맑은 고딕"/>
-                <a:ea typeface="맑은 고딕"/>
-                <a:cs typeface="맑은 고딕"/>
-              </a:rPr>
-              <a:t>에이전트와 견준 답변 방식</a:t>
-            </a:r>
-          </a:p>
-        </p:txBody>
-      </p:sp>
-      <p:sp>
-        <p:nvSpPr>
-          <p:cNvPr id="14" name="Rounded Rectangle 13"/>
+              <a:t>결과 관찰에 이은 다음 호출 — 앞의 결과가 다음 입력을 정했다</a:t>
+            </a:r>
+          </a:p>
+        </p:txBody>
+      </p:sp>
+      <p:sp>
+        <p:nvSpPr>
+          <p:cNvPr id="16" name="Rounded Rectangle 15"/>
           <p:cNvSpPr/>
           <p:nvPr/>
         </p:nvSpPr>
         <p:spPr>
           <a:xfrm>
-            <a:off x="548640" y="2602611"/>
-            <a:ext cx="11094415" cy="476631"/>
+            <a:off x="548640" y="4389120"/>
+            <a:ext cx="11094415" cy="822960"/>
           </a:xfrm>
           <a:prstGeom prst="roundRect">
             <a:avLst>
@@ -60942,14 +61667,43 @@
       </p:sp>
       <p:sp>
         <p:nvSpPr>
-          <p:cNvPr id="15" name="TextBox 14"/>
-          <p:cNvSpPr txBox="1"/>
-          <p:nvPr/>
-        </p:nvSpPr>
-        <p:spPr>
-          <a:xfrm>
-            <a:off x="685800" y="2570607"/>
-            <a:ext cx="2514600" cy="540639"/>
+          <p:cNvPr id="17" name="Oval 16"/>
+          <p:cNvSpPr/>
+          <p:nvPr/>
+        </p:nvSpPr>
+        <p:spPr>
+          <a:xfrm>
+            <a:off x="731520" y="4617720"/>
+            <a:ext cx="365760" cy="365760"/>
+          </a:xfrm>
+          <a:prstGeom prst="ellipse">
+            <a:avLst/>
+          </a:prstGeom>
+          <a:solidFill>
+            <a:srgbClr val="13294B"/>
+          </a:solidFill>
+          <a:ln>
+            <a:noFill/>
+          </a:ln>
+        </p:spPr>
+        <p:txBody>
+          <a:bodyPr rtlCol="0" anchor="ctr"/>
+          <a:lstStyle/>
+          <a:p>
+            <a:pPr algn="ctr"/>
+          </a:p>
+        </p:txBody>
+      </p:sp>
+      <p:sp>
+        <p:nvSpPr>
+          <p:cNvPr id="18" name="TextBox 17"/>
+          <p:cNvSpPr txBox="1"/>
+          <p:nvPr/>
+        </p:nvSpPr>
+        <p:spPr>
+          <a:xfrm>
+            <a:off x="731520" y="4617720"/>
+            <a:ext cx="365760" cy="365760"/>
           </a:xfrm>
           <a:prstGeom prst="rect">
             <a:avLst/>
@@ -60960,35 +61714,35 @@
           <a:bodyPr wrap="square" anchor="ctr"/>
           <a:lstStyle/>
           <a:p>
-            <a:pPr algn="l">
-              <a:lnSpc>
-                <a:spcPct val="110000"/>
-              </a:lnSpc>
-            </a:pPr>
-            <a:r>
-              <a:rPr sz="1450" b="1">
-                <a:solidFill>
-                  <a:srgbClr val="13294B"/>
-                </a:solidFill>
-                <a:latin typeface="맑은 고딕"/>
-                <a:ea typeface="맑은 고딕"/>
-                <a:cs typeface="맑은 고딕"/>
-              </a:rPr>
-              <a:t>에이전트</a:t>
-            </a:r>
-          </a:p>
-        </p:txBody>
-      </p:sp>
-      <p:sp>
-        <p:nvSpPr>
-          <p:cNvPr id="16" name="TextBox 15"/>
-          <p:cNvSpPr txBox="1"/>
-          <p:nvPr/>
-        </p:nvSpPr>
-        <p:spPr>
-          <a:xfrm>
-            <a:off x="3200400" y="2570607"/>
-            <a:ext cx="6156655" cy="540639"/>
+            <a:pPr algn="ctr">
+              <a:lnSpc>
+                <a:spcPct val="110000"/>
+              </a:lnSpc>
+            </a:pPr>
+            <a:r>
+              <a:rPr sz="1300" b="1">
+                <a:solidFill>
+                  <a:srgbClr val="FFFFFF"/>
+                </a:solidFill>
+                <a:latin typeface="맑은 고딕"/>
+                <a:ea typeface="맑은 고딕"/>
+                <a:cs typeface="맑은 고딕"/>
+              </a:rPr>
+              <a:t>3</a:t>
+            </a:r>
+          </a:p>
+        </p:txBody>
+      </p:sp>
+      <p:sp>
+        <p:nvSpPr>
+          <p:cNvPr id="19" name="TextBox 18"/>
+          <p:cNvSpPr txBox="1"/>
+          <p:nvPr/>
+        </p:nvSpPr>
+        <p:spPr>
+          <a:xfrm>
+            <a:off x="1234440" y="4343400"/>
+            <a:ext cx="10225735" cy="914400"/>
           </a:xfrm>
           <a:prstGeom prst="rect">
             <a:avLst/>
@@ -61005,7 +61759,7 @@
               </a:lnSpc>
             </a:pPr>
             <a:r>
-              <a:rPr sz="1400" b="0">
+              <a:rPr sz="1550" b="1">
                 <a:solidFill>
                   <a:srgbClr val="1F2A3A"/>
                 </a:solidFill>
@@ -61013,60 +61767,21 @@
                 <a:ea typeface="맑은 고딕"/>
                 <a:cs typeface="맑은 고딕"/>
               </a:rPr>
-              <a:t>AI Agent</a:t>
-            </a:r>
-          </a:p>
-        </p:txBody>
-      </p:sp>
-      <p:sp>
-        <p:nvSpPr>
-          <p:cNvPr id="17" name="TextBox 16"/>
-          <p:cNvSpPr txBox="1"/>
-          <p:nvPr/>
-        </p:nvSpPr>
-        <p:spPr>
-          <a:xfrm>
-            <a:off x="9448495" y="2570607"/>
-            <a:ext cx="2103120" cy="540639"/>
-          </a:xfrm>
-          <a:prstGeom prst="rect">
-            <a:avLst/>
-          </a:prstGeom>
-          <a:noFill/>
-        </p:spPr>
-        <p:txBody>
-          <a:bodyPr wrap="square" anchor="ctr"/>
-          <a:lstStyle/>
-          <a:p>
-            <a:pPr algn="l">
-              <a:lnSpc>
-                <a:spcPct val="110000"/>
-              </a:lnSpc>
-            </a:pPr>
-            <a:r>
-              <a:rPr sz="1250" b="1">
-                <a:solidFill>
-                  <a:srgbClr val="556175"/>
-                </a:solidFill>
-                <a:latin typeface="맑은 고딕"/>
-                <a:ea typeface="맑은 고딕"/>
-                <a:cs typeface="맑은 고딕"/>
-              </a:rPr>
-              <a:t>냉각 긴급 대응 에이전트</a:t>
-            </a:r>
-          </a:p>
-        </p:txBody>
-      </p:sp>
-      <p:sp>
-        <p:nvSpPr>
-          <p:cNvPr id="18" name="Rounded Rectangle 17"/>
+              <a:t>재시도 — 뜻대로 되지 않은 호출을 다시 부른 것이다</a:t>
+            </a:r>
+          </a:p>
+        </p:txBody>
+      </p:sp>
+      <p:sp>
+        <p:nvSpPr>
+          <p:cNvPr id="20" name="Rounded Rectangle 19"/>
           <p:cNvSpPr/>
           <p:nvPr/>
         </p:nvSpPr>
         <p:spPr>
           <a:xfrm>
-            <a:off x="548640" y="3143250"/>
-            <a:ext cx="11094415" cy="476631"/>
+            <a:off x="548640" y="5303520"/>
+            <a:ext cx="11094415" cy="822960"/>
           </a:xfrm>
           <a:prstGeom prst="roundRect">
             <a:avLst>
@@ -61090,139 +61805,20 @@
       </p:sp>
       <p:sp>
         <p:nvSpPr>
-          <p:cNvPr id="19" name="TextBox 18"/>
-          <p:cNvSpPr txBox="1"/>
-          <p:nvPr/>
-        </p:nvSpPr>
-        <p:spPr>
-          <a:xfrm>
-            <a:off x="685800" y="3111246"/>
-            <a:ext cx="2514600" cy="540639"/>
-          </a:xfrm>
-          <a:prstGeom prst="rect">
-            <a:avLst/>
-          </a:prstGeom>
-          <a:noFill/>
-        </p:spPr>
-        <p:txBody>
-          <a:bodyPr wrap="square" anchor="ctr"/>
-          <a:lstStyle/>
-          <a:p>
-            <a:pPr algn="l">
-              <a:lnSpc>
-                <a:spcPct val="110000"/>
-              </a:lnSpc>
-            </a:pPr>
-            <a:r>
-              <a:rPr sz="1450" b="1">
-                <a:solidFill>
-                  <a:srgbClr val="13294B"/>
-                </a:solidFill>
-                <a:latin typeface="맑은 고딕"/>
-                <a:ea typeface="맑은 고딕"/>
-                <a:cs typeface="맑은 고딕"/>
-              </a:rPr>
-              <a:t>근거의 상태</a:t>
-            </a:r>
-          </a:p>
-        </p:txBody>
-      </p:sp>
-      <p:sp>
-        <p:nvSpPr>
-          <p:cNvPr id="20" name="TextBox 19"/>
-          <p:cNvSpPr txBox="1"/>
-          <p:nvPr/>
-        </p:nvSpPr>
-        <p:spPr>
-          <a:xfrm>
-            <a:off x="3200400" y="3111246"/>
-            <a:ext cx="6156655" cy="540639"/>
-          </a:xfrm>
-          <a:prstGeom prst="rect">
-            <a:avLst/>
-          </a:prstGeom>
-          <a:noFill/>
-        </p:spPr>
-        <p:txBody>
-          <a:bodyPr wrap="square" anchor="ctr"/>
-          <a:lstStyle/>
-          <a:p>
-            <a:pPr algn="l">
-              <a:lnSpc>
-                <a:spcPct val="110000"/>
-              </a:lnSpc>
-            </a:pPr>
-            <a:r>
-              <a:rPr sz="1400" b="0">
-                <a:solidFill>
-                  <a:srgbClr val="1F2A3A"/>
-                </a:solidFill>
-                <a:latin typeface="맑은 고딕"/>
-                <a:ea typeface="맑은 고딕"/>
-                <a:cs typeface="맑은 고딕"/>
-              </a:rPr>
-              <a:t>SUPPORTED · UNKNOWN · UNSUPPORTED</a:t>
-            </a:r>
-          </a:p>
-        </p:txBody>
-      </p:sp>
-      <p:sp>
-        <p:nvSpPr>
-          <p:cNvPr id="21" name="TextBox 20"/>
-          <p:cNvSpPr txBox="1"/>
-          <p:nvPr/>
-        </p:nvSpPr>
-        <p:spPr>
-          <a:xfrm>
-            <a:off x="9448495" y="3111246"/>
-            <a:ext cx="2103120" cy="540639"/>
-          </a:xfrm>
-          <a:prstGeom prst="rect">
-            <a:avLst/>
-          </a:prstGeom>
-          <a:noFill/>
-        </p:spPr>
-        <p:txBody>
-          <a:bodyPr wrap="square" anchor="ctr"/>
-          <a:lstStyle/>
-          <a:p>
-            <a:pPr algn="l">
-              <a:lnSpc>
-                <a:spcPct val="110000"/>
-              </a:lnSpc>
-            </a:pPr>
-            <a:r>
-              <a:rPr sz="1250" b="1">
-                <a:solidFill>
-                  <a:srgbClr val="556175"/>
-                </a:solidFill>
-                <a:latin typeface="맑은 고딕"/>
-                <a:ea typeface="맑은 고딕"/>
-                <a:cs typeface="맑은 고딕"/>
-              </a:rPr>
-              <a:t>확인됨, 확인하지 못함, 맞는 근거 없음</a:t>
-            </a:r>
-          </a:p>
-        </p:txBody>
-      </p:sp>
-      <p:sp>
-        <p:nvSpPr>
-          <p:cNvPr id="22" name="Rounded Rectangle 21"/>
+          <p:cNvPr id="21" name="Oval 20"/>
           <p:cNvSpPr/>
           <p:nvPr/>
         </p:nvSpPr>
         <p:spPr>
           <a:xfrm>
-            <a:off x="548640" y="3683888"/>
-            <a:ext cx="11094415" cy="476631"/>
-          </a:xfrm>
-          <a:prstGeom prst="roundRect">
-            <a:avLst>
-              <a:gd name="adj" fmla="val 8000"/>
-            </a:avLst>
+            <a:off x="731520" y="5532120"/>
+            <a:ext cx="365760" cy="365760"/>
+          </a:xfrm>
+          <a:prstGeom prst="ellipse">
+            <a:avLst/>
           </a:prstGeom>
           <a:solidFill>
-            <a:srgbClr val="F3F6F9"/>
+            <a:srgbClr val="13294B"/>
           </a:solidFill>
           <a:ln>
             <a:noFill/>
@@ -61238,14 +61834,53 @@
       </p:sp>
       <p:sp>
         <p:nvSpPr>
+          <p:cNvPr id="22" name="TextBox 21"/>
+          <p:cNvSpPr txBox="1"/>
+          <p:nvPr/>
+        </p:nvSpPr>
+        <p:spPr>
+          <a:xfrm>
+            <a:off x="731520" y="5532120"/>
+            <a:ext cx="365760" cy="365760"/>
+          </a:xfrm>
+          <a:prstGeom prst="rect">
+            <a:avLst/>
+          </a:prstGeom>
+          <a:noFill/>
+        </p:spPr>
+        <p:txBody>
+          <a:bodyPr wrap="square" anchor="ctr"/>
+          <a:lstStyle/>
+          <a:p>
+            <a:pPr algn="ctr">
+              <a:lnSpc>
+                <a:spcPct val="110000"/>
+              </a:lnSpc>
+            </a:pPr>
+            <a:r>
+              <a:rPr sz="1300" b="1">
+                <a:solidFill>
+                  <a:srgbClr val="FFFFFF"/>
+                </a:solidFill>
+                <a:latin typeface="맑은 고딕"/>
+                <a:ea typeface="맑은 고딕"/>
+                <a:cs typeface="맑은 고딕"/>
+              </a:rPr>
+              <a:t>4</a:t>
+            </a:r>
+          </a:p>
+        </p:txBody>
+      </p:sp>
+      <p:sp>
+        <p:nvSpPr>
           <p:cNvPr id="23" name="TextBox 22"/>
           <p:cNvSpPr txBox="1"/>
           <p:nvPr/>
         </p:nvSpPr>
         <p:spPr>
           <a:xfrm>
-            <a:off x="685800" y="3651885"/>
-            <a:ext cx="2514600" cy="540639"/>
+            <a:off x="1234440" y="5257800"/>
+            <a:ext cx="10225735" cy="914400"/>
           </a:xfrm>
           <a:prstGeom prst="rect">
             <a:avLst/>
@@ -61262,46 +61897,7 @@
               </a:lnSpc>
             </a:pPr>
             <a:r>
-              <a:rPr sz="1450" b="1">
-                <a:solidFill>
-                  <a:srgbClr val="13294B"/>
-                </a:solidFill>
-                <a:latin typeface="맑은 고딕"/>
-                <a:ea typeface="맑은 고딕"/>
-                <a:cs typeface="맑은 고딕"/>
-              </a:rPr>
-              <a:t>SKILL.md</a:t>
-            </a:r>
-          </a:p>
-        </p:txBody>
-      </p:sp>
-      <p:sp>
-        <p:nvSpPr>
-          <p:cNvPr id="24" name="TextBox 23"/>
-          <p:cNvSpPr txBox="1"/>
-          <p:nvPr/>
-        </p:nvSpPr>
-        <p:spPr>
-          <a:xfrm>
-            <a:off x="3200400" y="3651885"/>
-            <a:ext cx="6156655" cy="540639"/>
-          </a:xfrm>
-          <a:prstGeom prst="rect">
-            <a:avLst/>
-          </a:prstGeom>
-          <a:noFill/>
-        </p:spPr>
-        <p:txBody>
-          <a:bodyPr wrap="square" anchor="ctr"/>
-          <a:lstStyle/>
-          <a:p>
-            <a:pPr algn="l">
-              <a:lnSpc>
-                <a:spcPct val="110000"/>
-              </a:lnSpc>
-            </a:pPr>
-            <a:r>
-              <a:rPr sz="1400" b="0">
+              <a:rPr sz="1550" b="1">
                 <a:solidFill>
                   <a:srgbClr val="1F2A3A"/>
                 </a:solidFill>
@@ -61309,810 +61905,7 @@
                 <a:ea typeface="맑은 고딕"/>
                 <a:cs typeface="맑은 고딕"/>
               </a:rPr>
-              <a:t>Agent Skill의 파일</a:t>
-            </a:r>
-          </a:p>
-        </p:txBody>
-      </p:sp>
-      <p:sp>
-        <p:nvSpPr>
-          <p:cNvPr id="25" name="TextBox 24"/>
-          <p:cNvSpPr txBox="1"/>
-          <p:nvPr/>
-        </p:nvSpPr>
-        <p:spPr>
-          <a:xfrm>
-            <a:off x="9448495" y="3651885"/>
-            <a:ext cx="2103120" cy="540639"/>
-          </a:xfrm>
-          <a:prstGeom prst="rect">
-            <a:avLst/>
-          </a:prstGeom>
-          <a:noFill/>
-        </p:spPr>
-        <p:txBody>
-          <a:bodyPr wrap="square" anchor="ctr"/>
-          <a:lstStyle/>
-          <a:p>
-            <a:pPr algn="l">
-              <a:lnSpc>
-                <a:spcPct val="110000"/>
-              </a:lnSpc>
-            </a:pPr>
-            <a:r>
-              <a:rPr sz="1250" b="1">
-                <a:solidFill>
-                  <a:srgbClr val="556175"/>
-                </a:solidFill>
-                <a:latin typeface="맑은 고딕"/>
-                <a:ea typeface="맑은 고딕"/>
-                <a:cs typeface="맑은 고딕"/>
-              </a:rPr>
-              <a:t>수행 방법을 적은 지침</a:t>
-            </a:r>
-          </a:p>
-        </p:txBody>
-      </p:sp>
-      <p:sp>
-        <p:nvSpPr>
-          <p:cNvPr id="26" name="Rounded Rectangle 25"/>
-          <p:cNvSpPr/>
-          <p:nvPr/>
-        </p:nvSpPr>
-        <p:spPr>
-          <a:xfrm>
-            <a:off x="548640" y="4224528"/>
-            <a:ext cx="11094415" cy="476631"/>
-          </a:xfrm>
-          <a:prstGeom prst="roundRect">
-            <a:avLst>
-              <a:gd name="adj" fmla="val 8000"/>
-            </a:avLst>
-          </a:prstGeom>
-          <a:solidFill>
-            <a:srgbClr val="F3F6F9"/>
-          </a:solidFill>
-          <a:ln>
-            <a:noFill/>
-          </a:ln>
-        </p:spPr>
-        <p:txBody>
-          <a:bodyPr rtlCol="0" anchor="ctr"/>
-          <a:lstStyle/>
-          <a:p>
-            <a:pPr algn="ctr"/>
-          </a:p>
-        </p:txBody>
-      </p:sp>
-      <p:sp>
-        <p:nvSpPr>
-          <p:cNvPr id="27" name="TextBox 26"/>
-          <p:cNvSpPr txBox="1"/>
-          <p:nvPr/>
-        </p:nvSpPr>
-        <p:spPr>
-          <a:xfrm>
-            <a:off x="685800" y="4192524"/>
-            <a:ext cx="2514600" cy="540639"/>
-          </a:xfrm>
-          <a:prstGeom prst="rect">
-            <a:avLst/>
-          </a:prstGeom>
-          <a:noFill/>
-        </p:spPr>
-        <p:txBody>
-          <a:bodyPr wrap="square" anchor="ctr"/>
-          <a:lstStyle/>
-          <a:p>
-            <a:pPr algn="l">
-              <a:lnSpc>
-                <a:spcPct val="110000"/>
-              </a:lnSpc>
-            </a:pPr>
-            <a:r>
-              <a:rPr sz="1450" b="1">
-                <a:solidFill>
-                  <a:srgbClr val="13294B"/>
-                </a:solidFill>
-                <a:latin typeface="맑은 고딕"/>
-                <a:ea typeface="맑은 고딕"/>
-                <a:cs typeface="맑은 고딕"/>
-              </a:rPr>
-              <a:t>MCP</a:t>
-            </a:r>
-          </a:p>
-        </p:txBody>
-      </p:sp>
-      <p:sp>
-        <p:nvSpPr>
-          <p:cNvPr id="28" name="TextBox 27"/>
-          <p:cNvSpPr txBox="1"/>
-          <p:nvPr/>
-        </p:nvSpPr>
-        <p:spPr>
-          <a:xfrm>
-            <a:off x="3200400" y="4192524"/>
-            <a:ext cx="6156655" cy="540639"/>
-          </a:xfrm>
-          <a:prstGeom prst="rect">
-            <a:avLst/>
-          </a:prstGeom>
-          <a:noFill/>
-        </p:spPr>
-        <p:txBody>
-          <a:bodyPr wrap="square" anchor="ctr"/>
-          <a:lstStyle/>
-          <a:p>
-            <a:pPr algn="l">
-              <a:lnSpc>
-                <a:spcPct val="110000"/>
-              </a:lnSpc>
-            </a:pPr>
-            <a:r>
-              <a:rPr sz="1400" b="0">
-                <a:solidFill>
-                  <a:srgbClr val="1F2A3A"/>
-                </a:solidFill>
-                <a:latin typeface="맑은 고딕"/>
-                <a:ea typeface="맑은 고딕"/>
-                <a:cs typeface="맑은 고딕"/>
-              </a:rPr>
-              <a:t>Model Context Protocol</a:t>
-            </a:r>
-          </a:p>
-        </p:txBody>
-      </p:sp>
-      <p:sp>
-        <p:nvSpPr>
-          <p:cNvPr id="29" name="TextBox 28"/>
-          <p:cNvSpPr txBox="1"/>
-          <p:nvPr/>
-        </p:nvSpPr>
-        <p:spPr>
-          <a:xfrm>
-            <a:off x="9448495" y="4192524"/>
-            <a:ext cx="2103120" cy="540639"/>
-          </a:xfrm>
-          <a:prstGeom prst="rect">
-            <a:avLst/>
-          </a:prstGeom>
-          <a:noFill/>
-        </p:spPr>
-        <p:txBody>
-          <a:bodyPr wrap="square" anchor="ctr"/>
-          <a:lstStyle/>
-          <a:p>
-            <a:pPr algn="l">
-              <a:lnSpc>
-                <a:spcPct val="110000"/>
-              </a:lnSpc>
-            </a:pPr>
-            <a:r>
-              <a:rPr sz="1250" b="1">
-                <a:solidFill>
-                  <a:srgbClr val="556175"/>
-                </a:solidFill>
-                <a:latin typeface="맑은 고딕"/>
-                <a:ea typeface="맑은 고딕"/>
-                <a:cs typeface="맑은 고딕"/>
-              </a:rPr>
-              <a:t>호스트와 서버를 잇는 규약</a:t>
-            </a:r>
-          </a:p>
-        </p:txBody>
-      </p:sp>
-      <p:sp>
-        <p:nvSpPr>
-          <p:cNvPr id="30" name="Rounded Rectangle 29"/>
-          <p:cNvSpPr/>
-          <p:nvPr/>
-        </p:nvSpPr>
-        <p:spPr>
-          <a:xfrm>
-            <a:off x="548640" y="4765167"/>
-            <a:ext cx="11094415" cy="476631"/>
-          </a:xfrm>
-          <a:prstGeom prst="roundRect">
-            <a:avLst>
-              <a:gd name="adj" fmla="val 8000"/>
-            </a:avLst>
-          </a:prstGeom>
-          <a:solidFill>
-            <a:srgbClr val="F3F6F9"/>
-          </a:solidFill>
-          <a:ln>
-            <a:noFill/>
-          </a:ln>
-        </p:spPr>
-        <p:txBody>
-          <a:bodyPr rtlCol="0" anchor="ctr"/>
-          <a:lstStyle/>
-          <a:p>
-            <a:pPr algn="ctr"/>
-          </a:p>
-        </p:txBody>
-      </p:sp>
-      <p:sp>
-        <p:nvSpPr>
-          <p:cNvPr id="31" name="TextBox 30"/>
-          <p:cNvSpPr txBox="1"/>
-          <p:nvPr/>
-        </p:nvSpPr>
-        <p:spPr>
-          <a:xfrm>
-            <a:off x="685800" y="4733163"/>
-            <a:ext cx="2514600" cy="540639"/>
-          </a:xfrm>
-          <a:prstGeom prst="rect">
-            <a:avLst/>
-          </a:prstGeom>
-          <a:noFill/>
-        </p:spPr>
-        <p:txBody>
-          <a:bodyPr wrap="square" anchor="ctr"/>
-          <a:lstStyle/>
-          <a:p>
-            <a:pPr algn="l">
-              <a:lnSpc>
-                <a:spcPct val="110000"/>
-              </a:lnSpc>
-            </a:pPr>
-            <a:r>
-              <a:rPr sz="1450" b="1">
-                <a:solidFill>
-                  <a:srgbClr val="13294B"/>
-                </a:solidFill>
-                <a:latin typeface="맑은 고딕"/>
-                <a:ea typeface="맑은 고딕"/>
-                <a:cs typeface="맑은 고딕"/>
-              </a:rPr>
-              <a:t>JSON-RPC</a:t>
-            </a:r>
-          </a:p>
-        </p:txBody>
-      </p:sp>
-      <p:sp>
-        <p:nvSpPr>
-          <p:cNvPr id="32" name="TextBox 31"/>
-          <p:cNvSpPr txBox="1"/>
-          <p:nvPr/>
-        </p:nvSpPr>
-        <p:spPr>
-          <a:xfrm>
-            <a:off x="3200400" y="4733163"/>
-            <a:ext cx="6156655" cy="540639"/>
-          </a:xfrm>
-          <a:prstGeom prst="rect">
-            <a:avLst/>
-          </a:prstGeom>
-          <a:noFill/>
-        </p:spPr>
-        <p:txBody>
-          <a:bodyPr wrap="square" anchor="ctr"/>
-          <a:lstStyle/>
-          <a:p>
-            <a:pPr algn="l">
-              <a:lnSpc>
-                <a:spcPct val="110000"/>
-              </a:lnSpc>
-            </a:pPr>
-            <a:r>
-              <a:rPr sz="1400" b="0">
-                <a:solidFill>
-                  <a:srgbClr val="1F2A3A"/>
-                </a:solidFill>
-                <a:latin typeface="맑은 고딕"/>
-                <a:ea typeface="맑은 고딕"/>
-                <a:cs typeface="맑은 고딕"/>
-              </a:rPr>
-              <a:t>JSON Remote Procedure Call</a:t>
-            </a:r>
-          </a:p>
-        </p:txBody>
-      </p:sp>
-      <p:sp>
-        <p:nvSpPr>
-          <p:cNvPr id="33" name="TextBox 32"/>
-          <p:cNvSpPr txBox="1"/>
-          <p:nvPr/>
-        </p:nvSpPr>
-        <p:spPr>
-          <a:xfrm>
-            <a:off x="9448495" y="4733163"/>
-            <a:ext cx="2103120" cy="540639"/>
-          </a:xfrm>
-          <a:prstGeom prst="rect">
-            <a:avLst/>
-          </a:prstGeom>
-          <a:noFill/>
-        </p:spPr>
-        <p:txBody>
-          <a:bodyPr wrap="square" anchor="ctr"/>
-          <a:lstStyle/>
-          <a:p>
-            <a:pPr algn="l">
-              <a:lnSpc>
-                <a:spcPct val="110000"/>
-              </a:lnSpc>
-            </a:pPr>
-            <a:r>
-              <a:rPr sz="1250" b="1">
-                <a:solidFill>
-                  <a:srgbClr val="556175"/>
-                </a:solidFill>
-                <a:latin typeface="맑은 고딕"/>
-                <a:ea typeface="맑은 고딕"/>
-                <a:cs typeface="맑은 고딕"/>
-              </a:rPr>
-              <a:t>MCP 메시지의 형식</a:t>
-            </a:r>
-          </a:p>
-        </p:txBody>
-      </p:sp>
-      <p:sp>
-        <p:nvSpPr>
-          <p:cNvPr id="34" name="Rounded Rectangle 33"/>
-          <p:cNvSpPr/>
-          <p:nvPr/>
-        </p:nvSpPr>
-        <p:spPr>
-          <a:xfrm>
-            <a:off x="548640" y="5305806"/>
-            <a:ext cx="11094415" cy="476631"/>
-          </a:xfrm>
-          <a:prstGeom prst="roundRect">
-            <a:avLst>
-              <a:gd name="adj" fmla="val 8000"/>
-            </a:avLst>
-          </a:prstGeom>
-          <a:solidFill>
-            <a:srgbClr val="F3F6F9"/>
-          </a:solidFill>
-          <a:ln>
-            <a:noFill/>
-          </a:ln>
-        </p:spPr>
-        <p:txBody>
-          <a:bodyPr rtlCol="0" anchor="ctr"/>
-          <a:lstStyle/>
-          <a:p>
-            <a:pPr algn="ctr"/>
-          </a:p>
-        </p:txBody>
-      </p:sp>
-      <p:sp>
-        <p:nvSpPr>
-          <p:cNvPr id="35" name="TextBox 34"/>
-          <p:cNvSpPr txBox="1"/>
-          <p:nvPr/>
-        </p:nvSpPr>
-        <p:spPr>
-          <a:xfrm>
-            <a:off x="685800" y="5273802"/>
-            <a:ext cx="2514600" cy="540639"/>
-          </a:xfrm>
-          <a:prstGeom prst="rect">
-            <a:avLst/>
-          </a:prstGeom>
-          <a:noFill/>
-        </p:spPr>
-        <p:txBody>
-          <a:bodyPr wrap="square" anchor="ctr"/>
-          <a:lstStyle/>
-          <a:p>
-            <a:pPr algn="l">
-              <a:lnSpc>
-                <a:spcPct val="110000"/>
-              </a:lnSpc>
-            </a:pPr>
-            <a:r>
-              <a:rPr sz="1450" b="1">
-                <a:solidFill>
-                  <a:srgbClr val="13294B"/>
-                </a:solidFill>
-                <a:latin typeface="맑은 고딕"/>
-                <a:ea typeface="맑은 고딕"/>
-                <a:cs typeface="맑은 고딕"/>
-              </a:rPr>
-              <a:t>stdio</a:t>
-            </a:r>
-          </a:p>
-        </p:txBody>
-      </p:sp>
-      <p:sp>
-        <p:nvSpPr>
-          <p:cNvPr id="36" name="TextBox 35"/>
-          <p:cNvSpPr txBox="1"/>
-          <p:nvPr/>
-        </p:nvSpPr>
-        <p:spPr>
-          <a:xfrm>
-            <a:off x="3200400" y="5273802"/>
-            <a:ext cx="6156655" cy="540639"/>
-          </a:xfrm>
-          <a:prstGeom prst="rect">
-            <a:avLst/>
-          </a:prstGeom>
-          <a:noFill/>
-        </p:spPr>
-        <p:txBody>
-          <a:bodyPr wrap="square" anchor="ctr"/>
-          <a:lstStyle/>
-          <a:p>
-            <a:pPr algn="l">
-              <a:lnSpc>
-                <a:spcPct val="110000"/>
-              </a:lnSpc>
-            </a:pPr>
-            <a:r>
-              <a:rPr sz="1400" b="0">
-                <a:solidFill>
-                  <a:srgbClr val="1F2A3A"/>
-                </a:solidFill>
-                <a:latin typeface="맑은 고딕"/>
-                <a:ea typeface="맑은 고딕"/>
-                <a:cs typeface="맑은 고딕"/>
-              </a:rPr>
-              <a:t>standard input/output</a:t>
-            </a:r>
-          </a:p>
-        </p:txBody>
-      </p:sp>
-      <p:sp>
-        <p:nvSpPr>
-          <p:cNvPr id="37" name="TextBox 36"/>
-          <p:cNvSpPr txBox="1"/>
-          <p:nvPr/>
-        </p:nvSpPr>
-        <p:spPr>
-          <a:xfrm>
-            <a:off x="9448495" y="5273802"/>
-            <a:ext cx="2103120" cy="540639"/>
-          </a:xfrm>
-          <a:prstGeom prst="rect">
-            <a:avLst/>
-          </a:prstGeom>
-          <a:noFill/>
-        </p:spPr>
-        <p:txBody>
-          <a:bodyPr wrap="square" anchor="ctr"/>
-          <a:lstStyle/>
-          <a:p>
-            <a:pPr algn="l">
-              <a:lnSpc>
-                <a:spcPct val="110000"/>
-              </a:lnSpc>
-            </a:pPr>
-            <a:r>
-              <a:rPr sz="1250" b="1">
-                <a:solidFill>
-                  <a:srgbClr val="556175"/>
-                </a:solidFill>
-                <a:latin typeface="맑은 고딕"/>
-                <a:ea typeface="맑은 고딕"/>
-                <a:cs typeface="맑은 고딕"/>
-              </a:rPr>
-              <a:t>호스트가 띄운 서버와의 연결 방식</a:t>
-            </a:r>
-          </a:p>
-        </p:txBody>
-      </p:sp>
-      <p:sp>
-        <p:nvSpPr>
-          <p:cNvPr id="38" name="Rounded Rectangle 37"/>
-          <p:cNvSpPr/>
-          <p:nvPr/>
-        </p:nvSpPr>
-        <p:spPr>
-          <a:xfrm>
-            <a:off x="548640" y="5846445"/>
-            <a:ext cx="11094415" cy="476631"/>
-          </a:xfrm>
-          <a:prstGeom prst="roundRect">
-            <a:avLst>
-              <a:gd name="adj" fmla="val 8000"/>
-            </a:avLst>
-          </a:prstGeom>
-          <a:solidFill>
-            <a:srgbClr val="F3F6F9"/>
-          </a:solidFill>
-          <a:ln>
-            <a:noFill/>
-          </a:ln>
-        </p:spPr>
-        <p:txBody>
-          <a:bodyPr rtlCol="0" anchor="ctr"/>
-          <a:lstStyle/>
-          <a:p>
-            <a:pPr algn="ctr"/>
-          </a:p>
-        </p:txBody>
-      </p:sp>
-      <p:sp>
-        <p:nvSpPr>
-          <p:cNvPr id="39" name="TextBox 38"/>
-          <p:cNvSpPr txBox="1"/>
-          <p:nvPr/>
-        </p:nvSpPr>
-        <p:spPr>
-          <a:xfrm>
-            <a:off x="685800" y="5814441"/>
-            <a:ext cx="2514600" cy="540639"/>
-          </a:xfrm>
-          <a:prstGeom prst="rect">
-            <a:avLst/>
-          </a:prstGeom>
-          <a:noFill/>
-        </p:spPr>
-        <p:txBody>
-          <a:bodyPr wrap="square" anchor="ctr"/>
-          <a:lstStyle/>
-          <a:p>
-            <a:pPr algn="l">
-              <a:lnSpc>
-                <a:spcPct val="110000"/>
-              </a:lnSpc>
-            </a:pPr>
-            <a:r>
-              <a:rPr sz="1450" b="1">
-                <a:solidFill>
-                  <a:srgbClr val="13294B"/>
-                </a:solidFill>
-                <a:latin typeface="맑은 고딕"/>
-                <a:ea typeface="맑은 고딕"/>
-                <a:cs typeface="맑은 고딕"/>
-              </a:rPr>
-              <a:t>readOnlyHint</a:t>
-            </a:r>
-          </a:p>
-        </p:txBody>
-      </p:sp>
-      <p:sp>
-        <p:nvSpPr>
-          <p:cNvPr id="40" name="TextBox 39"/>
-          <p:cNvSpPr txBox="1"/>
-          <p:nvPr/>
-        </p:nvSpPr>
-        <p:spPr>
-          <a:xfrm>
-            <a:off x="3200400" y="5814441"/>
-            <a:ext cx="6156655" cy="540639"/>
-          </a:xfrm>
-          <a:prstGeom prst="rect">
-            <a:avLst/>
-          </a:prstGeom>
-          <a:noFill/>
-        </p:spPr>
-        <p:txBody>
-          <a:bodyPr wrap="square" anchor="ctr"/>
-          <a:lstStyle/>
-          <a:p>
-            <a:pPr algn="l">
-              <a:lnSpc>
-                <a:spcPct val="110000"/>
-              </a:lnSpc>
-            </a:pPr>
-            <a:r>
-              <a:rPr sz="1400" b="0">
-                <a:solidFill>
-                  <a:srgbClr val="1F2A3A"/>
-                </a:solidFill>
-                <a:latin typeface="맑은 고딕"/>
-                <a:ea typeface="맑은 고딕"/>
-                <a:cs typeface="맑은 고딕"/>
-              </a:rPr>
-              <a:t>읽기 전용 표시</a:t>
-            </a:r>
-          </a:p>
-        </p:txBody>
-      </p:sp>
-      <p:sp>
-        <p:nvSpPr>
-          <p:cNvPr id="41" name="TextBox 40"/>
-          <p:cNvSpPr txBox="1"/>
-          <p:nvPr/>
-        </p:nvSpPr>
-        <p:spPr>
-          <a:xfrm>
-            <a:off x="9448495" y="5814441"/>
-            <a:ext cx="2103120" cy="540639"/>
-          </a:xfrm>
-          <a:prstGeom prst="rect">
-            <a:avLst/>
-          </a:prstGeom>
-          <a:noFill/>
-        </p:spPr>
-        <p:txBody>
-          <a:bodyPr wrap="square" anchor="ctr"/>
-          <a:lstStyle/>
-          <a:p>
-            <a:pPr algn="l">
-              <a:lnSpc>
-                <a:spcPct val="110000"/>
-              </a:lnSpc>
-            </a:pPr>
-            <a:r>
-              <a:rPr sz="1250" b="1">
-                <a:solidFill>
-                  <a:srgbClr val="556175"/>
-                </a:solidFill>
-                <a:latin typeface="맑은 고딕"/>
-                <a:ea typeface="맑은 고딕"/>
-                <a:cs typeface="맑은 고딕"/>
-              </a:rPr>
-              <a:t>연결 검사와 허용 목록의 기준</a:t>
-            </a:r>
-          </a:p>
-        </p:txBody>
-      </p:sp>
-    </p:spTree>
-  </p:cSld>
-  <p:clrMapOvr>
-    <a:masterClrMapping/>
-  </p:clrMapOvr>
-</p:sld>
-</file>
-
-<file path=ppt/slides/slide72.xml><?xml version="1.0" encoding="utf-8"?>
-<p:sld xmlns:a="http://schemas.openxmlformats.org/drawingml/2006/main" xmlns:p="http://schemas.openxmlformats.org/presentationml/2006/main" xmlns:r="http://schemas.openxmlformats.org/officeDocument/2006/relationships">
-  <p:cSld>
-    <p:bg>
-      <p:bgPr>
-        <a:solidFill>
-          <a:srgbClr val="E7F3FD"/>
-        </a:solidFill>
-        <a:effectLst/>
-      </p:bgPr>
-    </p:bg>
-    <p:spTree>
-      <p:nvGrpSpPr>
-        <p:cNvPr id="1" name=""/>
-        <p:cNvGrpSpPr/>
-        <p:nvPr/>
-      </p:nvGrpSpPr>
-      <p:grpSpPr/>
-      <p:sp>
-        <p:nvSpPr>
-          <p:cNvPr id="2" name="TextBox 1"/>
-          <p:cNvSpPr txBox="1"/>
-          <p:nvPr/>
-        </p:nvSpPr>
-        <p:spPr>
-          <a:xfrm>
-            <a:off x="457200" y="384048"/>
-            <a:ext cx="8229600" cy="457200"/>
-          </a:xfrm>
-          <a:prstGeom prst="rect">
-            <a:avLst/>
-          </a:prstGeom>
-          <a:noFill/>
-        </p:spPr>
-        <p:txBody>
-          <a:bodyPr wrap="square" anchor="t"/>
-          <a:lstStyle/>
-          <a:p>
-            <a:pPr algn="l">
-              <a:lnSpc>
-                <a:spcPct val="110000"/>
-              </a:lnSpc>
-            </a:pPr>
-            <a:r>
-              <a:rPr sz="2000" b="1">
-                <a:solidFill>
-                  <a:srgbClr val="5CB8F2"/>
-                </a:solidFill>
-                <a:latin typeface="맑은 고딕"/>
-                <a:ea typeface="맑은 고딕"/>
-                <a:cs typeface="맑은 고딕"/>
-              </a:rPr>
-              <a:t>경남대학교 피지컬AI 사관학교</a:t>
-            </a:r>
-          </a:p>
-        </p:txBody>
-      </p:sp>
-      <p:sp>
-        <p:nvSpPr>
-          <p:cNvPr id="3" name="Rectangle 2"/>
-          <p:cNvSpPr/>
-          <p:nvPr/>
-        </p:nvSpPr>
-        <p:spPr>
-          <a:xfrm>
-            <a:off x="548640" y="859536"/>
-            <a:ext cx="3606800" cy="41148"/>
-          </a:xfrm>
-          <a:prstGeom prst="rect">
-            <a:avLst/>
-          </a:prstGeom>
-          <a:solidFill>
-            <a:srgbClr val="5CB8F2"/>
-          </a:solidFill>
-          <a:ln>
-            <a:noFill/>
-          </a:ln>
-        </p:spPr>
-        <p:txBody>
-          <a:bodyPr rtlCol="0" anchor="ctr"/>
-          <a:lstStyle/>
-          <a:p>
-            <a:pPr algn="ctr"/>
-          </a:p>
-        </p:txBody>
-      </p:sp>
-      <p:sp>
-        <p:nvSpPr>
-          <p:cNvPr id="4" name="TextBox 3"/>
-          <p:cNvSpPr txBox="1"/>
-          <p:nvPr/>
-        </p:nvSpPr>
-        <p:spPr>
-          <a:xfrm>
-            <a:off x="731520" y="2011680"/>
-            <a:ext cx="10911535" cy="2011680"/>
-          </a:xfrm>
-          <a:prstGeom prst="rect">
-            <a:avLst/>
-          </a:prstGeom>
-          <a:noFill/>
-        </p:spPr>
-        <p:txBody>
-          <a:bodyPr wrap="square" anchor="ctr"/>
-          <a:lstStyle/>
-          <a:p>
-            <a:pPr algn="l">
-              <a:lnSpc>
-                <a:spcPct val="110000"/>
-              </a:lnSpc>
-            </a:pPr>
-            <a:r>
-              <a:rPr sz="3400" b="1">
-                <a:solidFill>
-                  <a:srgbClr val="13294B"/>
-                </a:solidFill>
-                <a:latin typeface="맑은 고딕"/>
-                <a:ea typeface="맑은 고딕"/>
-                <a:cs typeface="맑은 고딕"/>
-              </a:rPr>
-              <a:t>Review Quiz: 핵심 흐름 되짚어보기</a:t>
-            </a:r>
-          </a:p>
-        </p:txBody>
-      </p:sp>
-      <p:sp>
-        <p:nvSpPr>
-          <p:cNvPr id="5" name="TextBox 4"/>
-          <p:cNvSpPr txBox="1"/>
-          <p:nvPr/>
-        </p:nvSpPr>
-        <p:spPr>
-          <a:xfrm>
-            <a:off x="731520" y="4160520"/>
-            <a:ext cx="10911535" cy="457200"/>
-          </a:xfrm>
-          <a:prstGeom prst="rect">
-            <a:avLst/>
-          </a:prstGeom>
-          <a:noFill/>
-        </p:spPr>
-        <p:txBody>
-          <a:bodyPr wrap="square" anchor="t"/>
-          <a:lstStyle/>
-          <a:p>
-            <a:pPr algn="l">
-              <a:lnSpc>
-                <a:spcPct val="110000"/>
-              </a:lnSpc>
-            </a:pPr>
-            <a:r>
-              <a:rPr sz="1700" b="0">
-                <a:solidFill>
-                  <a:srgbClr val="556175"/>
-                </a:solidFill>
-                <a:latin typeface="맑은 고딕"/>
-                <a:ea typeface="맑은 고딕"/>
-                <a:cs typeface="맑은 고딕"/>
-              </a:rPr>
-              <a:t>배운 내용을 바탕으로 정답을 맞혀 보세요.</a:t>
+              <a:t>종료 — 산출물을 제출하고 끝낸 것이다</a:t>
             </a:r>
           </a:p>
         </p:txBody>
@@ -62177,7 +61970,7 @@
                 <a:ea typeface="맑은 고딕"/>
                 <a:cs typeface="맑은 고딕"/>
               </a:rPr>
-              <a:t>Quiz 1. 처리 기록의 한 장면</a:t>
+              <a:t>Quiz 2. 스킬에 적힌 조회가 실행되지 않은 까닭</a:t>
             </a:r>
           </a:p>
         </p:txBody>
@@ -62216,7 +62009,7 @@
                 <a:ea typeface="맑은 고딕"/>
                 <a:cs typeface="맑은 고딕"/>
               </a:rPr>
-              <a:t>에이전트가 원인 진단을 부른 뒤, 그 결과에 든 원인과 고장 유형의 식별자를 넣어 대안 평가를 불렀다.</a:t>
+              <a:t>스킬에 납기 오더를 확인하라는 단계가 있는데도 값을 받지 못했고, 연결된 서버는 neo4j와 hyd-dmn뿐이다.</a:t>
             </a:r>
           </a:p>
         </p:txBody>
@@ -62354,7 +62147,7 @@
                 <a:ea typeface="맑은 고딕"/>
                 <a:cs typeface="맑은 고딕"/>
               </a:rPr>
-              <a:t>이 장면이 보여 주는 실행 고리의 단계는?</a:t>
+              <a:t>먼저 고칠 곳은?</a:t>
             </a:r>
           </a:p>
         </p:txBody>
@@ -62492,7 +62285,7 @@
                 <a:ea typeface="맑은 고딕"/>
                 <a:cs typeface="맑은 고딕"/>
               </a:rPr>
-              <a:t>요청 해석 — 맡은 업무와 입력을 읽은 것이다</a:t>
+              <a:t>스킬의 절차에 mes_orders의 입력 스키마를 옮겨 적는다</a:t>
             </a:r>
           </a:p>
         </p:txBody>
@@ -62630,7 +62423,7 @@
                 <a:ea typeface="맑은 고딕"/>
                 <a:cs typeface="맑은 고딕"/>
               </a:rPr>
-              <a:t>결과 관찰에 이은 다음 호출 — 앞의 결과가 다음 입력을 정했다</a:t>
+              <a:t>스킬의 description을 더 자세히 고쳐 쓴다</a:t>
             </a:r>
           </a:p>
         </p:txBody>
@@ -62768,7 +62561,7 @@
                 <a:ea typeface="맑은 고딕"/>
                 <a:cs typeface="맑은 고딕"/>
               </a:rPr>
-              <a:t>재시도 — 뜻대로 되지 않은 호출을 다시 부른 것이다</a:t>
+              <a:t>에이전트에 업무 DB 서버 enterprise를 연결한다</a:t>
             </a:r>
           </a:p>
         </p:txBody>
@@ -62906,7 +62699,7 @@
                 <a:ea typeface="맑은 고딕"/>
                 <a:cs typeface="맑은 고딕"/>
               </a:rPr>
-              <a:t>종료 — 산출물을 제출하고 끝낸 것이다</a:t>
+              <a:t>허용 목록에서 hyd-dmn의 도구를 뺀다</a:t>
             </a:r>
           </a:p>
         </p:txBody>
@@ -62971,7 +62764,7 @@
                 <a:ea typeface="맑은 고딕"/>
                 <a:cs typeface="맑은 고딕"/>
               </a:rPr>
-              <a:t>Quiz 2. 스킬에 적힌 조회가 실행되지 않은 까닭</a:t>
+              <a:t>Quiz 3. 등록한 서버에서 에이전트가 쓸 수 있는 도구</a:t>
             </a:r>
           </a:p>
         </p:txBody>
@@ -63010,7 +62803,7 @@
                 <a:ea typeface="맑은 고딕"/>
                 <a:cs typeface="맑은 고딕"/>
               </a:rPr>
-              <a:t>스킬에 납기 오더를 확인하라는 단계가 있는데도 값을 받지 못했고, 연결된 서버는 neo4j와 hyd-dmn뿐이다.</a:t>
+              <a:t>새로 등록한 서버의 도구 목록이 read_rows(표시 true), update_row(false), export(표시 없음)이다.</a:t>
             </a:r>
           </a:p>
         </p:txBody>
@@ -63148,7 +62941,7 @@
                 <a:ea typeface="맑은 고딕"/>
                 <a:cs typeface="맑은 고딕"/>
               </a:rPr>
-              <a:t>먼저 고칠 곳은?</a:t>
+              <a:t>에이전트의 허용 목록에 오르는 도구는?</a:t>
             </a:r>
           </a:p>
         </p:txBody>
@@ -63286,7 +63079,7 @@
                 <a:ea typeface="맑은 고딕"/>
                 <a:cs typeface="맑은 고딕"/>
               </a:rPr>
-              <a:t>스킬의 절차에 mes_orders의 입력 스키마를 옮겨 적는다</a:t>
+              <a:t>read_rows 하나</a:t>
             </a:r>
           </a:p>
         </p:txBody>
@@ -63424,7 +63217,7 @@
                 <a:ea typeface="맑은 고딕"/>
                 <a:cs typeface="맑은 고딕"/>
               </a:rPr>
-              <a:t>스킬의 description을 더 자세히 고쳐 쓴다</a:t>
+              <a:t>read_rows와 export</a:t>
             </a:r>
           </a:p>
         </p:txBody>
@@ -63562,7 +63355,7 @@
                 <a:ea typeface="맑은 고딕"/>
                 <a:cs typeface="맑은 고딕"/>
               </a:rPr>
-              <a:t>에이전트에 업무 DB 서버 enterprise를 연결한다</a:t>
+              <a:t>세 도구 모두</a:t>
             </a:r>
           </a:p>
         </p:txBody>
@@ -63700,7 +63493,7 @@
                 <a:ea typeface="맑은 고딕"/>
                 <a:cs typeface="맑은 고딕"/>
               </a:rPr>
-              <a:t>허용 목록에서 hyd-dmn의 도구를 뺀다</a:t>
+              <a:t>오르는 도구가 없다</a:t>
             </a:r>
           </a:p>
         </p:txBody>
@@ -63765,7 +63558,7 @@
                 <a:ea typeface="맑은 고딕"/>
                 <a:cs typeface="맑은 고딕"/>
               </a:rPr>
-              <a:t>Quiz 3. 등록한 서버에서 에이전트가 쓸 수 있는 도구</a:t>
+              <a:t>정답과 판단 기준</a:t>
             </a:r>
           </a:p>
         </p:txBody>
@@ -63804,7 +63597,7 @@
                 <a:ea typeface="맑은 고딕"/>
                 <a:cs typeface="맑은 고딕"/>
               </a:rPr>
-              <a:t>새로 등록한 서버의 도구 목록이 read_rows(표시 true), update_row(false), export(표시 없음)이다.</a:t>
+              <a:t>세 문항은 실행 고리의 단계, 스킬과 도구의 역할, 읽기와 쓰기의 경계를 올바른 기준으로 판단하는지를 확인한다.</a:t>
             </a:r>
           </a:p>
         </p:txBody>
@@ -63873,800 +63666,6 @@
                 <a:cs typeface="맑은 고딕"/>
               </a:rPr>
               <a:t>75</a:t>
-            </a:r>
-          </a:p>
-        </p:txBody>
-      </p:sp>
-      <p:sp>
-        <p:nvSpPr>
-          <p:cNvPr id="6" name="Rounded Rectangle 5"/>
-          <p:cNvSpPr/>
-          <p:nvPr/>
-        </p:nvSpPr>
-        <p:spPr>
-          <a:xfrm>
-            <a:off x="548640" y="1627632"/>
-            <a:ext cx="11094415" cy="704088"/>
-          </a:xfrm>
-          <a:prstGeom prst="roundRect">
-            <a:avLst>
-              <a:gd name="adj" fmla="val 5000"/>
-            </a:avLst>
-          </a:prstGeom>
-          <a:solidFill>
-            <a:srgbClr val="E7F3FD"/>
-          </a:solidFill>
-          <a:ln>
-            <a:noFill/>
-          </a:ln>
-        </p:spPr>
-        <p:txBody>
-          <a:bodyPr rtlCol="0" anchor="ctr"/>
-          <a:lstStyle/>
-          <a:p>
-            <a:pPr algn="ctr"/>
-          </a:p>
-        </p:txBody>
-      </p:sp>
-      <p:sp>
-        <p:nvSpPr>
-          <p:cNvPr id="7" name="TextBox 6"/>
-          <p:cNvSpPr txBox="1"/>
-          <p:nvPr/>
-        </p:nvSpPr>
-        <p:spPr>
-          <a:xfrm>
-            <a:off x="777240" y="1627632"/>
-            <a:ext cx="10637215" cy="704088"/>
-          </a:xfrm>
-          <a:prstGeom prst="rect">
-            <a:avLst/>
-          </a:prstGeom>
-          <a:noFill/>
-        </p:spPr>
-        <p:txBody>
-          <a:bodyPr wrap="square" anchor="ctr"/>
-          <a:lstStyle/>
-          <a:p>
-            <a:pPr algn="l">
-              <a:lnSpc>
-                <a:spcPct val="110000"/>
-              </a:lnSpc>
-            </a:pPr>
-            <a:r>
-              <a:rPr sz="1900" b="1">
-                <a:solidFill>
-                  <a:srgbClr val="13294B"/>
-                </a:solidFill>
-                <a:latin typeface="맑은 고딕"/>
-                <a:ea typeface="맑은 고딕"/>
-                <a:cs typeface="맑은 고딕"/>
-              </a:rPr>
-              <a:t>에이전트의 허용 목록에 오르는 도구는?</a:t>
-            </a:r>
-          </a:p>
-        </p:txBody>
-      </p:sp>
-      <p:sp>
-        <p:nvSpPr>
-          <p:cNvPr id="8" name="Rounded Rectangle 7"/>
-          <p:cNvSpPr/>
-          <p:nvPr/>
-        </p:nvSpPr>
-        <p:spPr>
-          <a:xfrm>
-            <a:off x="548640" y="2560320"/>
-            <a:ext cx="11094415" cy="822960"/>
-          </a:xfrm>
-          <a:prstGeom prst="roundRect">
-            <a:avLst>
-              <a:gd name="adj" fmla="val 8000"/>
-            </a:avLst>
-          </a:prstGeom>
-          <a:solidFill>
-            <a:srgbClr val="F3F6F9"/>
-          </a:solidFill>
-          <a:ln>
-            <a:noFill/>
-          </a:ln>
-        </p:spPr>
-        <p:txBody>
-          <a:bodyPr rtlCol="0" anchor="ctr"/>
-          <a:lstStyle/>
-          <a:p>
-            <a:pPr algn="ctr"/>
-          </a:p>
-        </p:txBody>
-      </p:sp>
-      <p:sp>
-        <p:nvSpPr>
-          <p:cNvPr id="9" name="Oval 8"/>
-          <p:cNvSpPr/>
-          <p:nvPr/>
-        </p:nvSpPr>
-        <p:spPr>
-          <a:xfrm>
-            <a:off x="731520" y="2788920"/>
-            <a:ext cx="365760" cy="365760"/>
-          </a:xfrm>
-          <a:prstGeom prst="ellipse">
-            <a:avLst/>
-          </a:prstGeom>
-          <a:solidFill>
-            <a:srgbClr val="13294B"/>
-          </a:solidFill>
-          <a:ln>
-            <a:noFill/>
-          </a:ln>
-        </p:spPr>
-        <p:txBody>
-          <a:bodyPr rtlCol="0" anchor="ctr"/>
-          <a:lstStyle/>
-          <a:p>
-            <a:pPr algn="ctr"/>
-          </a:p>
-        </p:txBody>
-      </p:sp>
-      <p:sp>
-        <p:nvSpPr>
-          <p:cNvPr id="10" name="TextBox 9"/>
-          <p:cNvSpPr txBox="1"/>
-          <p:nvPr/>
-        </p:nvSpPr>
-        <p:spPr>
-          <a:xfrm>
-            <a:off x="731520" y="2788920"/>
-            <a:ext cx="365760" cy="365760"/>
-          </a:xfrm>
-          <a:prstGeom prst="rect">
-            <a:avLst/>
-          </a:prstGeom>
-          <a:noFill/>
-        </p:spPr>
-        <p:txBody>
-          <a:bodyPr wrap="square" anchor="ctr"/>
-          <a:lstStyle/>
-          <a:p>
-            <a:pPr algn="ctr">
-              <a:lnSpc>
-                <a:spcPct val="110000"/>
-              </a:lnSpc>
-            </a:pPr>
-            <a:r>
-              <a:rPr sz="1300" b="1">
-                <a:solidFill>
-                  <a:srgbClr val="FFFFFF"/>
-                </a:solidFill>
-                <a:latin typeface="맑은 고딕"/>
-                <a:ea typeface="맑은 고딕"/>
-                <a:cs typeface="맑은 고딕"/>
-              </a:rPr>
-              <a:t>1</a:t>
-            </a:r>
-          </a:p>
-        </p:txBody>
-      </p:sp>
-      <p:sp>
-        <p:nvSpPr>
-          <p:cNvPr id="11" name="TextBox 10"/>
-          <p:cNvSpPr txBox="1"/>
-          <p:nvPr/>
-        </p:nvSpPr>
-        <p:spPr>
-          <a:xfrm>
-            <a:off x="1234440" y="2514600"/>
-            <a:ext cx="10225735" cy="914400"/>
-          </a:xfrm>
-          <a:prstGeom prst="rect">
-            <a:avLst/>
-          </a:prstGeom>
-          <a:noFill/>
-        </p:spPr>
-        <p:txBody>
-          <a:bodyPr wrap="square" anchor="ctr"/>
-          <a:lstStyle/>
-          <a:p>
-            <a:pPr algn="l">
-              <a:lnSpc>
-                <a:spcPct val="110000"/>
-              </a:lnSpc>
-            </a:pPr>
-            <a:r>
-              <a:rPr sz="1550" b="1">
-                <a:solidFill>
-                  <a:srgbClr val="1F2A3A"/>
-                </a:solidFill>
-                <a:latin typeface="맑은 고딕"/>
-                <a:ea typeface="맑은 고딕"/>
-                <a:cs typeface="맑은 고딕"/>
-              </a:rPr>
-              <a:t>read_rows 하나</a:t>
-            </a:r>
-          </a:p>
-        </p:txBody>
-      </p:sp>
-      <p:sp>
-        <p:nvSpPr>
-          <p:cNvPr id="12" name="Rounded Rectangle 11"/>
-          <p:cNvSpPr/>
-          <p:nvPr/>
-        </p:nvSpPr>
-        <p:spPr>
-          <a:xfrm>
-            <a:off x="548640" y="3474720"/>
-            <a:ext cx="11094415" cy="822960"/>
-          </a:xfrm>
-          <a:prstGeom prst="roundRect">
-            <a:avLst>
-              <a:gd name="adj" fmla="val 8000"/>
-            </a:avLst>
-          </a:prstGeom>
-          <a:solidFill>
-            <a:srgbClr val="F3F6F9"/>
-          </a:solidFill>
-          <a:ln>
-            <a:noFill/>
-          </a:ln>
-        </p:spPr>
-        <p:txBody>
-          <a:bodyPr rtlCol="0" anchor="ctr"/>
-          <a:lstStyle/>
-          <a:p>
-            <a:pPr algn="ctr"/>
-          </a:p>
-        </p:txBody>
-      </p:sp>
-      <p:sp>
-        <p:nvSpPr>
-          <p:cNvPr id="13" name="Oval 12"/>
-          <p:cNvSpPr/>
-          <p:nvPr/>
-        </p:nvSpPr>
-        <p:spPr>
-          <a:xfrm>
-            <a:off x="731520" y="3703320"/>
-            <a:ext cx="365760" cy="365760"/>
-          </a:xfrm>
-          <a:prstGeom prst="ellipse">
-            <a:avLst/>
-          </a:prstGeom>
-          <a:solidFill>
-            <a:srgbClr val="13294B"/>
-          </a:solidFill>
-          <a:ln>
-            <a:noFill/>
-          </a:ln>
-        </p:spPr>
-        <p:txBody>
-          <a:bodyPr rtlCol="0" anchor="ctr"/>
-          <a:lstStyle/>
-          <a:p>
-            <a:pPr algn="ctr"/>
-          </a:p>
-        </p:txBody>
-      </p:sp>
-      <p:sp>
-        <p:nvSpPr>
-          <p:cNvPr id="14" name="TextBox 13"/>
-          <p:cNvSpPr txBox="1"/>
-          <p:nvPr/>
-        </p:nvSpPr>
-        <p:spPr>
-          <a:xfrm>
-            <a:off x="731520" y="3703320"/>
-            <a:ext cx="365760" cy="365760"/>
-          </a:xfrm>
-          <a:prstGeom prst="rect">
-            <a:avLst/>
-          </a:prstGeom>
-          <a:noFill/>
-        </p:spPr>
-        <p:txBody>
-          <a:bodyPr wrap="square" anchor="ctr"/>
-          <a:lstStyle/>
-          <a:p>
-            <a:pPr algn="ctr">
-              <a:lnSpc>
-                <a:spcPct val="110000"/>
-              </a:lnSpc>
-            </a:pPr>
-            <a:r>
-              <a:rPr sz="1300" b="1">
-                <a:solidFill>
-                  <a:srgbClr val="FFFFFF"/>
-                </a:solidFill>
-                <a:latin typeface="맑은 고딕"/>
-                <a:ea typeface="맑은 고딕"/>
-                <a:cs typeface="맑은 고딕"/>
-              </a:rPr>
-              <a:t>2</a:t>
-            </a:r>
-          </a:p>
-        </p:txBody>
-      </p:sp>
-      <p:sp>
-        <p:nvSpPr>
-          <p:cNvPr id="15" name="TextBox 14"/>
-          <p:cNvSpPr txBox="1"/>
-          <p:nvPr/>
-        </p:nvSpPr>
-        <p:spPr>
-          <a:xfrm>
-            <a:off x="1234440" y="3429000"/>
-            <a:ext cx="10225735" cy="914400"/>
-          </a:xfrm>
-          <a:prstGeom prst="rect">
-            <a:avLst/>
-          </a:prstGeom>
-          <a:noFill/>
-        </p:spPr>
-        <p:txBody>
-          <a:bodyPr wrap="square" anchor="ctr"/>
-          <a:lstStyle/>
-          <a:p>
-            <a:pPr algn="l">
-              <a:lnSpc>
-                <a:spcPct val="110000"/>
-              </a:lnSpc>
-            </a:pPr>
-            <a:r>
-              <a:rPr sz="1550" b="1">
-                <a:solidFill>
-                  <a:srgbClr val="1F2A3A"/>
-                </a:solidFill>
-                <a:latin typeface="맑은 고딕"/>
-                <a:ea typeface="맑은 고딕"/>
-                <a:cs typeface="맑은 고딕"/>
-              </a:rPr>
-              <a:t>read_rows와 export</a:t>
-            </a:r>
-          </a:p>
-        </p:txBody>
-      </p:sp>
-      <p:sp>
-        <p:nvSpPr>
-          <p:cNvPr id="16" name="Rounded Rectangle 15"/>
-          <p:cNvSpPr/>
-          <p:nvPr/>
-        </p:nvSpPr>
-        <p:spPr>
-          <a:xfrm>
-            <a:off x="548640" y="4389120"/>
-            <a:ext cx="11094415" cy="822960"/>
-          </a:xfrm>
-          <a:prstGeom prst="roundRect">
-            <a:avLst>
-              <a:gd name="adj" fmla="val 8000"/>
-            </a:avLst>
-          </a:prstGeom>
-          <a:solidFill>
-            <a:srgbClr val="F3F6F9"/>
-          </a:solidFill>
-          <a:ln>
-            <a:noFill/>
-          </a:ln>
-        </p:spPr>
-        <p:txBody>
-          <a:bodyPr rtlCol="0" anchor="ctr"/>
-          <a:lstStyle/>
-          <a:p>
-            <a:pPr algn="ctr"/>
-          </a:p>
-        </p:txBody>
-      </p:sp>
-      <p:sp>
-        <p:nvSpPr>
-          <p:cNvPr id="17" name="Oval 16"/>
-          <p:cNvSpPr/>
-          <p:nvPr/>
-        </p:nvSpPr>
-        <p:spPr>
-          <a:xfrm>
-            <a:off x="731520" y="4617720"/>
-            <a:ext cx="365760" cy="365760"/>
-          </a:xfrm>
-          <a:prstGeom prst="ellipse">
-            <a:avLst/>
-          </a:prstGeom>
-          <a:solidFill>
-            <a:srgbClr val="13294B"/>
-          </a:solidFill>
-          <a:ln>
-            <a:noFill/>
-          </a:ln>
-        </p:spPr>
-        <p:txBody>
-          <a:bodyPr rtlCol="0" anchor="ctr"/>
-          <a:lstStyle/>
-          <a:p>
-            <a:pPr algn="ctr"/>
-          </a:p>
-        </p:txBody>
-      </p:sp>
-      <p:sp>
-        <p:nvSpPr>
-          <p:cNvPr id="18" name="TextBox 17"/>
-          <p:cNvSpPr txBox="1"/>
-          <p:nvPr/>
-        </p:nvSpPr>
-        <p:spPr>
-          <a:xfrm>
-            <a:off x="731520" y="4617720"/>
-            <a:ext cx="365760" cy="365760"/>
-          </a:xfrm>
-          <a:prstGeom prst="rect">
-            <a:avLst/>
-          </a:prstGeom>
-          <a:noFill/>
-        </p:spPr>
-        <p:txBody>
-          <a:bodyPr wrap="square" anchor="ctr"/>
-          <a:lstStyle/>
-          <a:p>
-            <a:pPr algn="ctr">
-              <a:lnSpc>
-                <a:spcPct val="110000"/>
-              </a:lnSpc>
-            </a:pPr>
-            <a:r>
-              <a:rPr sz="1300" b="1">
-                <a:solidFill>
-                  <a:srgbClr val="FFFFFF"/>
-                </a:solidFill>
-                <a:latin typeface="맑은 고딕"/>
-                <a:ea typeface="맑은 고딕"/>
-                <a:cs typeface="맑은 고딕"/>
-              </a:rPr>
-              <a:t>3</a:t>
-            </a:r>
-          </a:p>
-        </p:txBody>
-      </p:sp>
-      <p:sp>
-        <p:nvSpPr>
-          <p:cNvPr id="19" name="TextBox 18"/>
-          <p:cNvSpPr txBox="1"/>
-          <p:nvPr/>
-        </p:nvSpPr>
-        <p:spPr>
-          <a:xfrm>
-            <a:off x="1234440" y="4343400"/>
-            <a:ext cx="10225735" cy="914400"/>
-          </a:xfrm>
-          <a:prstGeom prst="rect">
-            <a:avLst/>
-          </a:prstGeom>
-          <a:noFill/>
-        </p:spPr>
-        <p:txBody>
-          <a:bodyPr wrap="square" anchor="ctr"/>
-          <a:lstStyle/>
-          <a:p>
-            <a:pPr algn="l">
-              <a:lnSpc>
-                <a:spcPct val="110000"/>
-              </a:lnSpc>
-            </a:pPr>
-            <a:r>
-              <a:rPr sz="1550" b="1">
-                <a:solidFill>
-                  <a:srgbClr val="1F2A3A"/>
-                </a:solidFill>
-                <a:latin typeface="맑은 고딕"/>
-                <a:ea typeface="맑은 고딕"/>
-                <a:cs typeface="맑은 고딕"/>
-              </a:rPr>
-              <a:t>세 도구 모두</a:t>
-            </a:r>
-          </a:p>
-        </p:txBody>
-      </p:sp>
-      <p:sp>
-        <p:nvSpPr>
-          <p:cNvPr id="20" name="Rounded Rectangle 19"/>
-          <p:cNvSpPr/>
-          <p:nvPr/>
-        </p:nvSpPr>
-        <p:spPr>
-          <a:xfrm>
-            <a:off x="548640" y="5303520"/>
-            <a:ext cx="11094415" cy="822960"/>
-          </a:xfrm>
-          <a:prstGeom prst="roundRect">
-            <a:avLst>
-              <a:gd name="adj" fmla="val 8000"/>
-            </a:avLst>
-          </a:prstGeom>
-          <a:solidFill>
-            <a:srgbClr val="F3F6F9"/>
-          </a:solidFill>
-          <a:ln>
-            <a:noFill/>
-          </a:ln>
-        </p:spPr>
-        <p:txBody>
-          <a:bodyPr rtlCol="0" anchor="ctr"/>
-          <a:lstStyle/>
-          <a:p>
-            <a:pPr algn="ctr"/>
-          </a:p>
-        </p:txBody>
-      </p:sp>
-      <p:sp>
-        <p:nvSpPr>
-          <p:cNvPr id="21" name="Oval 20"/>
-          <p:cNvSpPr/>
-          <p:nvPr/>
-        </p:nvSpPr>
-        <p:spPr>
-          <a:xfrm>
-            <a:off x="731520" y="5532120"/>
-            <a:ext cx="365760" cy="365760"/>
-          </a:xfrm>
-          <a:prstGeom prst="ellipse">
-            <a:avLst/>
-          </a:prstGeom>
-          <a:solidFill>
-            <a:srgbClr val="13294B"/>
-          </a:solidFill>
-          <a:ln>
-            <a:noFill/>
-          </a:ln>
-        </p:spPr>
-        <p:txBody>
-          <a:bodyPr rtlCol="0" anchor="ctr"/>
-          <a:lstStyle/>
-          <a:p>
-            <a:pPr algn="ctr"/>
-          </a:p>
-        </p:txBody>
-      </p:sp>
-      <p:sp>
-        <p:nvSpPr>
-          <p:cNvPr id="22" name="TextBox 21"/>
-          <p:cNvSpPr txBox="1"/>
-          <p:nvPr/>
-        </p:nvSpPr>
-        <p:spPr>
-          <a:xfrm>
-            <a:off x="731520" y="5532120"/>
-            <a:ext cx="365760" cy="365760"/>
-          </a:xfrm>
-          <a:prstGeom prst="rect">
-            <a:avLst/>
-          </a:prstGeom>
-          <a:noFill/>
-        </p:spPr>
-        <p:txBody>
-          <a:bodyPr wrap="square" anchor="ctr"/>
-          <a:lstStyle/>
-          <a:p>
-            <a:pPr algn="ctr">
-              <a:lnSpc>
-                <a:spcPct val="110000"/>
-              </a:lnSpc>
-            </a:pPr>
-            <a:r>
-              <a:rPr sz="1300" b="1">
-                <a:solidFill>
-                  <a:srgbClr val="FFFFFF"/>
-                </a:solidFill>
-                <a:latin typeface="맑은 고딕"/>
-                <a:ea typeface="맑은 고딕"/>
-                <a:cs typeface="맑은 고딕"/>
-              </a:rPr>
-              <a:t>4</a:t>
-            </a:r>
-          </a:p>
-        </p:txBody>
-      </p:sp>
-      <p:sp>
-        <p:nvSpPr>
-          <p:cNvPr id="23" name="TextBox 22"/>
-          <p:cNvSpPr txBox="1"/>
-          <p:nvPr/>
-        </p:nvSpPr>
-        <p:spPr>
-          <a:xfrm>
-            <a:off x="1234440" y="5257800"/>
-            <a:ext cx="10225735" cy="914400"/>
-          </a:xfrm>
-          <a:prstGeom prst="rect">
-            <a:avLst/>
-          </a:prstGeom>
-          <a:noFill/>
-        </p:spPr>
-        <p:txBody>
-          <a:bodyPr wrap="square" anchor="ctr"/>
-          <a:lstStyle/>
-          <a:p>
-            <a:pPr algn="l">
-              <a:lnSpc>
-                <a:spcPct val="110000"/>
-              </a:lnSpc>
-            </a:pPr>
-            <a:r>
-              <a:rPr sz="1550" b="1">
-                <a:solidFill>
-                  <a:srgbClr val="1F2A3A"/>
-                </a:solidFill>
-                <a:latin typeface="맑은 고딕"/>
-                <a:ea typeface="맑은 고딕"/>
-                <a:cs typeface="맑은 고딕"/>
-              </a:rPr>
-              <a:t>오르는 도구가 없다</a:t>
-            </a:r>
-          </a:p>
-        </p:txBody>
-      </p:sp>
-    </p:spTree>
-  </p:cSld>
-  <p:clrMapOvr>
-    <a:masterClrMapping/>
-  </p:clrMapOvr>
-</p:sld>
-</file>
-
-<file path=ppt/slides/slide76.xml><?xml version="1.0" encoding="utf-8"?>
-<p:sld xmlns:a="http://schemas.openxmlformats.org/drawingml/2006/main" xmlns:p="http://schemas.openxmlformats.org/presentationml/2006/main" xmlns:r="http://schemas.openxmlformats.org/officeDocument/2006/relationships">
-  <p:cSld>
-    <p:bg>
-      <p:bgPr>
-        <a:solidFill>
-          <a:srgbClr val="FFFFFF"/>
-        </a:solidFill>
-        <a:effectLst/>
-      </p:bgPr>
-    </p:bg>
-    <p:spTree>
-      <p:nvGrpSpPr>
-        <p:cNvPr id="1" name=""/>
-        <p:cNvGrpSpPr/>
-        <p:nvPr/>
-      </p:nvGrpSpPr>
-      <p:grpSpPr/>
-      <p:sp>
-        <p:nvSpPr>
-          <p:cNvPr id="2" name="TextBox 1"/>
-          <p:cNvSpPr txBox="1"/>
-          <p:nvPr/>
-        </p:nvSpPr>
-        <p:spPr>
-          <a:xfrm>
-            <a:off x="457200" y="329184"/>
-            <a:ext cx="11277295" cy="603504"/>
-          </a:xfrm>
-          <a:prstGeom prst="rect">
-            <a:avLst/>
-          </a:prstGeom>
-          <a:noFill/>
-        </p:spPr>
-        <p:txBody>
-          <a:bodyPr wrap="square" anchor="ctr"/>
-          <a:lstStyle/>
-          <a:p>
-            <a:pPr algn="l">
-              <a:lnSpc>
-                <a:spcPct val="110000"/>
-              </a:lnSpc>
-            </a:pPr>
-            <a:r>
-              <a:rPr sz="2800" b="1">
-                <a:solidFill>
-                  <a:srgbClr val="13294B"/>
-                </a:solidFill>
-                <a:latin typeface="맑은 고딕"/>
-                <a:ea typeface="맑은 고딕"/>
-                <a:cs typeface="맑은 고딕"/>
-              </a:rPr>
-              <a:t>정답과 판단 기준</a:t>
-            </a:r>
-          </a:p>
-        </p:txBody>
-      </p:sp>
-      <p:sp>
-        <p:nvSpPr>
-          <p:cNvPr id="3" name="TextBox 2"/>
-          <p:cNvSpPr txBox="1"/>
-          <p:nvPr/>
-        </p:nvSpPr>
-        <p:spPr>
-          <a:xfrm>
-            <a:off x="457200" y="932688"/>
-            <a:ext cx="11277295" cy="420624"/>
-          </a:xfrm>
-          <a:prstGeom prst="rect">
-            <a:avLst/>
-          </a:prstGeom>
-          <a:noFill/>
-        </p:spPr>
-        <p:txBody>
-          <a:bodyPr wrap="square" anchor="ctr"/>
-          <a:lstStyle/>
-          <a:p>
-            <a:pPr algn="l">
-              <a:lnSpc>
-                <a:spcPct val="110000"/>
-              </a:lnSpc>
-            </a:pPr>
-            <a:r>
-              <a:rPr sz="1600" b="0">
-                <a:solidFill>
-                  <a:srgbClr val="556175"/>
-                </a:solidFill>
-                <a:latin typeface="맑은 고딕"/>
-                <a:ea typeface="맑은 고딕"/>
-                <a:cs typeface="맑은 고딕"/>
-              </a:rPr>
-              <a:t>세 문항은 실행 고리의 단계, 스킬과 도구의 역할, 읽기와 쓰기의 경계를 올바른 기준으로 판단하는지를 확인한다.</a:t>
-            </a:r>
-          </a:p>
-        </p:txBody>
-      </p:sp>
-      <p:sp>
-        <p:nvSpPr>
-          <p:cNvPr id="4" name="Rectangle 3"/>
-          <p:cNvSpPr/>
-          <p:nvPr/>
-        </p:nvSpPr>
-        <p:spPr>
-          <a:xfrm>
-            <a:off x="548640" y="1408176"/>
-            <a:ext cx="11094415" cy="18288"/>
-          </a:xfrm>
-          <a:prstGeom prst="rect">
-            <a:avLst/>
-          </a:prstGeom>
-          <a:solidFill>
-            <a:srgbClr val="D3D9E1"/>
-          </a:solidFill>
-          <a:ln>
-            <a:noFill/>
-          </a:ln>
-        </p:spPr>
-        <p:txBody>
-          <a:bodyPr rtlCol="0" anchor="ctr"/>
-          <a:lstStyle/>
-          <a:p>
-            <a:pPr algn="ctr"/>
-          </a:p>
-        </p:txBody>
-      </p:sp>
-      <p:sp>
-        <p:nvSpPr>
-          <p:cNvPr id="5" name="TextBox 4"/>
-          <p:cNvSpPr txBox="1"/>
-          <p:nvPr/>
-        </p:nvSpPr>
-        <p:spPr>
-          <a:xfrm>
-            <a:off x="10911535" y="6473952"/>
-            <a:ext cx="822960" cy="274320"/>
-          </a:xfrm>
-          <a:prstGeom prst="rect">
-            <a:avLst/>
-          </a:prstGeom>
-          <a:noFill/>
-        </p:spPr>
-        <p:txBody>
-          <a:bodyPr wrap="square" anchor="t"/>
-          <a:lstStyle/>
-          <a:p>
-            <a:pPr algn="r">
-              <a:lnSpc>
-                <a:spcPct val="110000"/>
-              </a:lnSpc>
-            </a:pPr>
-            <a:r>
-              <a:rPr sz="1000" b="0">
-                <a:solidFill>
-                  <a:srgbClr val="556175"/>
-                </a:solidFill>
-                <a:latin typeface="맑은 고딕"/>
-                <a:ea typeface="맑은 고딕"/>
-                <a:cs typeface="맑은 고딕"/>
-              </a:rPr>
-              <a:t>76</a:t>
             </a:r>
           </a:p>
         </p:txBody>

--- a/docs/교재/실전반/04일차/실전반_04일차.pptx
+++ b/docs/교재/실전반/04일차/실전반_04일차.pptx
@@ -1836,7 +1836,7 @@
           <a:lstStyle/>
           <a:p>
             <a:r>
-              <a:t>둘째 실습은 VS Code에서 Claude Code로 진행합니다. 공용 온톨로지의 관계와 제공된 센서 입력을 읽어 후보 원인과 증거, 다음 점검 순서를 내는 에이전트를 구성합니다. 여러 센서의 증거를 함께 견주어 후보를 가립니다. 확인되지 않은 원인은 단정하지 않고 가설로 표시해야 합니다. 끝나면 점검 계획과 그 계획에 쓴 근거가 파일로 남습니다.</a:t>
+              <a:t>둘째 실습은 바이브 코딩으로 진행합니다. 공용 온톨로지의 관계와 제공된 센서 입력을 읽어 후보 원인과 증거, 다음 점검 순서를 내는 에이전트를 구성합니다. 여러 센서의 증거를 함께 견주어 후보를 가립니다. 확인되지 않은 원인은 단정하지 않고 가설로 표시해야 합니다. 끝나면 점검 계획과 그 계획에 쓴 근거가 파일로 남습니다.</a:t>
             </a:r>
           </a:p>
         </p:txBody>
@@ -4496,7 +4496,7 @@
           <a:lstStyle/>
           <a:p>
             <a:r>
-              <a:t>넷째 실습은 두 곳에서 진행합니다. 먼저 HYD 포털에서 업무 DB 서버의 연결 상태를 확인하고 읽기 도구를 불러 봅니다. 다음으로 VS Code의 Claude Code에 파일시스템, Git, 시간 서버를 연결하고 접근 권한을 서버별로 정합니다. 파일 내용과 변경 이력과 시간을 한 요청에서 이어 불러 작업 요약을 만든 뒤, 서버마다 허용된 일과 호출이 실패했을 때의 모습을 견줍니다. 포털과 로컬의 연결 방식이 어떻게 다른지도 이 실습에서 확인합니다.</a:t>
+              <a:t>넷째 실습은 두 곳에서 진행합니다. 먼저 HYD 포털에서 업무 DB 서버의 연결 상태를 확인하고 읽기 도구를 불러 봅니다. 다음으로 VS Code의 AI 코딩 도구에 파일시스템, Git, 시간 서버를 연결하고 접근 권한을 서버별로 정합니다. 파일 내용과 변경 이력과 시간을 한 요청에서 이어 불러 작업 요약을 만든 뒤, 서버마다 허용된 일과 호출이 실패했을 때의 모습을 견줍니다. HYD 포털과 내 PC의 AI 코딩 도구가 MCP 서버를 연결하는 방식이 어떻게 다른지도 이 실습에서 확인합니다.</a:t>
             </a:r>
           </a:p>
         </p:txBody>
@@ -9542,7 +9542,7 @@
       </p:sp>
       <p:pic>
         <p:nvPicPr>
-          <p:cNvPr id="6" name="삽화:세요소.svg" descr="illust_6670120925673199773_1791735250.png"/>
+          <p:cNvPr id="6" name="삽화:세요소.svg" descr="illust_8495011544698738542_1791735250.png"/>
           <p:cNvPicPr>
             <a:picLocks noChangeAspect="1"/>
           </p:cNvPicPr>
@@ -11664,7 +11664,7 @@
       </p:sp>
       <p:pic>
         <p:nvPicPr>
-          <p:cNvPr id="6" name="삽화:실행고리.svg" descr="illust_4693071040427843878_1791735250.png"/>
+          <p:cNvPr id="6" name="삽화:실행고리.svg" descr="illust_1499885710521281045_1791735250.png"/>
           <p:cNvPicPr>
             <a:picLocks noChangeAspect="1"/>
           </p:cNvPicPr>
@@ -16349,7 +16349,7 @@
       </p:sp>
       <p:pic>
         <p:nvPicPr>
-          <p:cNvPr id="6" name="삽화:정보원.svg" descr="illust_775941256131757674_1791735250.png"/>
+          <p:cNvPr id="6" name="삽화:정보원.svg" descr="illust_1207295199093210764_1791735250.png"/>
           <p:cNvPicPr>
             <a:picLocks noChangeAspect="1"/>
           </p:cNvPicPr>
@@ -17743,7 +17743,7 @@
                 <a:ea typeface="맑은 고딕"/>
                 <a:cs typeface="맑은 고딕"/>
               </a:rPr>
-              <a:t>• 읽기와 쓰기 권한, 포털과 로컬 설정의 차이를 가른다</a:t>
+              <a:t>• 읽기와 쓰기 권한, HYD 포털과 내 PC의 연결 설정 차이를 가른다</a:t>
             </a:r>
           </a:p>
         </p:txBody>
@@ -20875,7 +20875,7 @@
       </p:sp>
       <p:pic>
         <p:nvPicPr>
-          <p:cNvPr id="6" name="삽화:멈춤조건.svg" descr="illust_8474791342643968985_1791735250.png"/>
+          <p:cNvPr id="6" name="삽화:멈춤조건.svg" descr="illust_3427199882230546007_1791735250.png"/>
           <p:cNvPicPr>
             <a:picLocks noChangeAspect="1"/>
           </p:cNvPicPr>
@@ -23137,7 +23137,7 @@
       </p:sp>
       <p:pic>
         <p:nvPicPr>
-          <p:cNvPr id="6" name="삽화:기록한줄.svg" descr="illust_5188464059972121371_1791735250.png"/>
+          <p:cNvPr id="6" name="삽화:기록한줄.svg" descr="illust_1565776255342279920_1791735250.png"/>
           <p:cNvPicPr>
             <a:picLocks noChangeAspect="1"/>
           </p:cNvPicPr>
@@ -26570,7 +26570,7 @@
                 <a:ea typeface="맑은 고딕"/>
                 <a:cs typeface="맑은 고딕"/>
               </a:rPr>
-              <a:t>Claude Code로 온톨로지의 관계와 센서 입력을 읽어 점검 계획을 내는 에이전트를 구성한다</a:t>
+              <a:t>바이브 코딩으로 온톨로지의 관계와 센서 입력을 읽어 점검 계획을 내는 에이전트를 구성한다</a:t>
             </a:r>
           </a:p>
         </p:txBody>
@@ -29155,7 +29155,7 @@
       </p:sp>
       <p:pic>
         <p:nvPicPr>
-          <p:cNvPr id="6" name="삽화:고리_1.svg" descr="illust_5007806839519906772_1791735675.png"/>
+          <p:cNvPr id="6" name="삽화:고리_1.svg" descr="illust_4965427766025240498_1791735675.png"/>
           <p:cNvPicPr>
             <a:picLocks noChangeAspect="1"/>
           </p:cNvPicPr>
@@ -35230,7 +35230,7 @@
       </p:sp>
       <p:pic>
         <p:nvPicPr>
-          <p:cNvPr id="6" name="삽화:스킬문서.svg" descr="illust_4630668348003285818_1791735675.png"/>
+          <p:cNvPr id="6" name="삽화:스킬문서.svg" descr="illust_1173196485788735055_1791735675.png"/>
           <p:cNvPicPr>
             <a:picLocks noChangeAspect="1"/>
           </p:cNvPicPr>
@@ -37590,7 +37590,7 @@
       </p:sp>
       <p:pic>
         <p:nvPicPr>
-          <p:cNvPr id="6" name="삽화:두절차.svg" descr="illust_3518305939232830028_1791735675.png"/>
+          <p:cNvPr id="6" name="삽화:두절차.svg" descr="illust_2844115896382075919_1791735675.png"/>
           <p:cNvPicPr>
             <a:picLocks noChangeAspect="1"/>
           </p:cNvPicPr>
@@ -40052,7 +40052,7 @@
       </p:sp>
       <p:pic>
         <p:nvPicPr>
-          <p:cNvPr id="6" name="삽화:재사용.svg" descr="illust_6985987034256217349_1791735675.png"/>
+          <p:cNvPr id="6" name="삽화:재사용.svg" descr="illust_2839535988957602707_1791735675.png"/>
           <p:cNvPicPr>
             <a:picLocks noChangeAspect="1"/>
           </p:cNvPicPr>
@@ -42776,7 +42776,7 @@
       </p:sp>
       <p:pic>
         <p:nvPicPr>
-          <p:cNvPr id="6" name="삽화:경보에서승인까지.svg" descr="illust_5336304385122508287_1791735250.png"/>
+          <p:cNvPr id="6" name="삽화:경보에서승인까지.svg" descr="illust_8916441836045718434_1791735250.png"/>
           <p:cNvPicPr>
             <a:picLocks noChangeAspect="1"/>
           </p:cNvPicPr>
@@ -45110,7 +45110,7 @@
       </p:sp>
       <p:pic>
         <p:nvPicPr>
-          <p:cNvPr id="6" name="삽화:연결의수.svg" descr="illust_1486224702544256063_1791735675.png"/>
+          <p:cNvPr id="6" name="삽화:연결의수.svg" descr="illust_527015050346186081_1791735675.png"/>
           <p:cNvPicPr>
             <a:picLocks noChangeAspect="1"/>
           </p:cNvPicPr>
@@ -46281,7 +46281,7 @@
       </p:sp>
       <p:pic>
         <p:nvPicPr>
-          <p:cNvPr id="6" name="삽화:MCP구성.svg" descr="illust_3892529053356455772_1791735675.png"/>
+          <p:cNvPr id="6" name="삽화:MCP구성.svg" descr="illust_3559231179292144866_1791735675.png"/>
           <p:cNvPicPr>
             <a:picLocks noChangeAspect="1"/>
           </p:cNvPicPr>
@@ -47796,7 +47796,7 @@
       </p:sp>
       <p:pic>
         <p:nvPicPr>
-          <p:cNvPr id="6" name="삽화:목록호출.svg" descr="illust_392534856505014236_1791735675.png"/>
+          <p:cNvPr id="6" name="삽화:목록호출.svg" descr="illust_3082628076202264662_1791735675.png"/>
           <p:cNvPicPr>
             <a:picLocks noChangeAspect="1"/>
           </p:cNvPicPr>
@@ -51993,7 +51993,7 @@
       </p:sp>
       <p:pic>
         <p:nvPicPr>
-          <p:cNvPr id="6" name="삽화:연결방식.svg" descr="illust_9026940787731190732_1791735675.png"/>
+          <p:cNvPr id="6" name="삽화:연결방식.svg" descr="illust_119611907396185154_1791735675.png"/>
           <p:cNvPicPr>
             <a:picLocks noChangeAspect="1"/>
           </p:cNvPicPr>
@@ -55121,7 +55121,7 @@
       </p:sp>
       <p:pic>
         <p:nvPicPr>
-          <p:cNvPr id="6" name="삽화:세겹.svg" descr="illust_6614440016078075325_1791735675.png"/>
+          <p:cNvPr id="6" name="삽화:세겹.svg" descr="illust_3062992777927865566_1791735675.png"/>
           <p:cNvPicPr>
             <a:picLocks noChangeAspect="1"/>
           </p:cNvPicPr>
@@ -57484,7 +57484,7 @@
                 <a:ea typeface="맑은 고딕"/>
                 <a:cs typeface="맑은 고딕"/>
               </a:rPr>
-              <a:t>HYD의 읽기 도구를 확인하고 Claude Code에 파일시스템, Git, 시간 서버를 연결해 조합한다</a:t>
+              <a:t>HYD의 읽기 도구를 확인하고 AI 코딩 도구에 파일시스템, Git, 시간 서버를 연결해 조합한다</a:t>
             </a:r>
           </a:p>
         </p:txBody>
@@ -58042,7 +58042,7 @@
                 <a:ea typeface="맑은 고딕"/>
                 <a:cs typeface="맑은 고딕"/>
               </a:rPr>
-              <a:t>Claude Code에</a:t>
+              <a:t>AI 코딩 도구에</a:t>
             </a:r>
           </a:p>
           <a:p>
